--- a/Теория вероятности/Теория вероятности.pptx
+++ b/Теория вероятности/Теория вероятности.pptx
@@ -2,7 +2,7 @@
 <file path=ppt/presentation.xml><?xml version="1.0" encoding="utf-8"?>
 <p:presentation xmlns:a="http://schemas.openxmlformats.org/drawingml/2006/main" xmlns:r="http://schemas.openxmlformats.org/officeDocument/2006/relationships" xmlns:p="http://schemas.openxmlformats.org/presentationml/2006/main" showSpecialPlsOnTitleSld="0" autoCompressPictures="0">
   <p:sldMasterIdLst>
-    <p:sldMasterId id="2147483720" r:id="rId1"/>
+    <p:sldMasterId id="2147483732" r:id="rId1"/>
   </p:sldMasterIdLst>
   <p:notesMasterIdLst>
     <p:notesMasterId r:id="rId22"/>
@@ -134,6 +134,800 @@
 </p:presentation>
 </file>
 
+<file path=ppt/revisionInfo.xml><?xml version="1.0" encoding="utf-8"?>
+<p1510:revInfo xmlns:a="http://schemas.openxmlformats.org/drawingml/2006/main" xmlns:r="http://schemas.openxmlformats.org/officeDocument/2006/relationships" xmlns:p1510="http://schemas.microsoft.com/office/powerpoint/2015/10/main">
+  <p1510:revLst>
+    <p1510:client id="{A72D04BE-A922-4B3C-BBB4-0B0B2747A523}" v="1" dt="2022-09-15T06:36:54.643"/>
+  </p1510:revLst>
+</p1510:revInfo>
+</file>
+
+<file path=ppt/changesInfos/changesInfo1.xml><?xml version="1.0" encoding="utf-8"?>
+<pc:chgInfo xmlns:a="http://schemas.openxmlformats.org/drawingml/2006/main" xmlns:r="http://schemas.openxmlformats.org/officeDocument/2006/relationships" xmlns:ac="http://schemas.microsoft.com/office/drawing/2013/main/command" xmlns:pc="http://schemas.microsoft.com/office/powerpoint/2013/main/command">
+  <pc:docChgLst>
+    <pc:chgData name="Alexander Nozik" userId="188c02ae713a829a" providerId="LiveId" clId="{A72D04BE-A922-4B3C-BBB4-0B0B2747A523}"/>
+    <pc:docChg chg="custSel modSld">
+      <pc:chgData name="Alexander Nozik" userId="188c02ae713a829a" providerId="LiveId" clId="{A72D04BE-A922-4B3C-BBB4-0B0B2747A523}" dt="2022-09-15T06:37:36.565" v="24" actId="1076"/>
+      <pc:docMkLst>
+        <pc:docMk/>
+      </pc:docMkLst>
+      <pc:sldChg chg="modSp">
+        <pc:chgData name="Alexander Nozik" userId="188c02ae713a829a" providerId="LiveId" clId="{A72D04BE-A922-4B3C-BBB4-0B0B2747A523}" dt="2022-09-15T06:36:54.642" v="1"/>
+        <pc:sldMkLst>
+          <pc:docMk/>
+          <pc:sldMk cId="378621725" sldId="256"/>
+        </pc:sldMkLst>
+        <pc:spChg chg="mod">
+          <ac:chgData name="Alexander Nozik" userId="188c02ae713a829a" providerId="LiveId" clId="{A72D04BE-A922-4B3C-BBB4-0B0B2747A523}" dt="2022-09-15T06:36:54.642" v="1"/>
+          <ac:spMkLst>
+            <pc:docMk/>
+            <pc:sldMk cId="378621725" sldId="256"/>
+            <ac:spMk id="2" creationId="{CE74D1AB-D7FA-47D3-BCC5-C95A09A95F3D}"/>
+          </ac:spMkLst>
+        </pc:spChg>
+        <pc:spChg chg="mod">
+          <ac:chgData name="Alexander Nozik" userId="188c02ae713a829a" providerId="LiveId" clId="{A72D04BE-A922-4B3C-BBB4-0B0B2747A523}" dt="2022-09-15T06:36:54.642" v="1"/>
+          <ac:spMkLst>
+            <pc:docMk/>
+            <pc:sldMk cId="378621725" sldId="256"/>
+            <ac:spMk id="3" creationId="{64D3A963-A576-4A28-AC5D-577FD03377B3}"/>
+          </ac:spMkLst>
+        </pc:spChg>
+      </pc:sldChg>
+      <pc:sldChg chg="modSp mod">
+        <pc:chgData name="Alexander Nozik" userId="188c02ae713a829a" providerId="LiveId" clId="{A72D04BE-A922-4B3C-BBB4-0B0B2747A523}" dt="2022-09-15T06:36:54.697" v="2" actId="27636"/>
+        <pc:sldMkLst>
+          <pc:docMk/>
+          <pc:sldMk cId="1030603496" sldId="257"/>
+        </pc:sldMkLst>
+        <pc:spChg chg="mod">
+          <ac:chgData name="Alexander Nozik" userId="188c02ae713a829a" providerId="LiveId" clId="{A72D04BE-A922-4B3C-BBB4-0B0B2747A523}" dt="2022-09-15T06:36:54.642" v="1"/>
+          <ac:spMkLst>
+            <pc:docMk/>
+            <pc:sldMk cId="1030603496" sldId="257"/>
+            <ac:spMk id="2" creationId="{09A89284-0E0B-4C5A-BC1F-7AB456684EF9}"/>
+          </ac:spMkLst>
+        </pc:spChg>
+        <pc:spChg chg="mod">
+          <ac:chgData name="Alexander Nozik" userId="188c02ae713a829a" providerId="LiveId" clId="{A72D04BE-A922-4B3C-BBB4-0B0B2747A523}" dt="2022-09-15T06:36:54.642" v="1"/>
+          <ac:spMkLst>
+            <pc:docMk/>
+            <pc:sldMk cId="1030603496" sldId="257"/>
+            <ac:spMk id="3" creationId="{E3C202FB-869C-49D2-973C-81646C63B5EA}"/>
+          </ac:spMkLst>
+        </pc:spChg>
+        <pc:spChg chg="mod">
+          <ac:chgData name="Alexander Nozik" userId="188c02ae713a829a" providerId="LiveId" clId="{A72D04BE-A922-4B3C-BBB4-0B0B2747A523}" dt="2022-09-15T06:36:54.642" v="1"/>
+          <ac:spMkLst>
+            <pc:docMk/>
+            <pc:sldMk cId="1030603496" sldId="257"/>
+            <ac:spMk id="4" creationId="{8C607963-6A87-4FA8-8FB4-075844742304}"/>
+          </ac:spMkLst>
+        </pc:spChg>
+        <pc:spChg chg="mod">
+          <ac:chgData name="Alexander Nozik" userId="188c02ae713a829a" providerId="LiveId" clId="{A72D04BE-A922-4B3C-BBB4-0B0B2747A523}" dt="2022-09-15T06:36:54.697" v="2" actId="27636"/>
+          <ac:spMkLst>
+            <pc:docMk/>
+            <pc:sldMk cId="1030603496" sldId="257"/>
+            <ac:spMk id="5" creationId="{1B311467-ADD8-49D1-8B16-D7E6FA3D365B}"/>
+          </ac:spMkLst>
+        </pc:spChg>
+      </pc:sldChg>
+      <pc:sldChg chg="modSp mod">
+        <pc:chgData name="Alexander Nozik" userId="188c02ae713a829a" providerId="LiveId" clId="{A72D04BE-A922-4B3C-BBB4-0B0B2747A523}" dt="2022-09-15T06:36:54.790" v="4" actId="27636"/>
+        <pc:sldMkLst>
+          <pc:docMk/>
+          <pc:sldMk cId="333133245" sldId="260"/>
+        </pc:sldMkLst>
+        <pc:spChg chg="mod">
+          <ac:chgData name="Alexander Nozik" userId="188c02ae713a829a" providerId="LiveId" clId="{A72D04BE-A922-4B3C-BBB4-0B0B2747A523}" dt="2022-09-15T06:36:54.642" v="1"/>
+          <ac:spMkLst>
+            <pc:docMk/>
+            <pc:sldMk cId="333133245" sldId="260"/>
+            <ac:spMk id="2" creationId="{C2E38123-AE1A-491C-B676-FB2D010E3615}"/>
+          </ac:spMkLst>
+        </pc:spChg>
+        <pc:spChg chg="mod">
+          <ac:chgData name="Alexander Nozik" userId="188c02ae713a829a" providerId="LiveId" clId="{A72D04BE-A922-4B3C-BBB4-0B0B2747A523}" dt="2022-09-15T06:36:54.642" v="1"/>
+          <ac:spMkLst>
+            <pc:docMk/>
+            <pc:sldMk cId="333133245" sldId="260"/>
+            <ac:spMk id="3" creationId="{C55ABE98-1371-4110-9E52-95B769AA94AD}"/>
+          </ac:spMkLst>
+        </pc:spChg>
+        <pc:spChg chg="mod">
+          <ac:chgData name="Alexander Nozik" userId="188c02ae713a829a" providerId="LiveId" clId="{A72D04BE-A922-4B3C-BBB4-0B0B2747A523}" dt="2022-09-15T06:36:54.642" v="1"/>
+          <ac:spMkLst>
+            <pc:docMk/>
+            <pc:sldMk cId="333133245" sldId="260"/>
+            <ac:spMk id="4" creationId="{96F5C992-0563-4399-A039-307B30081FF1}"/>
+          </ac:spMkLst>
+        </pc:spChg>
+        <pc:spChg chg="mod">
+          <ac:chgData name="Alexander Nozik" userId="188c02ae713a829a" providerId="LiveId" clId="{A72D04BE-A922-4B3C-BBB4-0B0B2747A523}" dt="2022-09-15T06:36:54.790" v="4" actId="27636"/>
+          <ac:spMkLst>
+            <pc:docMk/>
+            <pc:sldMk cId="333133245" sldId="260"/>
+            <ac:spMk id="5" creationId="{BB372440-3AD2-4648-981E-EAAA790985DA}"/>
+          </ac:spMkLst>
+        </pc:spChg>
+      </pc:sldChg>
+      <pc:sldChg chg="modSp mod">
+        <pc:chgData name="Alexander Nozik" userId="188c02ae713a829a" providerId="LiveId" clId="{A72D04BE-A922-4B3C-BBB4-0B0B2747A523}" dt="2022-09-15T06:36:54.793" v="6" actId="27636"/>
+        <pc:sldMkLst>
+          <pc:docMk/>
+          <pc:sldMk cId="1561451263" sldId="261"/>
+        </pc:sldMkLst>
+        <pc:spChg chg="mod">
+          <ac:chgData name="Alexander Nozik" userId="188c02ae713a829a" providerId="LiveId" clId="{A72D04BE-A922-4B3C-BBB4-0B0B2747A523}" dt="2022-09-15T06:36:54.642" v="1"/>
+          <ac:spMkLst>
+            <pc:docMk/>
+            <pc:sldMk cId="1561451263" sldId="261"/>
+            <ac:spMk id="2" creationId="{00000000-0000-0000-0000-000000000000}"/>
+          </ac:spMkLst>
+        </pc:spChg>
+        <pc:spChg chg="mod">
+          <ac:chgData name="Alexander Nozik" userId="188c02ae713a829a" providerId="LiveId" clId="{A72D04BE-A922-4B3C-BBB4-0B0B2747A523}" dt="2022-09-15T06:36:54.642" v="1"/>
+          <ac:spMkLst>
+            <pc:docMk/>
+            <pc:sldMk cId="1561451263" sldId="261"/>
+            <ac:spMk id="3" creationId="{1C254B26-F231-433E-AEC8-7B5C2885F6D9}"/>
+          </ac:spMkLst>
+        </pc:spChg>
+        <pc:spChg chg="mod">
+          <ac:chgData name="Alexander Nozik" userId="188c02ae713a829a" providerId="LiveId" clId="{A72D04BE-A922-4B3C-BBB4-0B0B2747A523}" dt="2022-09-15T06:36:54.793" v="6" actId="27636"/>
+          <ac:spMkLst>
+            <pc:docMk/>
+            <pc:sldMk cId="1561451263" sldId="261"/>
+            <ac:spMk id="13" creationId="{E85E0EE7-3565-4209-88B4-133067EB40C7}"/>
+          </ac:spMkLst>
+        </pc:spChg>
+      </pc:sldChg>
+      <pc:sldChg chg="modSp mod">
+        <pc:chgData name="Alexander Nozik" userId="188c02ae713a829a" providerId="LiveId" clId="{A72D04BE-A922-4B3C-BBB4-0B0B2747A523}" dt="2022-09-15T06:36:54.792" v="5" actId="27636"/>
+        <pc:sldMkLst>
+          <pc:docMk/>
+          <pc:sldMk cId="1744787609" sldId="262"/>
+        </pc:sldMkLst>
+        <pc:spChg chg="mod">
+          <ac:chgData name="Alexander Nozik" userId="188c02ae713a829a" providerId="LiveId" clId="{A72D04BE-A922-4B3C-BBB4-0B0B2747A523}" dt="2022-09-15T06:36:54.642" v="1"/>
+          <ac:spMkLst>
+            <pc:docMk/>
+            <pc:sldMk cId="1744787609" sldId="262"/>
+            <ac:spMk id="2" creationId="{00000000-0000-0000-0000-000000000000}"/>
+          </ac:spMkLst>
+        </pc:spChg>
+        <pc:spChg chg="mod">
+          <ac:chgData name="Alexander Nozik" userId="188c02ae713a829a" providerId="LiveId" clId="{A72D04BE-A922-4B3C-BBB4-0B0B2747A523}" dt="2022-09-15T06:36:54.792" v="5" actId="27636"/>
+          <ac:spMkLst>
+            <pc:docMk/>
+            <pc:sldMk cId="1744787609" sldId="262"/>
+            <ac:spMk id="3" creationId="{00000000-0000-0000-0000-000000000000}"/>
+          </ac:spMkLst>
+        </pc:spChg>
+        <pc:spChg chg="mod">
+          <ac:chgData name="Alexander Nozik" userId="188c02ae713a829a" providerId="LiveId" clId="{A72D04BE-A922-4B3C-BBB4-0B0B2747A523}" dt="2022-09-15T06:36:54.642" v="1"/>
+          <ac:spMkLst>
+            <pc:docMk/>
+            <pc:sldMk cId="1744787609" sldId="262"/>
+            <ac:spMk id="4" creationId="{3F8701E3-F14D-4F84-B7B5-17CBBD91A8B1}"/>
+          </ac:spMkLst>
+        </pc:spChg>
+        <pc:spChg chg="mod">
+          <ac:chgData name="Alexander Nozik" userId="188c02ae713a829a" providerId="LiveId" clId="{A72D04BE-A922-4B3C-BBB4-0B0B2747A523}" dt="2022-09-15T06:36:54.642" v="1"/>
+          <ac:spMkLst>
+            <pc:docMk/>
+            <pc:sldMk cId="1744787609" sldId="262"/>
+            <ac:spMk id="5" creationId="{00000000-0000-0000-0000-000000000000}"/>
+          </ac:spMkLst>
+        </pc:spChg>
+      </pc:sldChg>
+      <pc:sldChg chg="modSp mod">
+        <pc:chgData name="Alexander Nozik" userId="188c02ae713a829a" providerId="LiveId" clId="{A72D04BE-A922-4B3C-BBB4-0B0B2747A523}" dt="2022-09-15T06:36:54.796" v="7" actId="27636"/>
+        <pc:sldMkLst>
+          <pc:docMk/>
+          <pc:sldMk cId="2741868192" sldId="263"/>
+        </pc:sldMkLst>
+        <pc:spChg chg="mod">
+          <ac:chgData name="Alexander Nozik" userId="188c02ae713a829a" providerId="LiveId" clId="{A72D04BE-A922-4B3C-BBB4-0B0B2747A523}" dt="2022-09-15T06:36:54.642" v="1"/>
+          <ac:spMkLst>
+            <pc:docMk/>
+            <pc:sldMk cId="2741868192" sldId="263"/>
+            <ac:spMk id="2" creationId="{00000000-0000-0000-0000-000000000000}"/>
+          </ac:spMkLst>
+        </pc:spChg>
+        <pc:spChg chg="mod">
+          <ac:chgData name="Alexander Nozik" userId="188c02ae713a829a" providerId="LiveId" clId="{A72D04BE-A922-4B3C-BBB4-0B0B2747A523}" dt="2022-09-15T06:36:54.642" v="1"/>
+          <ac:spMkLst>
+            <pc:docMk/>
+            <pc:sldMk cId="2741868192" sldId="263"/>
+            <ac:spMk id="3" creationId="{00000000-0000-0000-0000-000000000000}"/>
+          </ac:spMkLst>
+        </pc:spChg>
+        <pc:spChg chg="mod">
+          <ac:chgData name="Alexander Nozik" userId="188c02ae713a829a" providerId="LiveId" clId="{A72D04BE-A922-4B3C-BBB4-0B0B2747A523}" dt="2022-09-15T06:36:54.796" v="7" actId="27636"/>
+          <ac:spMkLst>
+            <pc:docMk/>
+            <pc:sldMk cId="2741868192" sldId="263"/>
+            <ac:spMk id="4" creationId="{00000000-0000-0000-0000-000000000000}"/>
+          </ac:spMkLst>
+        </pc:spChg>
+        <pc:spChg chg="mod">
+          <ac:chgData name="Alexander Nozik" userId="188c02ae713a829a" providerId="LiveId" clId="{A72D04BE-A922-4B3C-BBB4-0B0B2747A523}" dt="2022-09-15T06:36:54.642" v="1"/>
+          <ac:spMkLst>
+            <pc:docMk/>
+            <pc:sldMk cId="2741868192" sldId="263"/>
+            <ac:spMk id="5" creationId="{836C129D-2BBA-4548-826C-E59A7E8FB30C}"/>
+          </ac:spMkLst>
+        </pc:spChg>
+      </pc:sldChg>
+      <pc:sldChg chg="modSp mod">
+        <pc:chgData name="Alexander Nozik" userId="188c02ae713a829a" providerId="LiveId" clId="{A72D04BE-A922-4B3C-BBB4-0B0B2747A523}" dt="2022-09-15T06:36:54.797" v="8" actId="27636"/>
+        <pc:sldMkLst>
+          <pc:docMk/>
+          <pc:sldMk cId="1213773067" sldId="264"/>
+        </pc:sldMkLst>
+        <pc:spChg chg="mod">
+          <ac:chgData name="Alexander Nozik" userId="188c02ae713a829a" providerId="LiveId" clId="{A72D04BE-A922-4B3C-BBB4-0B0B2747A523}" dt="2022-09-15T06:36:54.642" v="1"/>
+          <ac:spMkLst>
+            <pc:docMk/>
+            <pc:sldMk cId="1213773067" sldId="264"/>
+            <ac:spMk id="3" creationId="{00000000-0000-0000-0000-000000000000}"/>
+          </ac:spMkLst>
+        </pc:spChg>
+        <pc:spChg chg="mod">
+          <ac:chgData name="Alexander Nozik" userId="188c02ae713a829a" providerId="LiveId" clId="{A72D04BE-A922-4B3C-BBB4-0B0B2747A523}" dt="2022-09-15T06:36:54.797" v="8" actId="27636"/>
+          <ac:spMkLst>
+            <pc:docMk/>
+            <pc:sldMk cId="1213773067" sldId="264"/>
+            <ac:spMk id="4" creationId="{00000000-0000-0000-0000-000000000000}"/>
+          </ac:spMkLst>
+        </pc:spChg>
+        <pc:spChg chg="mod">
+          <ac:chgData name="Alexander Nozik" userId="188c02ae713a829a" providerId="LiveId" clId="{A72D04BE-A922-4B3C-BBB4-0B0B2747A523}" dt="2022-09-15T06:36:54.642" v="1"/>
+          <ac:spMkLst>
+            <pc:docMk/>
+            <pc:sldMk cId="1213773067" sldId="264"/>
+            <ac:spMk id="5" creationId="{01CF0B04-93D2-4F61-9819-1B3309EFA3D8}"/>
+          </ac:spMkLst>
+        </pc:spChg>
+        <pc:spChg chg="mod">
+          <ac:chgData name="Alexander Nozik" userId="188c02ae713a829a" providerId="LiveId" clId="{A72D04BE-A922-4B3C-BBB4-0B0B2747A523}" dt="2022-09-15T06:36:54.642" v="1"/>
+          <ac:spMkLst>
+            <pc:docMk/>
+            <pc:sldMk cId="1213773067" sldId="264"/>
+            <ac:spMk id="6" creationId="{DAD7CD04-4EB2-482F-9485-57EA5C19E739}"/>
+          </ac:spMkLst>
+        </pc:spChg>
+      </pc:sldChg>
+      <pc:sldChg chg="modSp mod">
+        <pc:chgData name="Alexander Nozik" userId="188c02ae713a829a" providerId="LiveId" clId="{A72D04BE-A922-4B3C-BBB4-0B0B2747A523}" dt="2022-09-15T06:36:54.808" v="9" actId="27636"/>
+        <pc:sldMkLst>
+          <pc:docMk/>
+          <pc:sldMk cId="396352453" sldId="265"/>
+        </pc:sldMkLst>
+        <pc:spChg chg="mod">
+          <ac:chgData name="Alexander Nozik" userId="188c02ae713a829a" providerId="LiveId" clId="{A72D04BE-A922-4B3C-BBB4-0B0B2747A523}" dt="2022-09-15T06:36:54.642" v="1"/>
+          <ac:spMkLst>
+            <pc:docMk/>
+            <pc:sldMk cId="396352453" sldId="265"/>
+            <ac:spMk id="3" creationId="{00000000-0000-0000-0000-000000000000}"/>
+          </ac:spMkLst>
+        </pc:spChg>
+        <pc:spChg chg="mod">
+          <ac:chgData name="Alexander Nozik" userId="188c02ae713a829a" providerId="LiveId" clId="{A72D04BE-A922-4B3C-BBB4-0B0B2747A523}" dt="2022-09-15T06:36:54.808" v="9" actId="27636"/>
+          <ac:spMkLst>
+            <pc:docMk/>
+            <pc:sldMk cId="396352453" sldId="265"/>
+            <ac:spMk id="6" creationId="{00000000-0000-0000-0000-000000000000}"/>
+          </ac:spMkLst>
+        </pc:spChg>
+        <pc:spChg chg="mod">
+          <ac:chgData name="Alexander Nozik" userId="188c02ae713a829a" providerId="LiveId" clId="{A72D04BE-A922-4B3C-BBB4-0B0B2747A523}" dt="2022-09-15T06:36:54.642" v="1"/>
+          <ac:spMkLst>
+            <pc:docMk/>
+            <pc:sldMk cId="396352453" sldId="265"/>
+            <ac:spMk id="8" creationId="{03F31918-E775-49AC-98F4-ED3EDD0F4232}"/>
+          </ac:spMkLst>
+        </pc:spChg>
+      </pc:sldChg>
+      <pc:sldChg chg="delSp modSp mod delDesignElem">
+        <pc:chgData name="Alexander Nozik" userId="188c02ae713a829a" providerId="LiveId" clId="{A72D04BE-A922-4B3C-BBB4-0B0B2747A523}" dt="2022-09-15T06:36:54.814" v="11" actId="27636"/>
+        <pc:sldMkLst>
+          <pc:docMk/>
+          <pc:sldMk cId="1244588644" sldId="266"/>
+        </pc:sldMkLst>
+        <pc:spChg chg="mod">
+          <ac:chgData name="Alexander Nozik" userId="188c02ae713a829a" providerId="LiveId" clId="{A72D04BE-A922-4B3C-BBB4-0B0B2747A523}" dt="2022-09-15T06:36:54.814" v="11" actId="27636"/>
+          <ac:spMkLst>
+            <pc:docMk/>
+            <pc:sldMk cId="1244588644" sldId="266"/>
+            <ac:spMk id="2" creationId="{00000000-0000-0000-0000-000000000000}"/>
+          </ac:spMkLst>
+        </pc:spChg>
+        <pc:spChg chg="mod">
+          <ac:chgData name="Alexander Nozik" userId="188c02ae713a829a" providerId="LiveId" clId="{A72D04BE-A922-4B3C-BBB4-0B0B2747A523}" dt="2022-09-15T06:36:54.812" v="10" actId="27636"/>
+          <ac:spMkLst>
+            <pc:docMk/>
+            <pc:sldMk cId="1244588644" sldId="266"/>
+            <ac:spMk id="4" creationId="{00000000-0000-0000-0000-000000000000}"/>
+          </ac:spMkLst>
+        </pc:spChg>
+        <pc:spChg chg="mod">
+          <ac:chgData name="Alexander Nozik" userId="188c02ae713a829a" providerId="LiveId" clId="{A72D04BE-A922-4B3C-BBB4-0B0B2747A523}" dt="2022-09-15T06:36:54.642" v="1"/>
+          <ac:spMkLst>
+            <pc:docMk/>
+            <pc:sldMk cId="1244588644" sldId="266"/>
+            <ac:spMk id="6" creationId="{CA79006F-2D84-410B-A935-1E464DA03E4A}"/>
+          </ac:spMkLst>
+        </pc:spChg>
+        <pc:spChg chg="del">
+          <ac:chgData name="Alexander Nozik" userId="188c02ae713a829a" providerId="LiveId" clId="{A72D04BE-A922-4B3C-BBB4-0B0B2747A523}" dt="2022-09-15T06:36:54.642" v="1"/>
+          <ac:spMkLst>
+            <pc:docMk/>
+            <pc:sldMk cId="1244588644" sldId="266"/>
+            <ac:spMk id="10" creationId="{52ABB703-2B0E-4C3B-B4A2-F3973548E561}"/>
+          </ac:spMkLst>
+        </pc:spChg>
+        <pc:spChg chg="del">
+          <ac:chgData name="Alexander Nozik" userId="188c02ae713a829a" providerId="LiveId" clId="{A72D04BE-A922-4B3C-BBB4-0B0B2747A523}" dt="2022-09-15T06:36:54.642" v="1"/>
+          <ac:spMkLst>
+            <pc:docMk/>
+            <pc:sldMk cId="1244588644" sldId="266"/>
+            <ac:spMk id="12" creationId="{82A73093-4B9D-420D-B17E-52293703A1D4}"/>
+          </ac:spMkLst>
+        </pc:spChg>
+        <pc:spChg chg="del">
+          <ac:chgData name="Alexander Nozik" userId="188c02ae713a829a" providerId="LiveId" clId="{A72D04BE-A922-4B3C-BBB4-0B0B2747A523}" dt="2022-09-15T06:36:54.642" v="1"/>
+          <ac:spMkLst>
+            <pc:docMk/>
+            <pc:sldMk cId="1244588644" sldId="266"/>
+            <ac:spMk id="14" creationId="{E95DA498-D9A2-4DA9-B9DA-B3776E08CF7E}"/>
+          </ac:spMkLst>
+        </pc:spChg>
+        <pc:cxnChg chg="del">
+          <ac:chgData name="Alexander Nozik" userId="188c02ae713a829a" providerId="LiveId" clId="{A72D04BE-A922-4B3C-BBB4-0B0B2747A523}" dt="2022-09-15T06:36:54.642" v="1"/>
+          <ac:cxnSpMkLst>
+            <pc:docMk/>
+            <pc:sldMk cId="1244588644" sldId="266"/>
+            <ac:cxnSpMk id="16" creationId="{9C21570E-E159-49A6-9891-FA397B7A92D3}"/>
+          </ac:cxnSpMkLst>
+        </pc:cxnChg>
+      </pc:sldChg>
+      <pc:sldChg chg="modSp mod">
+        <pc:chgData name="Alexander Nozik" userId="188c02ae713a829a" providerId="LiveId" clId="{A72D04BE-A922-4B3C-BBB4-0B0B2747A523}" dt="2022-09-15T06:36:54.824" v="13" actId="27636"/>
+        <pc:sldMkLst>
+          <pc:docMk/>
+          <pc:sldMk cId="3175178280" sldId="267"/>
+        </pc:sldMkLst>
+        <pc:spChg chg="mod">
+          <ac:chgData name="Alexander Nozik" userId="188c02ae713a829a" providerId="LiveId" clId="{A72D04BE-A922-4B3C-BBB4-0B0B2747A523}" dt="2022-09-15T06:36:54.642" v="1"/>
+          <ac:spMkLst>
+            <pc:docMk/>
+            <pc:sldMk cId="3175178280" sldId="267"/>
+            <ac:spMk id="2" creationId="{00000000-0000-0000-0000-000000000000}"/>
+          </ac:spMkLst>
+        </pc:spChg>
+        <pc:spChg chg="mod">
+          <ac:chgData name="Alexander Nozik" userId="188c02ae713a829a" providerId="LiveId" clId="{A72D04BE-A922-4B3C-BBB4-0B0B2747A523}" dt="2022-09-15T06:36:54.824" v="13" actId="27636"/>
+          <ac:spMkLst>
+            <pc:docMk/>
+            <pc:sldMk cId="3175178280" sldId="267"/>
+            <ac:spMk id="3" creationId="{00000000-0000-0000-0000-000000000000}"/>
+          </ac:spMkLst>
+        </pc:spChg>
+        <pc:spChg chg="mod">
+          <ac:chgData name="Alexander Nozik" userId="188c02ae713a829a" providerId="LiveId" clId="{A72D04BE-A922-4B3C-BBB4-0B0B2747A523}" dt="2022-09-15T06:36:54.642" v="1"/>
+          <ac:spMkLst>
+            <pc:docMk/>
+            <pc:sldMk cId="3175178280" sldId="267"/>
+            <ac:spMk id="4" creationId="{E2E3EB63-5F14-44DE-96E3-C1A4DE09B304}"/>
+          </ac:spMkLst>
+        </pc:spChg>
+        <pc:spChg chg="mod">
+          <ac:chgData name="Alexander Nozik" userId="188c02ae713a829a" providerId="LiveId" clId="{A72D04BE-A922-4B3C-BBB4-0B0B2747A523}" dt="2022-09-15T06:36:54.816" v="12" actId="27636"/>
+          <ac:spMkLst>
+            <pc:docMk/>
+            <pc:sldMk cId="3175178280" sldId="267"/>
+            <ac:spMk id="6" creationId="{00000000-0000-0000-0000-000000000000}"/>
+          </ac:spMkLst>
+        </pc:spChg>
+      </pc:sldChg>
+      <pc:sldChg chg="modSp mod">
+        <pc:chgData name="Alexander Nozik" userId="188c02ae713a829a" providerId="LiveId" clId="{A72D04BE-A922-4B3C-BBB4-0B0B2747A523}" dt="2022-09-15T06:36:54.827" v="14" actId="27636"/>
+        <pc:sldMkLst>
+          <pc:docMk/>
+          <pc:sldMk cId="189975173" sldId="268"/>
+        </pc:sldMkLst>
+        <pc:spChg chg="mod">
+          <ac:chgData name="Alexander Nozik" userId="188c02ae713a829a" providerId="LiveId" clId="{A72D04BE-A922-4B3C-BBB4-0B0B2747A523}" dt="2022-09-15T06:36:54.827" v="14" actId="27636"/>
+          <ac:spMkLst>
+            <pc:docMk/>
+            <pc:sldMk cId="189975173" sldId="268"/>
+            <ac:spMk id="5" creationId="{00000000-0000-0000-0000-000000000000}"/>
+          </ac:spMkLst>
+        </pc:spChg>
+        <pc:spChg chg="mod">
+          <ac:chgData name="Alexander Nozik" userId="188c02ae713a829a" providerId="LiveId" clId="{A72D04BE-A922-4B3C-BBB4-0B0B2747A523}" dt="2022-09-15T06:36:54.642" v="1"/>
+          <ac:spMkLst>
+            <pc:docMk/>
+            <pc:sldMk cId="189975173" sldId="268"/>
+            <ac:spMk id="6" creationId="{EBF73713-FDF2-4820-BB70-7F6411B53EA9}"/>
+          </ac:spMkLst>
+        </pc:spChg>
+        <pc:spChg chg="mod">
+          <ac:chgData name="Alexander Nozik" userId="188c02ae713a829a" providerId="LiveId" clId="{A72D04BE-A922-4B3C-BBB4-0B0B2747A523}" dt="2022-09-15T06:36:54.642" v="1"/>
+          <ac:spMkLst>
+            <pc:docMk/>
+            <pc:sldMk cId="189975173" sldId="268"/>
+            <ac:spMk id="7" creationId="{86C98400-5305-438E-BA6D-F8D899DAEE85}"/>
+          </ac:spMkLst>
+        </pc:spChg>
+      </pc:sldChg>
+      <pc:sldChg chg="modSp mod">
+        <pc:chgData name="Alexander Nozik" userId="188c02ae713a829a" providerId="LiveId" clId="{A72D04BE-A922-4B3C-BBB4-0B0B2747A523}" dt="2022-09-15T06:36:54.830" v="15" actId="27636"/>
+        <pc:sldMkLst>
+          <pc:docMk/>
+          <pc:sldMk cId="1980106768" sldId="269"/>
+        </pc:sldMkLst>
+        <pc:spChg chg="mod">
+          <ac:chgData name="Alexander Nozik" userId="188c02ae713a829a" providerId="LiveId" clId="{A72D04BE-A922-4B3C-BBB4-0B0B2747A523}" dt="2022-09-15T06:36:54.642" v="1"/>
+          <ac:spMkLst>
+            <pc:docMk/>
+            <pc:sldMk cId="1980106768" sldId="269"/>
+            <ac:spMk id="2" creationId="{00000000-0000-0000-0000-000000000000}"/>
+          </ac:spMkLst>
+        </pc:spChg>
+        <pc:spChg chg="mod">
+          <ac:chgData name="Alexander Nozik" userId="188c02ae713a829a" providerId="LiveId" clId="{A72D04BE-A922-4B3C-BBB4-0B0B2747A523}" dt="2022-09-15T06:36:54.830" v="15" actId="27636"/>
+          <ac:spMkLst>
+            <pc:docMk/>
+            <pc:sldMk cId="1980106768" sldId="269"/>
+            <ac:spMk id="3" creationId="{00000000-0000-0000-0000-000000000000}"/>
+          </ac:spMkLst>
+        </pc:spChg>
+        <pc:spChg chg="mod">
+          <ac:chgData name="Alexander Nozik" userId="188c02ae713a829a" providerId="LiveId" clId="{A72D04BE-A922-4B3C-BBB4-0B0B2747A523}" dt="2022-09-15T06:36:54.642" v="1"/>
+          <ac:spMkLst>
+            <pc:docMk/>
+            <pc:sldMk cId="1980106768" sldId="269"/>
+            <ac:spMk id="4" creationId="{00000000-0000-0000-0000-000000000000}"/>
+          </ac:spMkLst>
+        </pc:spChg>
+        <pc:spChg chg="mod">
+          <ac:chgData name="Alexander Nozik" userId="188c02ae713a829a" providerId="LiveId" clId="{A72D04BE-A922-4B3C-BBB4-0B0B2747A523}" dt="2022-09-15T06:36:54.642" v="1"/>
+          <ac:spMkLst>
+            <pc:docMk/>
+            <pc:sldMk cId="1980106768" sldId="269"/>
+            <ac:spMk id="5" creationId="{943BBE71-28AE-4AA5-89AA-559B01AB5177}"/>
+          </ac:spMkLst>
+        </pc:spChg>
+      </pc:sldChg>
+      <pc:sldChg chg="modSp mod">
+        <pc:chgData name="Alexander Nozik" userId="188c02ae713a829a" providerId="LiveId" clId="{A72D04BE-A922-4B3C-BBB4-0B0B2747A523}" dt="2022-09-15T06:36:54.788" v="3" actId="27636"/>
+        <pc:sldMkLst>
+          <pc:docMk/>
+          <pc:sldMk cId="4238212391" sldId="270"/>
+        </pc:sldMkLst>
+        <pc:spChg chg="mod">
+          <ac:chgData name="Alexander Nozik" userId="188c02ae713a829a" providerId="LiveId" clId="{A72D04BE-A922-4B3C-BBB4-0B0B2747A523}" dt="2022-09-15T06:36:54.642" v="1"/>
+          <ac:spMkLst>
+            <pc:docMk/>
+            <pc:sldMk cId="4238212391" sldId="270"/>
+            <ac:spMk id="2" creationId="{3FBF9AA9-C624-42CB-9FA1-5B2B6A35DE47}"/>
+          </ac:spMkLst>
+        </pc:spChg>
+        <pc:spChg chg="mod">
+          <ac:chgData name="Alexander Nozik" userId="188c02ae713a829a" providerId="LiveId" clId="{A72D04BE-A922-4B3C-BBB4-0B0B2747A523}" dt="2022-09-15T06:36:54.788" v="3" actId="27636"/>
+          <ac:spMkLst>
+            <pc:docMk/>
+            <pc:sldMk cId="4238212391" sldId="270"/>
+            <ac:spMk id="3" creationId="{5E15CCDE-F7B1-4902-ACC2-861CCF712C01}"/>
+          </ac:spMkLst>
+        </pc:spChg>
+        <pc:spChg chg="mod">
+          <ac:chgData name="Alexander Nozik" userId="188c02ae713a829a" providerId="LiveId" clId="{A72D04BE-A922-4B3C-BBB4-0B0B2747A523}" dt="2022-09-15T06:36:54.642" v="1"/>
+          <ac:spMkLst>
+            <pc:docMk/>
+            <pc:sldMk cId="4238212391" sldId="270"/>
+            <ac:spMk id="4" creationId="{800EBDF6-223E-4620-80D0-C50940A8466D}"/>
+          </ac:spMkLst>
+        </pc:spChg>
+        <pc:spChg chg="mod">
+          <ac:chgData name="Alexander Nozik" userId="188c02ae713a829a" providerId="LiveId" clId="{A72D04BE-A922-4B3C-BBB4-0B0B2747A523}" dt="2022-09-15T06:36:54.642" v="1"/>
+          <ac:spMkLst>
+            <pc:docMk/>
+            <pc:sldMk cId="4238212391" sldId="270"/>
+            <ac:spMk id="5" creationId="{EEAF3505-833F-43C0-89F3-429172FD461F}"/>
+          </ac:spMkLst>
+        </pc:spChg>
+      </pc:sldChg>
+      <pc:sldChg chg="modSp mod">
+        <pc:chgData name="Alexander Nozik" userId="188c02ae713a829a" providerId="LiveId" clId="{A72D04BE-A922-4B3C-BBB4-0B0B2747A523}" dt="2022-09-15T06:36:54.833" v="16" actId="27636"/>
+        <pc:sldMkLst>
+          <pc:docMk/>
+          <pc:sldMk cId="2241813761" sldId="271"/>
+        </pc:sldMkLst>
+        <pc:spChg chg="mod">
+          <ac:chgData name="Alexander Nozik" userId="188c02ae713a829a" providerId="LiveId" clId="{A72D04BE-A922-4B3C-BBB4-0B0B2747A523}" dt="2022-09-15T06:36:54.642" v="1"/>
+          <ac:spMkLst>
+            <pc:docMk/>
+            <pc:sldMk cId="2241813761" sldId="271"/>
+            <ac:spMk id="2" creationId="{D0E875C7-DFD5-4073-8CF6-B8FC1FE8E250}"/>
+          </ac:spMkLst>
+        </pc:spChg>
+        <pc:spChg chg="mod">
+          <ac:chgData name="Alexander Nozik" userId="188c02ae713a829a" providerId="LiveId" clId="{A72D04BE-A922-4B3C-BBB4-0B0B2747A523}" dt="2022-09-15T06:36:54.833" v="16" actId="27636"/>
+          <ac:spMkLst>
+            <pc:docMk/>
+            <pc:sldMk cId="2241813761" sldId="271"/>
+            <ac:spMk id="3" creationId="{AC8B50FD-41C9-4012-8510-CD0D219FDA67}"/>
+          </ac:spMkLst>
+        </pc:spChg>
+        <pc:spChg chg="mod">
+          <ac:chgData name="Alexander Nozik" userId="188c02ae713a829a" providerId="LiveId" clId="{A72D04BE-A922-4B3C-BBB4-0B0B2747A523}" dt="2022-09-15T06:36:54.642" v="1"/>
+          <ac:spMkLst>
+            <pc:docMk/>
+            <pc:sldMk cId="2241813761" sldId="271"/>
+            <ac:spMk id="4" creationId="{DD611A73-88BD-4329-BD5C-9AF8E17F344D}"/>
+          </ac:spMkLst>
+        </pc:spChg>
+        <pc:spChg chg="mod">
+          <ac:chgData name="Alexander Nozik" userId="188c02ae713a829a" providerId="LiveId" clId="{A72D04BE-A922-4B3C-BBB4-0B0B2747A523}" dt="2022-09-15T06:36:54.642" v="1"/>
+          <ac:spMkLst>
+            <pc:docMk/>
+            <pc:sldMk cId="2241813761" sldId="271"/>
+            <ac:spMk id="5" creationId="{55045E0D-C39E-4C11-8C78-B3E1D9363339}"/>
+          </ac:spMkLst>
+        </pc:spChg>
+      </pc:sldChg>
+      <pc:sldChg chg="modSp mod">
+        <pc:chgData name="Alexander Nozik" userId="188c02ae713a829a" providerId="LiveId" clId="{A72D04BE-A922-4B3C-BBB4-0B0B2747A523}" dt="2022-09-15T06:36:54.846" v="17" actId="27636"/>
+        <pc:sldMkLst>
+          <pc:docMk/>
+          <pc:sldMk cId="4001365809" sldId="272"/>
+        </pc:sldMkLst>
+        <pc:spChg chg="mod">
+          <ac:chgData name="Alexander Nozik" userId="188c02ae713a829a" providerId="LiveId" clId="{A72D04BE-A922-4B3C-BBB4-0B0B2747A523}" dt="2022-09-15T06:36:54.642" v="1"/>
+          <ac:spMkLst>
+            <pc:docMk/>
+            <pc:sldMk cId="4001365809" sldId="272"/>
+            <ac:spMk id="2" creationId="{51A795B8-9923-4F23-8C0F-037B23F5995E}"/>
+          </ac:spMkLst>
+        </pc:spChg>
+        <pc:spChg chg="mod">
+          <ac:chgData name="Alexander Nozik" userId="188c02ae713a829a" providerId="LiveId" clId="{A72D04BE-A922-4B3C-BBB4-0B0B2747A523}" dt="2022-09-15T06:36:54.846" v="17" actId="27636"/>
+          <ac:spMkLst>
+            <pc:docMk/>
+            <pc:sldMk cId="4001365809" sldId="272"/>
+            <ac:spMk id="3" creationId="{D070FB43-DC0C-4548-ACE7-3F54338B0D51}"/>
+          </ac:spMkLst>
+        </pc:spChg>
+        <pc:spChg chg="mod">
+          <ac:chgData name="Alexander Nozik" userId="188c02ae713a829a" providerId="LiveId" clId="{A72D04BE-A922-4B3C-BBB4-0B0B2747A523}" dt="2022-09-15T06:36:54.642" v="1"/>
+          <ac:spMkLst>
+            <pc:docMk/>
+            <pc:sldMk cId="4001365809" sldId="272"/>
+            <ac:spMk id="4" creationId="{5AC922E6-B56C-443C-96F1-B9AE72CEA42E}"/>
+          </ac:spMkLst>
+        </pc:spChg>
+        <pc:spChg chg="mod">
+          <ac:chgData name="Alexander Nozik" userId="188c02ae713a829a" providerId="LiveId" clId="{A72D04BE-A922-4B3C-BBB4-0B0B2747A523}" dt="2022-09-15T06:36:54.642" v="1"/>
+          <ac:spMkLst>
+            <pc:docMk/>
+            <pc:sldMk cId="4001365809" sldId="272"/>
+            <ac:spMk id="5" creationId="{3DD7B267-3841-4554-A628-39648A3F9522}"/>
+          </ac:spMkLst>
+        </pc:spChg>
+      </pc:sldChg>
+      <pc:sldChg chg="modSp mod">
+        <pc:chgData name="Alexander Nozik" userId="188c02ae713a829a" providerId="LiveId" clId="{A72D04BE-A922-4B3C-BBB4-0B0B2747A523}" dt="2022-09-15T06:37:36.565" v="24" actId="1076"/>
+        <pc:sldMkLst>
+          <pc:docMk/>
+          <pc:sldMk cId="2565637908" sldId="273"/>
+        </pc:sldMkLst>
+        <pc:spChg chg="mod">
+          <ac:chgData name="Alexander Nozik" userId="188c02ae713a829a" providerId="LiveId" clId="{A72D04BE-A922-4B3C-BBB4-0B0B2747A523}" dt="2022-09-15T06:36:54.642" v="1"/>
+          <ac:spMkLst>
+            <pc:docMk/>
+            <pc:sldMk cId="2565637908" sldId="273"/>
+            <ac:spMk id="2" creationId="{4D28AB29-A30A-4A25-8583-9BE472E6F464}"/>
+          </ac:spMkLst>
+        </pc:spChg>
+        <pc:spChg chg="mod">
+          <ac:chgData name="Alexander Nozik" userId="188c02ae713a829a" providerId="LiveId" clId="{A72D04BE-A922-4B3C-BBB4-0B0B2747A523}" dt="2022-09-15T06:36:54.642" v="1"/>
+          <ac:spMkLst>
+            <pc:docMk/>
+            <pc:sldMk cId="2565637908" sldId="273"/>
+            <ac:spMk id="3" creationId="{CF545DE2-49F2-4833-B77B-CB549E961FBF}"/>
+          </ac:spMkLst>
+        </pc:spChg>
+        <pc:spChg chg="mod">
+          <ac:chgData name="Alexander Nozik" userId="188c02ae713a829a" providerId="LiveId" clId="{A72D04BE-A922-4B3C-BBB4-0B0B2747A523}" dt="2022-09-15T06:36:54.642" v="1"/>
+          <ac:spMkLst>
+            <pc:docMk/>
+            <pc:sldMk cId="2565637908" sldId="273"/>
+            <ac:spMk id="4" creationId="{B81D496C-0122-475C-B947-C374D0BBBD03}"/>
+          </ac:spMkLst>
+        </pc:spChg>
+        <pc:spChg chg="mod">
+          <ac:chgData name="Alexander Nozik" userId="188c02ae713a829a" providerId="LiveId" clId="{A72D04BE-A922-4B3C-BBB4-0B0B2747A523}" dt="2022-09-15T06:36:54.858" v="18" actId="27636"/>
+          <ac:spMkLst>
+            <pc:docMk/>
+            <pc:sldMk cId="2565637908" sldId="273"/>
+            <ac:spMk id="5" creationId="{A0539DFC-D1FC-4204-BDE2-C27B7AC02E92}"/>
+          </ac:spMkLst>
+        </pc:spChg>
+        <pc:spChg chg="mod">
+          <ac:chgData name="Alexander Nozik" userId="188c02ae713a829a" providerId="LiveId" clId="{A72D04BE-A922-4B3C-BBB4-0B0B2747A523}" dt="2022-09-15T06:37:36.565" v="24" actId="1076"/>
+          <ac:spMkLst>
+            <pc:docMk/>
+            <pc:sldMk cId="2565637908" sldId="273"/>
+            <ac:spMk id="9" creationId="{5EF4DDC9-B44D-42A2-A6CA-7D3EDA49F297}"/>
+          </ac:spMkLst>
+        </pc:spChg>
+        <pc:spChg chg="mod">
+          <ac:chgData name="Alexander Nozik" userId="188c02ae713a829a" providerId="LiveId" clId="{A72D04BE-A922-4B3C-BBB4-0B0B2747A523}" dt="2022-09-15T06:37:32.705" v="23" actId="1076"/>
+          <ac:spMkLst>
+            <pc:docMk/>
+            <pc:sldMk cId="2565637908" sldId="273"/>
+            <ac:spMk id="10" creationId="{23E75A29-C810-4580-B77D-896043AA1BB6}"/>
+          </ac:spMkLst>
+        </pc:spChg>
+      </pc:sldChg>
+      <pc:sldChg chg="modSp mod">
+        <pc:chgData name="Alexander Nozik" userId="188c02ae713a829a" providerId="LiveId" clId="{A72D04BE-A922-4B3C-BBB4-0B0B2747A523}" dt="2022-09-15T06:36:54.888" v="19" actId="27636"/>
+        <pc:sldMkLst>
+          <pc:docMk/>
+          <pc:sldMk cId="4143223573" sldId="274"/>
+        </pc:sldMkLst>
+        <pc:spChg chg="mod">
+          <ac:chgData name="Alexander Nozik" userId="188c02ae713a829a" providerId="LiveId" clId="{A72D04BE-A922-4B3C-BBB4-0B0B2747A523}" dt="2022-09-15T06:36:54.642" v="1"/>
+          <ac:spMkLst>
+            <pc:docMk/>
+            <pc:sldMk cId="4143223573" sldId="274"/>
+            <ac:spMk id="2" creationId="{01CDB9E5-5D83-4767-8741-971CD86E6EB3}"/>
+          </ac:spMkLst>
+        </pc:spChg>
+        <pc:spChg chg="mod">
+          <ac:chgData name="Alexander Nozik" userId="188c02ae713a829a" providerId="LiveId" clId="{A72D04BE-A922-4B3C-BBB4-0B0B2747A523}" dt="2022-09-15T06:36:54.642" v="1"/>
+          <ac:spMkLst>
+            <pc:docMk/>
+            <pc:sldMk cId="4143223573" sldId="274"/>
+            <ac:spMk id="3" creationId="{81A72AC1-8976-4615-9798-A5E85C7C9715}"/>
+          </ac:spMkLst>
+        </pc:spChg>
+        <pc:spChg chg="mod">
+          <ac:chgData name="Alexander Nozik" userId="188c02ae713a829a" providerId="LiveId" clId="{A72D04BE-A922-4B3C-BBB4-0B0B2747A523}" dt="2022-09-15T06:36:54.642" v="1"/>
+          <ac:spMkLst>
+            <pc:docMk/>
+            <pc:sldMk cId="4143223573" sldId="274"/>
+            <ac:spMk id="4" creationId="{86AE14B8-B717-489A-9313-BD9EDD175BD1}"/>
+          </ac:spMkLst>
+        </pc:spChg>
+        <pc:spChg chg="mod">
+          <ac:chgData name="Alexander Nozik" userId="188c02ae713a829a" providerId="LiveId" clId="{A72D04BE-A922-4B3C-BBB4-0B0B2747A523}" dt="2022-09-15T06:36:54.888" v="19" actId="27636"/>
+          <ac:spMkLst>
+            <pc:docMk/>
+            <pc:sldMk cId="4143223573" sldId="274"/>
+            <ac:spMk id="5" creationId="{A9226C2E-A42B-4D24-88B4-5E08BA6404AE}"/>
+          </ac:spMkLst>
+        </pc:spChg>
+      </pc:sldChg>
+      <pc:sldChg chg="modSp mod">
+        <pc:chgData name="Alexander Nozik" userId="188c02ae713a829a" providerId="LiveId" clId="{A72D04BE-A922-4B3C-BBB4-0B0B2747A523}" dt="2022-09-15T06:36:54.890" v="20" actId="27636"/>
+        <pc:sldMkLst>
+          <pc:docMk/>
+          <pc:sldMk cId="409313720" sldId="275"/>
+        </pc:sldMkLst>
+        <pc:spChg chg="mod">
+          <ac:chgData name="Alexander Nozik" userId="188c02ae713a829a" providerId="LiveId" clId="{A72D04BE-A922-4B3C-BBB4-0B0B2747A523}" dt="2022-09-15T06:36:54.642" v="1"/>
+          <ac:spMkLst>
+            <pc:docMk/>
+            <pc:sldMk cId="409313720" sldId="275"/>
+            <ac:spMk id="2" creationId="{54033E1F-4A8F-4B8C-A855-F33F340D3176}"/>
+          </ac:spMkLst>
+        </pc:spChg>
+        <pc:spChg chg="mod">
+          <ac:chgData name="Alexander Nozik" userId="188c02ae713a829a" providerId="LiveId" clId="{A72D04BE-A922-4B3C-BBB4-0B0B2747A523}" dt="2022-09-15T06:36:54.642" v="1"/>
+          <ac:spMkLst>
+            <pc:docMk/>
+            <pc:sldMk cId="409313720" sldId="275"/>
+            <ac:spMk id="3" creationId="{44DD29ED-AE87-456E-8A97-5E00B62CFB1A}"/>
+          </ac:spMkLst>
+        </pc:spChg>
+        <pc:spChg chg="mod">
+          <ac:chgData name="Alexander Nozik" userId="188c02ae713a829a" providerId="LiveId" clId="{A72D04BE-A922-4B3C-BBB4-0B0B2747A523}" dt="2022-09-15T06:36:54.642" v="1"/>
+          <ac:spMkLst>
+            <pc:docMk/>
+            <pc:sldMk cId="409313720" sldId="275"/>
+            <ac:spMk id="4" creationId="{B7B16250-A49C-496C-8CD9-EE13D1A6B0E1}"/>
+          </ac:spMkLst>
+        </pc:spChg>
+        <pc:spChg chg="mod">
+          <ac:chgData name="Alexander Nozik" userId="188c02ae713a829a" providerId="LiveId" clId="{A72D04BE-A922-4B3C-BBB4-0B0B2747A523}" dt="2022-09-15T06:36:54.890" v="20" actId="27636"/>
+          <ac:spMkLst>
+            <pc:docMk/>
+            <pc:sldMk cId="409313720" sldId="275"/>
+            <ac:spMk id="5" creationId="{B3F7FCD9-8003-447C-99DC-969779661A99}"/>
+          </ac:spMkLst>
+        </pc:spChg>
+      </pc:sldChg>
+      <pc:sldChg chg="modSp mod">
+        <pc:chgData name="Alexander Nozik" userId="188c02ae713a829a" providerId="LiveId" clId="{A72D04BE-A922-4B3C-BBB4-0B0B2747A523}" dt="2022-09-15T06:36:54.912" v="21" actId="27636"/>
+        <pc:sldMkLst>
+          <pc:docMk/>
+          <pc:sldMk cId="1408722571" sldId="276"/>
+        </pc:sldMkLst>
+        <pc:spChg chg="mod">
+          <ac:chgData name="Alexander Nozik" userId="188c02ae713a829a" providerId="LiveId" clId="{A72D04BE-A922-4B3C-BBB4-0B0B2747A523}" dt="2022-09-15T06:36:54.642" v="1"/>
+          <ac:spMkLst>
+            <pc:docMk/>
+            <pc:sldMk cId="1408722571" sldId="276"/>
+            <ac:spMk id="2" creationId="{0D56E106-23A4-4BF9-9973-7BD9C277F757}"/>
+          </ac:spMkLst>
+        </pc:spChg>
+        <pc:spChg chg="mod">
+          <ac:chgData name="Alexander Nozik" userId="188c02ae713a829a" providerId="LiveId" clId="{A72D04BE-A922-4B3C-BBB4-0B0B2747A523}" dt="2022-09-15T06:36:54.642" v="1"/>
+          <ac:spMkLst>
+            <pc:docMk/>
+            <pc:sldMk cId="1408722571" sldId="276"/>
+            <ac:spMk id="3" creationId="{59A489C2-CF77-4118-B718-290C58D561E6}"/>
+          </ac:spMkLst>
+        </pc:spChg>
+        <pc:spChg chg="mod">
+          <ac:chgData name="Alexander Nozik" userId="188c02ae713a829a" providerId="LiveId" clId="{A72D04BE-A922-4B3C-BBB4-0B0B2747A523}" dt="2022-09-15T06:36:54.642" v="1"/>
+          <ac:spMkLst>
+            <pc:docMk/>
+            <pc:sldMk cId="1408722571" sldId="276"/>
+            <ac:spMk id="4" creationId="{7595215F-21C2-420D-B2B7-13AF7AC0B56C}"/>
+          </ac:spMkLst>
+        </pc:spChg>
+        <pc:spChg chg="mod">
+          <ac:chgData name="Alexander Nozik" userId="188c02ae713a829a" providerId="LiveId" clId="{A72D04BE-A922-4B3C-BBB4-0B0B2747A523}" dt="2022-09-15T06:36:54.912" v="21" actId="27636"/>
+          <ac:spMkLst>
+            <pc:docMk/>
+            <pc:sldMk cId="1408722571" sldId="276"/>
+            <ac:spMk id="5" creationId="{3783BB86-0751-40CD-BE2A-3A182550AEFD}"/>
+          </ac:spMkLst>
+        </pc:spChg>
+      </pc:sldChg>
+      <pc:sldChg chg="modSp mod">
+        <pc:chgData name="Alexander Nozik" userId="188c02ae713a829a" providerId="LiveId" clId="{A72D04BE-A922-4B3C-BBB4-0B0B2747A523}" dt="2022-09-15T06:36:54.946" v="22" actId="27636"/>
+        <pc:sldMkLst>
+          <pc:docMk/>
+          <pc:sldMk cId="2404849961" sldId="277"/>
+        </pc:sldMkLst>
+        <pc:spChg chg="mod">
+          <ac:chgData name="Alexander Nozik" userId="188c02ae713a829a" providerId="LiveId" clId="{A72D04BE-A922-4B3C-BBB4-0B0B2747A523}" dt="2022-09-15T06:36:54.642" v="1"/>
+          <ac:spMkLst>
+            <pc:docMk/>
+            <pc:sldMk cId="2404849961" sldId="277"/>
+            <ac:spMk id="3" creationId="{1BCCB33F-F510-4A28-914A-DED57714467E}"/>
+          </ac:spMkLst>
+        </pc:spChg>
+        <pc:spChg chg="mod">
+          <ac:chgData name="Alexander Nozik" userId="188c02ae713a829a" providerId="LiveId" clId="{A72D04BE-A922-4B3C-BBB4-0B0B2747A523}" dt="2022-09-15T06:36:54.642" v="1"/>
+          <ac:spMkLst>
+            <pc:docMk/>
+            <pc:sldMk cId="2404849961" sldId="277"/>
+            <ac:spMk id="4" creationId="{9EFED9BE-B17B-4621-802A-7089ED524287}"/>
+          </ac:spMkLst>
+        </pc:spChg>
+        <pc:spChg chg="mod">
+          <ac:chgData name="Alexander Nozik" userId="188c02ae713a829a" providerId="LiveId" clId="{A72D04BE-A922-4B3C-BBB4-0B0B2747A523}" dt="2022-09-15T06:36:54.946" v="22" actId="27636"/>
+          <ac:spMkLst>
+            <pc:docMk/>
+            <pc:sldMk cId="2404849961" sldId="277"/>
+            <ac:spMk id="5" creationId="{59E8EF08-684E-4B79-B42F-6FDCB5CDAA19}"/>
+          </ac:spMkLst>
+        </pc:spChg>
+      </pc:sldChg>
+    </pc:docChg>
+  </pc:docChgLst>
+</pc:chgInfo>
+</file>
+
 <file path=ppt/notesMasters/notesMaster1.xml><?xml version="1.0" encoding="utf-8"?>
 <p:notesMaster xmlns:a="http://schemas.openxmlformats.org/drawingml/2006/main" xmlns:r="http://schemas.openxmlformats.org/officeDocument/2006/relationships" xmlns:p="http://schemas.openxmlformats.org/presentationml/2006/main">
   <p:cSld>
@@ -216,7 +1010,7 @@
           <a:p>
             <a:fld id="{A54CA3E2-BA54-4268-9A3A-8F06289F8DCE}" type="datetimeFigureOut">
               <a:rPr lang="en-US" smtClean="0"/>
-              <a:t>26-Sep-18</a:t>
+              <a:t>9/15/2022</a:t>
             </a:fld>
             <a:endParaRPr lang="en-US"/>
           </a:p>
@@ -777,6 +1571,16 @@
 <file path=ppt/slideLayouts/slideLayout1.xml><?xml version="1.0" encoding="utf-8"?>
 <p:sldLayout xmlns:a="http://schemas.openxmlformats.org/drawingml/2006/main" xmlns:r="http://schemas.openxmlformats.org/officeDocument/2006/relationships" xmlns:p="http://schemas.openxmlformats.org/presentationml/2006/main" showMasterSp="0" type="title" preserve="1">
   <p:cSld name="Title Slide">
+    <p:bg>
+      <p:bgPr>
+        <a:solidFill>
+          <a:schemeClr val="bg2">
+            <a:lumMod val="75000"/>
+          </a:schemeClr>
+        </a:solidFill>
+        <a:effectLst/>
+      </p:bgPr>
+    </p:bg>
     <p:spTree>
       <p:nvGrpSpPr>
         <p:cNvPr id="1" name=""/>
@@ -793,52 +1597,228 @@
       </p:grpSpPr>
       <p:sp>
         <p:nvSpPr>
+          <p:cNvPr id="2" name="Title 1"/>
+          <p:cNvSpPr>
+            <a:spLocks noGrp="1"/>
+          </p:cNvSpPr>
+          <p:nvPr>
+            <p:ph type="ctrTitle"/>
+          </p:nvPr>
+        </p:nvSpPr>
+        <p:spPr>
+          <a:xfrm>
+            <a:off x="1261872" y="758952"/>
+            <a:ext cx="9418320" cy="4041648"/>
+          </a:xfrm>
+        </p:spPr>
+        <p:txBody>
+          <a:bodyPr anchor="b">
+            <a:normAutofit/>
+          </a:bodyPr>
+          <a:lstStyle>
+            <a:lvl1pPr algn="l">
+              <a:lnSpc>
+                <a:spcPct val="85000"/>
+              </a:lnSpc>
+              <a:defRPr sz="7200" baseline="0">
+                <a:solidFill>
+                  <a:schemeClr val="tx1"/>
+                </a:solidFill>
+              </a:defRPr>
+            </a:lvl1pPr>
+          </a:lstStyle>
+          <a:p>
+            <a:r>
+              <a:rPr lang="en-US"/>
+              <a:t>Click to edit Master title style</a:t>
+            </a:r>
+            <a:endParaRPr lang="en-US" dirty="0"/>
+          </a:p>
+        </p:txBody>
+      </p:sp>
+      <p:sp>
+        <p:nvSpPr>
+          <p:cNvPr id="3" name="Subtitle 2"/>
+          <p:cNvSpPr>
+            <a:spLocks noGrp="1"/>
+          </p:cNvSpPr>
+          <p:nvPr>
+            <p:ph type="subTitle" idx="1"/>
+          </p:nvPr>
+        </p:nvSpPr>
+        <p:spPr>
+          <a:xfrm>
+            <a:off x="1261872" y="4800600"/>
+            <a:ext cx="9418320" cy="1691640"/>
+          </a:xfrm>
+        </p:spPr>
+        <p:txBody>
+          <a:bodyPr>
+            <a:normAutofit/>
+          </a:bodyPr>
+          <a:lstStyle>
+            <a:lvl1pPr marL="0" indent="0" algn="l">
+              <a:buNone/>
+              <a:defRPr sz="2200" baseline="0">
+                <a:solidFill>
+                  <a:schemeClr val="tx1">
+                    <a:lumMod val="75000"/>
+                  </a:schemeClr>
+                </a:solidFill>
+              </a:defRPr>
+            </a:lvl1pPr>
+            <a:lvl2pPr marL="457200" indent="0" algn="ctr">
+              <a:buNone/>
+              <a:defRPr sz="2200"/>
+            </a:lvl2pPr>
+            <a:lvl3pPr marL="914400" indent="0" algn="ctr">
+              <a:buNone/>
+              <a:defRPr sz="2200"/>
+            </a:lvl3pPr>
+            <a:lvl4pPr marL="1371600" indent="0" algn="ctr">
+              <a:buNone/>
+              <a:defRPr sz="2000"/>
+            </a:lvl4pPr>
+            <a:lvl5pPr marL="1828800" indent="0" algn="ctr">
+              <a:buNone/>
+              <a:defRPr sz="2000"/>
+            </a:lvl5pPr>
+            <a:lvl6pPr marL="2286000" indent="0" algn="ctr">
+              <a:buNone/>
+              <a:defRPr sz="2000"/>
+            </a:lvl6pPr>
+            <a:lvl7pPr marL="2743200" indent="0" algn="ctr">
+              <a:buNone/>
+              <a:defRPr sz="2000"/>
+            </a:lvl7pPr>
+            <a:lvl8pPr marL="3200400" indent="0" algn="ctr">
+              <a:buNone/>
+              <a:defRPr sz="2000"/>
+            </a:lvl8pPr>
+            <a:lvl9pPr marL="3657600" indent="0" algn="ctr">
+              <a:buNone/>
+              <a:defRPr sz="2000"/>
+            </a:lvl9pPr>
+          </a:lstStyle>
+          <a:p>
+            <a:r>
+              <a:rPr lang="en-US"/>
+              <a:t>Click to edit Master subtitle style</a:t>
+            </a:r>
+            <a:endParaRPr lang="en-US" dirty="0"/>
+          </a:p>
+        </p:txBody>
+      </p:sp>
+      <p:sp>
+        <p:nvSpPr>
+          <p:cNvPr id="4" name="Date Placeholder 3"/>
+          <p:cNvSpPr>
+            <a:spLocks noGrp="1"/>
+          </p:cNvSpPr>
+          <p:nvPr>
+            <p:ph type="dt" sz="half" idx="10"/>
+          </p:nvPr>
+        </p:nvSpPr>
+        <p:spPr/>
+        <p:txBody>
+          <a:bodyPr/>
+          <a:lstStyle>
+            <a:lvl1pPr>
+              <a:defRPr>
+                <a:solidFill>
+                  <a:schemeClr val="tx1">
+                    <a:lumMod val="50000"/>
+                  </a:schemeClr>
+                </a:solidFill>
+              </a:defRPr>
+            </a:lvl1pPr>
+          </a:lstStyle>
+          <a:p>
+            <a:fld id="{96BA663B-DC84-43FD-BBA8-5D34E81C3DE1}" type="datetime1">
+              <a:rPr lang="en-US" smtClean="0"/>
+              <a:t>9/15/2022</a:t>
+            </a:fld>
+            <a:endParaRPr lang="en-US" dirty="0"/>
+          </a:p>
+        </p:txBody>
+      </p:sp>
+      <p:sp>
+        <p:nvSpPr>
+          <p:cNvPr id="5" name="Footer Placeholder 4"/>
+          <p:cNvSpPr>
+            <a:spLocks noGrp="1"/>
+          </p:cNvSpPr>
+          <p:nvPr>
+            <p:ph type="ftr" sz="quarter" idx="11"/>
+          </p:nvPr>
+        </p:nvSpPr>
+        <p:spPr/>
+        <p:txBody>
+          <a:bodyPr/>
+          <a:lstStyle>
+            <a:lvl1pPr>
+              <a:defRPr>
+                <a:solidFill>
+                  <a:schemeClr val="tx1">
+                    <a:lumMod val="65000"/>
+                  </a:schemeClr>
+                </a:solidFill>
+              </a:defRPr>
+            </a:lvl1pPr>
+          </a:lstStyle>
+          <a:p>
+            <a:r>
+              <a:rPr lang="ru-RU"/>
+              <a:t>Лекция 1: введение в теорию вероятности</a:t>
+            </a:r>
+            <a:endParaRPr lang="en-US" dirty="0"/>
+          </a:p>
+        </p:txBody>
+      </p:sp>
+      <p:sp>
+        <p:nvSpPr>
+          <p:cNvPr id="6" name="Slide Number Placeholder 5"/>
+          <p:cNvSpPr>
+            <a:spLocks noGrp="1"/>
+          </p:cNvSpPr>
+          <p:nvPr>
+            <p:ph type="sldNum" sz="quarter" idx="12"/>
+          </p:nvPr>
+        </p:nvSpPr>
+        <p:spPr/>
+        <p:txBody>
+          <a:bodyPr/>
+          <a:lstStyle>
+            <a:lvl1pPr>
+              <a:defRPr>
+                <a:solidFill>
+                  <a:schemeClr val="tx1">
+                    <a:lumMod val="65000"/>
+                  </a:schemeClr>
+                </a:solidFill>
+              </a:defRPr>
+            </a:lvl1pPr>
+          </a:lstStyle>
+          <a:p>
+            <a:fld id="{8A7A6979-0714-4377-B894-6BE4C2D6E202}" type="slidenum">
+              <a:rPr lang="en-US" smtClean="0"/>
+              <a:pPr/>
+              <a:t>‹#›</a:t>
+            </a:fld>
+            <a:endParaRPr lang="en-US" dirty="0"/>
+          </a:p>
+        </p:txBody>
+      </p:sp>
+      <p:sp>
+        <p:nvSpPr>
           <p:cNvPr id="7" name="Rectangle 6"/>
           <p:cNvSpPr/>
           <p:nvPr/>
         </p:nvSpPr>
         <p:spPr>
           <a:xfrm>
-            <a:off x="3175" y="6400800"/>
-            <a:ext cx="12188825" cy="457200"/>
-          </a:xfrm>
-          <a:prstGeom prst="rect">
-            <a:avLst/>
-          </a:prstGeom>
-          <a:solidFill>
-            <a:schemeClr val="accent2"/>
-          </a:solidFill>
-          <a:ln>
-            <a:noFill/>
-          </a:ln>
-        </p:spPr>
-        <p:style>
-          <a:lnRef idx="2">
-            <a:schemeClr val="accent1">
-              <a:shade val="50000"/>
-            </a:schemeClr>
-          </a:lnRef>
-          <a:fillRef idx="1">
-            <a:schemeClr val="accent1"/>
-          </a:fillRef>
-          <a:effectRef idx="0">
-            <a:schemeClr val="accent1"/>
-          </a:effectRef>
-          <a:fontRef idx="minor">
-            <a:schemeClr val="lt1"/>
-          </a:fontRef>
-        </p:style>
-      </p:sp>
-      <p:sp>
-        <p:nvSpPr>
-          <p:cNvPr id="8" name="Rectangle 7"/>
-          <p:cNvSpPr/>
-          <p:nvPr/>
-        </p:nvSpPr>
-        <p:spPr>
-          <a:xfrm>
-            <a:off x="15" y="6334316"/>
-            <a:ext cx="12188825" cy="64008"/>
+            <a:off x="0" y="0"/>
+            <a:ext cx="457200" cy="6858000"/>
           </a:xfrm>
           <a:prstGeom prst="rect">
             <a:avLst/>
@@ -867,239 +1847,15 @@
           </a:fontRef>
         </p:style>
       </p:sp>
-      <p:sp>
-        <p:nvSpPr>
-          <p:cNvPr id="2" name="Title 1"/>
-          <p:cNvSpPr>
-            <a:spLocks noGrp="1"/>
-          </p:cNvSpPr>
-          <p:nvPr>
-            <p:ph type="ctrTitle"/>
-          </p:nvPr>
-        </p:nvSpPr>
-        <p:spPr>
-          <a:xfrm>
-            <a:off x="1097280" y="758952"/>
-            <a:ext cx="10058400" cy="3566160"/>
-          </a:xfrm>
-        </p:spPr>
-        <p:txBody>
-          <a:bodyPr anchor="b">
-            <a:normAutofit/>
-          </a:bodyPr>
-          <a:lstStyle>
-            <a:lvl1pPr algn="l">
-              <a:lnSpc>
-                <a:spcPct val="85000"/>
-              </a:lnSpc>
-              <a:defRPr sz="8000" spc="-50" baseline="0">
-                <a:solidFill>
-                  <a:schemeClr val="tx1">
-                    <a:lumMod val="85000"/>
-                    <a:lumOff val="15000"/>
-                  </a:schemeClr>
-                </a:solidFill>
-              </a:defRPr>
-            </a:lvl1pPr>
-          </a:lstStyle>
-          <a:p>
-            <a:r>
-              <a:rPr lang="en-US"/>
-              <a:t>Click to edit Master title style</a:t>
-            </a:r>
-            <a:endParaRPr lang="en-US" dirty="0"/>
-          </a:p>
-        </p:txBody>
-      </p:sp>
-      <p:sp>
-        <p:nvSpPr>
-          <p:cNvPr id="3" name="Subtitle 2"/>
-          <p:cNvSpPr>
-            <a:spLocks noGrp="1"/>
-          </p:cNvSpPr>
-          <p:nvPr>
-            <p:ph type="subTitle" idx="1"/>
-          </p:nvPr>
-        </p:nvSpPr>
-        <p:spPr>
-          <a:xfrm>
-            <a:off x="1100051" y="4455620"/>
-            <a:ext cx="10058400" cy="1143000"/>
-          </a:xfrm>
-        </p:spPr>
-        <p:txBody>
-          <a:bodyPr lIns="91440" rIns="91440">
-            <a:normAutofit/>
-          </a:bodyPr>
-          <a:lstStyle>
-            <a:lvl1pPr marL="0" indent="0" algn="l">
-              <a:buNone/>
-              <a:defRPr sz="2400" cap="all" spc="200" baseline="0">
-                <a:solidFill>
-                  <a:schemeClr val="tx2"/>
-                </a:solidFill>
-                <a:latin typeface="+mj-lt"/>
-              </a:defRPr>
-            </a:lvl1pPr>
-            <a:lvl2pPr marL="457200" indent="0" algn="ctr">
-              <a:buNone/>
-              <a:defRPr sz="2400"/>
-            </a:lvl2pPr>
-            <a:lvl3pPr marL="914400" indent="0" algn="ctr">
-              <a:buNone/>
-              <a:defRPr sz="2400"/>
-            </a:lvl3pPr>
-            <a:lvl4pPr marL="1371600" indent="0" algn="ctr">
-              <a:buNone/>
-              <a:defRPr sz="2000"/>
-            </a:lvl4pPr>
-            <a:lvl5pPr marL="1828800" indent="0" algn="ctr">
-              <a:buNone/>
-              <a:defRPr sz="2000"/>
-            </a:lvl5pPr>
-            <a:lvl6pPr marL="2286000" indent="0" algn="ctr">
-              <a:buNone/>
-              <a:defRPr sz="2000"/>
-            </a:lvl6pPr>
-            <a:lvl7pPr marL="2743200" indent="0" algn="ctr">
-              <a:buNone/>
-              <a:defRPr sz="2000"/>
-            </a:lvl7pPr>
-            <a:lvl8pPr marL="3200400" indent="0" algn="ctr">
-              <a:buNone/>
-              <a:defRPr sz="2000"/>
-            </a:lvl8pPr>
-            <a:lvl9pPr marL="3657600" indent="0" algn="ctr">
-              <a:buNone/>
-              <a:defRPr sz="2000"/>
-            </a:lvl9pPr>
-          </a:lstStyle>
-          <a:p>
-            <a:r>
-              <a:rPr lang="en-US"/>
-              <a:t>Click to edit Master subtitle style</a:t>
-            </a:r>
-            <a:endParaRPr lang="en-US" dirty="0"/>
-          </a:p>
-        </p:txBody>
-      </p:sp>
-      <p:sp>
-        <p:nvSpPr>
-          <p:cNvPr id="4" name="Date Placeholder 3"/>
-          <p:cNvSpPr>
-            <a:spLocks noGrp="1"/>
-          </p:cNvSpPr>
-          <p:nvPr>
-            <p:ph type="dt" sz="half" idx="10"/>
-          </p:nvPr>
-        </p:nvSpPr>
-        <p:spPr/>
-        <p:txBody>
-          <a:bodyPr/>
-          <a:lstStyle/>
-          <a:p>
-            <a:fld id="{96BA663B-DC84-43FD-BBA8-5D34E81C3DE1}" type="datetime1">
-              <a:rPr lang="en-US" smtClean="0"/>
-              <a:t>26-Sep-18</a:t>
-            </a:fld>
-            <a:endParaRPr lang="en-US" dirty="0"/>
-          </a:p>
-        </p:txBody>
-      </p:sp>
-      <p:sp>
-        <p:nvSpPr>
-          <p:cNvPr id="5" name="Footer Placeholder 4"/>
-          <p:cNvSpPr>
-            <a:spLocks noGrp="1"/>
-          </p:cNvSpPr>
-          <p:nvPr>
-            <p:ph type="ftr" sz="quarter" idx="11"/>
-          </p:nvPr>
-        </p:nvSpPr>
-        <p:spPr/>
-        <p:txBody>
-          <a:bodyPr/>
-          <a:lstStyle/>
-          <a:p>
-            <a:r>
-              <a:rPr lang="ru-RU"/>
-              <a:t>Лекция 1: введение в теорию вероятности</a:t>
-            </a:r>
-            <a:endParaRPr lang="en-US" dirty="0"/>
-          </a:p>
-        </p:txBody>
-      </p:sp>
-      <p:sp>
-        <p:nvSpPr>
-          <p:cNvPr id="6" name="Slide Number Placeholder 5"/>
-          <p:cNvSpPr>
-            <a:spLocks noGrp="1"/>
-          </p:cNvSpPr>
-          <p:nvPr>
-            <p:ph type="sldNum" sz="quarter" idx="12"/>
-          </p:nvPr>
-        </p:nvSpPr>
-        <p:spPr/>
-        <p:txBody>
-          <a:bodyPr/>
-          <a:lstStyle/>
-          <a:p>
-            <a:fld id="{8A7A6979-0714-4377-B894-6BE4C2D6E202}" type="slidenum">
-              <a:rPr lang="en-US" smtClean="0"/>
-              <a:pPr/>
-              <a:t>‹#›</a:t>
-            </a:fld>
-            <a:endParaRPr lang="en-US" dirty="0"/>
-          </a:p>
-        </p:txBody>
-      </p:sp>
-      <p:cxnSp>
-        <p:nvCxnSpPr>
-          <p:cNvPr id="9" name="Straight Connector 8"/>
-          <p:cNvCxnSpPr/>
-          <p:nvPr/>
-        </p:nvCxnSpPr>
-        <p:spPr>
-          <a:xfrm>
-            <a:off x="1207658" y="4343400"/>
-            <a:ext cx="9875520" cy="0"/>
-          </a:xfrm>
-          <a:prstGeom prst="line">
-            <a:avLst/>
-          </a:prstGeom>
-          <a:ln w="6350">
-            <a:solidFill>
-              <a:schemeClr val="tx1">
-                <a:lumMod val="50000"/>
-                <a:lumOff val="50000"/>
-              </a:schemeClr>
-            </a:solidFill>
-          </a:ln>
-        </p:spPr>
-        <p:style>
-          <a:lnRef idx="1">
-            <a:schemeClr val="accent1"/>
-          </a:lnRef>
-          <a:fillRef idx="0">
-            <a:schemeClr val="accent1"/>
-          </a:fillRef>
-          <a:effectRef idx="0">
-            <a:schemeClr val="accent1"/>
-          </a:effectRef>
-          <a:fontRef idx="minor">
-            <a:schemeClr val="tx1"/>
-          </a:fontRef>
-        </p:style>
-      </p:cxnSp>
     </p:spTree>
     <p:extLst>
       <p:ext uri="{BB962C8B-B14F-4D97-AF65-F5344CB8AC3E}">
-        <p14:creationId xmlns:p14="http://schemas.microsoft.com/office/powerpoint/2010/main" val="3085922448"/>
+        <p14:creationId xmlns:p14="http://schemas.microsoft.com/office/powerpoint/2010/main" val="3394428527"/>
       </p:ext>
     </p:extLst>
   </p:cSld>
   <p:clrMapOvr>
-    <a:masterClrMapping/>
+    <a:overrideClrMapping bg1="dk1" tx1="lt1" bg2="dk2" tx2="lt2" accent1="accent1" accent2="accent2" accent3="accent3" accent4="accent4" accent5="accent5" accent6="accent6" hlink="hlink" folHlink="folHlink"/>
   </p:clrMapOvr>
 </p:sldLayout>
 </file>
@@ -1156,13 +1912,13 @@
         </p:nvSpPr>
         <p:spPr/>
         <p:txBody>
-          <a:bodyPr vert="eaVert" lIns="45720" tIns="0" rIns="45720" bIns="0"/>
+          <a:bodyPr vert="eaVert"/>
           <a:lstStyle/>
           <a:p>
             <a:pPr lvl="0"/>
             <a:r>
               <a:rPr lang="en-US"/>
-              <a:t>Edit Master text styles</a:t>
+              <a:t>Click to edit Master text styles</a:t>
             </a:r>
           </a:p>
           <a:p>
@@ -1213,7 +1969,7 @@
           <a:p>
             <a:fld id="{8F1D1054-806B-44B5-94C6-526BB31D09E9}" type="datetime1">
               <a:rPr lang="en-US" smtClean="0"/>
-              <a:t>26-Sep-18</a:t>
+              <a:t>9/15/2022</a:t>
             </a:fld>
             <a:endParaRPr lang="en-US" dirty="0"/>
           </a:p>
@@ -1268,7 +2024,7 @@
     </p:spTree>
     <p:extLst>
       <p:ext uri="{BB962C8B-B14F-4D97-AF65-F5344CB8AC3E}">
-        <p14:creationId xmlns:p14="http://schemas.microsoft.com/office/powerpoint/2010/main" val="2888298915"/>
+        <p14:creationId xmlns:p14="http://schemas.microsoft.com/office/powerpoint/2010/main" val="1299475540"/>
       </p:ext>
     </p:extLst>
   </p:cSld>
@@ -1279,7 +2035,7 @@
 </file>
 
 <file path=ppt/slideLayouts/slideLayout11.xml><?xml version="1.0" encoding="utf-8"?>
-<p:sldLayout xmlns:a="http://schemas.openxmlformats.org/drawingml/2006/main" xmlns:r="http://schemas.openxmlformats.org/officeDocument/2006/relationships" xmlns:p="http://schemas.openxmlformats.org/presentationml/2006/main" showMasterSp="0" type="vertTitleAndTx" preserve="1">
+<p:sldLayout xmlns:a="http://schemas.openxmlformats.org/drawingml/2006/main" xmlns:r="http://schemas.openxmlformats.org/officeDocument/2006/relationships" xmlns:p="http://schemas.openxmlformats.org/presentationml/2006/main" type="vertTitleAndTx" preserve="1">
   <p:cSld name="Vertical Title and Text">
     <p:spTree>
       <p:nvGrpSpPr>
@@ -1297,132 +2053,56 @@
       </p:grpSpPr>
       <p:sp>
         <p:nvSpPr>
-          <p:cNvPr id="7" name="Rectangle 6"/>
-          <p:cNvSpPr/>
-          <p:nvPr/>
+          <p:cNvPr id="2" name="Vertical Title 1"/>
+          <p:cNvSpPr>
+            <a:spLocks noGrp="1"/>
+          </p:cNvSpPr>
+          <p:nvPr>
+            <p:ph type="title" orient="vert"/>
+          </p:nvPr>
         </p:nvSpPr>
         <p:spPr>
           <a:xfrm>
-            <a:off x="3175" y="6400800"/>
-            <a:ext cx="12188825" cy="457200"/>
+            <a:off x="8648700" y="381000"/>
+            <a:ext cx="2476500" cy="5897562"/>
           </a:xfrm>
-          <a:prstGeom prst="rect">
-            <a:avLst/>
-          </a:prstGeom>
-          <a:solidFill>
-            <a:schemeClr val="accent2"/>
-          </a:solidFill>
-          <a:ln>
-            <a:noFill/>
-          </a:ln>
         </p:spPr>
-        <p:style>
-          <a:lnRef idx="2">
-            <a:schemeClr val="accent1">
-              <a:shade val="50000"/>
-            </a:schemeClr>
-          </a:lnRef>
-          <a:fillRef idx="1">
-            <a:schemeClr val="accent1"/>
-          </a:fillRef>
-          <a:effectRef idx="0">
-            <a:schemeClr val="accent1"/>
-          </a:effectRef>
-          <a:fontRef idx="minor">
-            <a:schemeClr val="lt1"/>
-          </a:fontRef>
-        </p:style>
-      </p:sp>
-      <p:sp>
-        <p:nvSpPr>
-          <p:cNvPr id="8" name="Rectangle 7"/>
-          <p:cNvSpPr/>
-          <p:nvPr/>
+        <p:txBody>
+          <a:bodyPr vert="eaVert"/>
+          <a:lstStyle/>
+          <a:p>
+            <a:r>
+              <a:rPr lang="en-US"/>
+              <a:t>Click to edit Master title style</a:t>
+            </a:r>
+            <a:endParaRPr lang="en-US" dirty="0"/>
+          </a:p>
+        </p:txBody>
+      </p:sp>
+      <p:sp>
+        <p:nvSpPr>
+          <p:cNvPr id="3" name="Vertical Text Placeholder 2"/>
+          <p:cNvSpPr>
+            <a:spLocks noGrp="1"/>
+          </p:cNvSpPr>
+          <p:nvPr>
+            <p:ph type="body" orient="vert" idx="1"/>
+          </p:nvPr>
         </p:nvSpPr>
         <p:spPr>
           <a:xfrm>
-            <a:off x="15" y="6334316"/>
-            <a:ext cx="12188825" cy="64008"/>
-          </a:xfrm>
-          <a:prstGeom prst="rect">
-            <a:avLst/>
-          </a:prstGeom>
-          <a:solidFill>
-            <a:schemeClr val="accent1"/>
-          </a:solidFill>
-          <a:ln>
-            <a:noFill/>
-          </a:ln>
-        </p:spPr>
-        <p:style>
-          <a:lnRef idx="2">
-            <a:schemeClr val="accent1">
-              <a:shade val="50000"/>
-            </a:schemeClr>
-          </a:lnRef>
-          <a:fillRef idx="1">
-            <a:schemeClr val="accent1"/>
-          </a:fillRef>
-          <a:effectRef idx="0">
-            <a:schemeClr val="accent1"/>
-          </a:effectRef>
-          <a:fontRef idx="minor">
-            <a:schemeClr val="lt1"/>
-          </a:fontRef>
-        </p:style>
-      </p:sp>
-      <p:sp>
-        <p:nvSpPr>
-          <p:cNvPr id="2" name="Vertical Title 1"/>
-          <p:cNvSpPr>
-            <a:spLocks noGrp="1"/>
-          </p:cNvSpPr>
-          <p:nvPr>
-            <p:ph type="title" orient="vert"/>
-          </p:nvPr>
-        </p:nvSpPr>
-        <p:spPr>
-          <a:xfrm>
-            <a:off x="8724900" y="414778"/>
-            <a:ext cx="2628900" cy="5757421"/>
+            <a:off x="762000" y="381000"/>
+            <a:ext cx="7734300" cy="5897562"/>
           </a:xfrm>
         </p:spPr>
         <p:txBody>
           <a:bodyPr vert="eaVert"/>
           <a:lstStyle/>
           <a:p>
+            <a:pPr lvl="0"/>
             <a:r>
               <a:rPr lang="en-US"/>
-              <a:t>Click to edit Master title style</a:t>
-            </a:r>
-            <a:endParaRPr lang="en-US" dirty="0"/>
-          </a:p>
-        </p:txBody>
-      </p:sp>
-      <p:sp>
-        <p:nvSpPr>
-          <p:cNvPr id="3" name="Vertical Text Placeholder 2"/>
-          <p:cNvSpPr>
-            <a:spLocks noGrp="1"/>
-          </p:cNvSpPr>
-          <p:nvPr>
-            <p:ph type="body" orient="vert" idx="1"/>
-          </p:nvPr>
-        </p:nvSpPr>
-        <p:spPr>
-          <a:xfrm>
-            <a:off x="838200" y="414778"/>
-            <a:ext cx="7734300" cy="5757422"/>
-          </a:xfrm>
-        </p:spPr>
-        <p:txBody>
-          <a:bodyPr vert="eaVert" lIns="45720" tIns="0" rIns="45720" bIns="0"/>
-          <a:lstStyle/>
-          <a:p>
-            <a:pPr lvl="0"/>
-            <a:r>
-              <a:rPr lang="en-US"/>
-              <a:t>Edit Master text styles</a:t>
+              <a:t>Click to edit Master text styles</a:t>
             </a:r>
           </a:p>
           <a:p>
@@ -1473,7 +2153,7 @@
           <a:p>
             <a:fld id="{DEC48BEF-44B5-47A3-9C7D-D386B08923B1}" type="datetime1">
               <a:rPr lang="en-US" smtClean="0"/>
-              <a:t>26-Sep-18</a:t>
+              <a:t>9/15/2022</a:t>
             </a:fld>
             <a:endParaRPr lang="en-US" dirty="0"/>
           </a:p>
@@ -1528,7 +2208,7 @@
     </p:spTree>
     <p:extLst>
       <p:ext uri="{BB962C8B-B14F-4D97-AF65-F5344CB8AC3E}">
-        <p14:creationId xmlns:p14="http://schemas.microsoft.com/office/powerpoint/2010/main" val="1902099521"/>
+        <p14:creationId xmlns:p14="http://schemas.microsoft.com/office/powerpoint/2010/main" val="3878469881"/>
       </p:ext>
     </p:extLst>
   </p:cSld>
@@ -1568,11 +2248,7 @@
         <p:spPr/>
         <p:txBody>
           <a:bodyPr/>
-          <a:lstStyle>
-            <a:lvl1pPr marL="0">
-              <a:defRPr/>
-            </a:lvl1pPr>
-          </a:lstStyle>
+          <a:lstStyle/>
           <a:p>
             <a:r>
               <a:rPr lang="en-US"/>
@@ -1600,7 +2276,7 @@
             <a:pPr lvl="0"/>
             <a:r>
               <a:rPr lang="en-US"/>
-              <a:t>Edit Master text styles</a:t>
+              <a:t>Click to edit Master text styles</a:t>
             </a:r>
           </a:p>
           <a:p>
@@ -1651,7 +2327,7 @@
           <a:p>
             <a:fld id="{0A5B135B-B6B9-45A0-9A67-809DA32555FB}" type="datetime1">
               <a:rPr lang="en-US" smtClean="0"/>
-              <a:t>26-Sep-18</a:t>
+              <a:t>9/15/2022</a:t>
             </a:fld>
             <a:endParaRPr lang="en-US" dirty="0"/>
           </a:p>
@@ -1707,7 +2383,7 @@
     </p:spTree>
     <p:extLst>
       <p:ext uri="{BB962C8B-B14F-4D97-AF65-F5344CB8AC3E}">
-        <p14:creationId xmlns:p14="http://schemas.microsoft.com/office/powerpoint/2010/main" val="1884719019"/>
+        <p14:creationId xmlns:p14="http://schemas.microsoft.com/office/powerpoint/2010/main" val="633341774"/>
       </p:ext>
     </p:extLst>
   </p:cSld>
@@ -1718,16 +2394,8 @@
 </file>
 
 <file path=ppt/slideLayouts/slideLayout3.xml><?xml version="1.0" encoding="utf-8"?>
-<p:sldLayout xmlns:a="http://schemas.openxmlformats.org/drawingml/2006/main" xmlns:r="http://schemas.openxmlformats.org/officeDocument/2006/relationships" xmlns:p="http://schemas.openxmlformats.org/presentationml/2006/main" showMasterSp="0" type="secHead" preserve="1">
+<p:sldLayout xmlns:a="http://schemas.openxmlformats.org/drawingml/2006/main" xmlns:r="http://schemas.openxmlformats.org/officeDocument/2006/relationships" xmlns:p="http://schemas.openxmlformats.org/presentationml/2006/main" type="secHead" preserve="1">
   <p:cSld name="Section Header">
-    <p:bg>
-      <p:bgPr>
-        <a:solidFill>
-          <a:schemeClr val="bg1"/>
-        </a:solidFill>
-        <a:effectLst/>
-      </p:bgPr>
-    </p:bg>
     <p:spTree>
       <p:nvGrpSpPr>
         <p:cNvPr id="1" name=""/>
@@ -1744,98 +2412,22 @@
       </p:grpSpPr>
       <p:sp>
         <p:nvSpPr>
-          <p:cNvPr id="7" name="Rectangle 6"/>
-          <p:cNvSpPr/>
-          <p:nvPr/>
+          <p:cNvPr id="2" name="Title 1"/>
+          <p:cNvSpPr>
+            <a:spLocks noGrp="1"/>
+          </p:cNvSpPr>
+          <p:nvPr>
+            <p:ph type="title"/>
+          </p:nvPr>
         </p:nvSpPr>
         <p:spPr>
           <a:xfrm>
-            <a:off x="3175" y="6400800"/>
-            <a:ext cx="12188825" cy="457200"/>
-          </a:xfrm>
-          <a:prstGeom prst="rect">
-            <a:avLst/>
-          </a:prstGeom>
-          <a:solidFill>
-            <a:schemeClr val="accent2"/>
-          </a:solidFill>
-          <a:ln>
-            <a:noFill/>
-          </a:ln>
-        </p:spPr>
-        <p:style>
-          <a:lnRef idx="2">
-            <a:schemeClr val="accent1">
-              <a:shade val="50000"/>
-            </a:schemeClr>
-          </a:lnRef>
-          <a:fillRef idx="1">
-            <a:schemeClr val="accent1"/>
-          </a:fillRef>
-          <a:effectRef idx="0">
-            <a:schemeClr val="accent1"/>
-          </a:effectRef>
-          <a:fontRef idx="minor">
-            <a:schemeClr val="lt1"/>
-          </a:fontRef>
-        </p:style>
-      </p:sp>
-      <p:sp>
-        <p:nvSpPr>
-          <p:cNvPr id="8" name="Rectangle 7"/>
-          <p:cNvSpPr/>
-          <p:nvPr/>
-        </p:nvSpPr>
-        <p:spPr>
-          <a:xfrm>
-            <a:off x="15" y="6334316"/>
-            <a:ext cx="12188825" cy="64008"/>
-          </a:xfrm>
-          <a:prstGeom prst="rect">
-            <a:avLst/>
-          </a:prstGeom>
-          <a:solidFill>
-            <a:schemeClr val="accent1"/>
-          </a:solidFill>
-          <a:ln>
-            <a:noFill/>
-          </a:ln>
-        </p:spPr>
-        <p:style>
-          <a:lnRef idx="2">
-            <a:schemeClr val="accent1">
-              <a:shade val="50000"/>
-            </a:schemeClr>
-          </a:lnRef>
-          <a:fillRef idx="1">
-            <a:schemeClr val="accent1"/>
-          </a:fillRef>
-          <a:effectRef idx="0">
-            <a:schemeClr val="accent1"/>
-          </a:effectRef>
-          <a:fontRef idx="minor">
-            <a:schemeClr val="lt1"/>
-          </a:fontRef>
-        </p:style>
-      </p:sp>
-      <p:sp>
-        <p:nvSpPr>
-          <p:cNvPr id="2" name="Title 1"/>
-          <p:cNvSpPr>
-            <a:spLocks noGrp="1"/>
-          </p:cNvSpPr>
-          <p:nvPr>
-            <p:ph type="title"/>
-          </p:nvPr>
-        </p:nvSpPr>
-        <p:spPr>
-          <a:xfrm>
-            <a:off x="1097280" y="758952"/>
-            <a:ext cx="10058400" cy="3566160"/>
+            <a:off x="1261872" y="758952"/>
+            <a:ext cx="9418320" cy="4041648"/>
           </a:xfrm>
         </p:spPr>
         <p:txBody>
-          <a:bodyPr anchor="b" anchorCtr="0">
+          <a:bodyPr anchor="b">
             <a:normAutofit/>
           </a:bodyPr>
           <a:lstStyle>
@@ -1843,14 +2435,7 @@
               <a:lnSpc>
                 <a:spcPct val="85000"/>
               </a:lnSpc>
-              <a:defRPr sz="8000" b="0">
-                <a:solidFill>
-                  <a:schemeClr val="tx1">
-                    <a:lumMod val="85000"/>
-                    <a:lumOff val="15000"/>
-                  </a:schemeClr>
-                </a:solidFill>
-              </a:defRPr>
+              <a:defRPr sz="7200" b="0"/>
             </a:lvl1pPr>
           </a:lstStyle>
           <a:p>
@@ -1874,22 +2459,24 @@
         </p:nvSpPr>
         <p:spPr>
           <a:xfrm>
-            <a:off x="1097280" y="4453128"/>
-            <a:ext cx="10058400" cy="1143000"/>
+            <a:off x="1261872" y="4800600"/>
+            <a:ext cx="9418320" cy="1691640"/>
           </a:xfrm>
         </p:spPr>
         <p:txBody>
-          <a:bodyPr lIns="91440" rIns="91440" anchor="t" anchorCtr="0">
+          <a:bodyPr anchor="t">
             <a:normAutofit/>
           </a:bodyPr>
           <a:lstStyle>
             <a:lvl1pPr marL="0" indent="0">
               <a:buNone/>
-              <a:defRPr sz="2400" cap="all" spc="200" baseline="0">
+              <a:defRPr sz="2200">
                 <a:solidFill>
-                  <a:schemeClr val="tx2"/>
+                  <a:schemeClr val="tx1">
+                    <a:lumMod val="65000"/>
+                    <a:lumOff val="35000"/>
+                  </a:schemeClr>
                 </a:solidFill>
-                <a:latin typeface="+mj-lt"/>
               </a:defRPr>
             </a:lvl1pPr>
             <a:lvl2pPr marL="457200" indent="0">
@@ -1977,7 +2564,7 @@
             <a:pPr lvl="0"/>
             <a:r>
               <a:rPr lang="en-US"/>
-              <a:t>Edit Master text styles</a:t>
+              <a:t>Click to edit Master text styles</a:t>
             </a:r>
           </a:p>
         </p:txBody>
@@ -1999,7 +2586,7 @@
           <a:p>
             <a:fld id="{C084A363-63F9-4188-8E60-553BDB29324D}" type="datetime1">
               <a:rPr lang="en-US" smtClean="0"/>
-              <a:t>26-Sep-18</a:t>
+              <a:t>9/15/2022</a:t>
             </a:fld>
             <a:endParaRPr lang="en-US" dirty="0"/>
           </a:p>
@@ -2052,48 +2639,48 @@
           </a:p>
         </p:txBody>
       </p:sp>
-      <p:cxnSp>
-        <p:nvCxnSpPr>
-          <p:cNvPr id="9" name="Straight Connector 8"/>
-          <p:cNvCxnSpPr/>
+      <p:sp>
+        <p:nvSpPr>
+          <p:cNvPr id="7" name="Rectangle 6"/>
+          <p:cNvSpPr/>
           <p:nvPr/>
-        </p:nvCxnSpPr>
+        </p:nvSpPr>
         <p:spPr>
           <a:xfrm>
-            <a:off x="1207658" y="4343400"/>
-            <a:ext cx="9875520" cy="0"/>
+            <a:off x="0" y="0"/>
+            <a:ext cx="457200" cy="6858000"/>
           </a:xfrm>
-          <a:prstGeom prst="line">
+          <a:prstGeom prst="rect">
             <a:avLst/>
           </a:prstGeom>
-          <a:ln w="6350">
-            <a:solidFill>
-              <a:schemeClr val="tx1">
-                <a:lumMod val="50000"/>
-                <a:lumOff val="50000"/>
-              </a:schemeClr>
-            </a:solidFill>
+          <a:solidFill>
+            <a:schemeClr val="accent1"/>
+          </a:solidFill>
+          <a:ln>
+            <a:noFill/>
           </a:ln>
         </p:spPr>
         <p:style>
-          <a:lnRef idx="1">
-            <a:schemeClr val="accent1"/>
+          <a:lnRef idx="2">
+            <a:schemeClr val="accent1">
+              <a:shade val="50000"/>
+            </a:schemeClr>
           </a:lnRef>
-          <a:fillRef idx="0">
+          <a:fillRef idx="1">
             <a:schemeClr val="accent1"/>
           </a:fillRef>
           <a:effectRef idx="0">
             <a:schemeClr val="accent1"/>
           </a:effectRef>
           <a:fontRef idx="minor">
-            <a:schemeClr val="tx1"/>
+            <a:schemeClr val="lt1"/>
           </a:fontRef>
         </p:style>
-      </p:cxnSp>
+      </p:sp>
     </p:spTree>
     <p:extLst>
       <p:ext uri="{BB962C8B-B14F-4D97-AF65-F5344CB8AC3E}">
-        <p14:creationId xmlns:p14="http://schemas.microsoft.com/office/powerpoint/2010/main" val="746324916"/>
+        <p14:creationId xmlns:p14="http://schemas.microsoft.com/office/powerpoint/2010/main" val="2489332750"/>
       </p:ext>
     </p:extLst>
   </p:cSld>
@@ -2122,27 +2709,107 @@
       </p:grpSpPr>
       <p:sp>
         <p:nvSpPr>
-          <p:cNvPr id="8" name="Title 7"/>
+          <p:cNvPr id="2" name="Title 1"/>
           <p:cNvSpPr>
             <a:spLocks noGrp="1"/>
           </p:cNvSpPr>
           <p:nvPr>
             <p:ph type="title"/>
+          </p:nvPr>
+        </p:nvSpPr>
+        <p:spPr/>
+        <p:txBody>
+          <a:bodyPr/>
+          <a:lstStyle/>
+          <a:p>
+            <a:r>
+              <a:rPr lang="en-US"/>
+              <a:t>Click to edit Master title style</a:t>
+            </a:r>
+            <a:endParaRPr lang="en-US" dirty="0"/>
+          </a:p>
+        </p:txBody>
+      </p:sp>
+      <p:sp>
+        <p:nvSpPr>
+          <p:cNvPr id="3" name="Content Placeholder 2"/>
+          <p:cNvSpPr>
+            <a:spLocks noGrp="1"/>
+          </p:cNvSpPr>
+          <p:nvPr>
+            <p:ph sz="half" idx="1"/>
           </p:nvPr>
         </p:nvSpPr>
         <p:spPr>
           <a:xfrm>
-            <a:off x="1097280" y="286603"/>
-            <a:ext cx="10058400" cy="1450757"/>
+            <a:off x="1261872" y="1828800"/>
+            <a:ext cx="4480560" cy="4351337"/>
           </a:xfrm>
         </p:spPr>
         <p:txBody>
           <a:bodyPr/>
-          <a:lstStyle/>
-          <a:p>
+          <a:lstStyle>
+            <a:lvl1pPr>
+              <a:defRPr sz="1800"/>
+            </a:lvl1pPr>
+            <a:lvl2pPr>
+              <a:defRPr sz="1600"/>
+            </a:lvl2pPr>
+            <a:lvl3pPr>
+              <a:defRPr sz="1400"/>
+            </a:lvl3pPr>
+            <a:lvl4pPr>
+              <a:defRPr sz="1400"/>
+            </a:lvl4pPr>
+            <a:lvl5pPr>
+              <a:defRPr sz="1400"/>
+            </a:lvl5pPr>
+            <a:lvl6pPr>
+              <a:defRPr sz="1400"/>
+            </a:lvl6pPr>
+            <a:lvl7pPr>
+              <a:defRPr sz="1400"/>
+            </a:lvl7pPr>
+            <a:lvl8pPr>
+              <a:defRPr sz="1400"/>
+            </a:lvl8pPr>
+            <a:lvl9pPr>
+              <a:defRPr sz="1400"/>
+            </a:lvl9pPr>
+          </a:lstStyle>
+          <a:p>
+            <a:pPr lvl="0"/>
             <a:r>
               <a:rPr lang="en-US"/>
-              <a:t>Click to edit Master title style</a:t>
+              <a:t>Click to edit Master text styles</a:t>
+            </a:r>
+          </a:p>
+          <a:p>
+            <a:pPr lvl="1"/>
+            <a:r>
+              <a:rPr lang="en-US"/>
+              <a:t>Second level</a:t>
+            </a:r>
+          </a:p>
+          <a:p>
+            <a:pPr lvl="2"/>
+            <a:r>
+              <a:rPr lang="en-US"/>
+              <a:t>Third level</a:t>
+            </a:r>
+          </a:p>
+          <a:p>
+            <a:pPr lvl="3"/>
+            <a:r>
+              <a:rPr lang="en-US"/>
+              <a:t>Fourth level</a:t>
+            </a:r>
+          </a:p>
+          <a:p>
+            <a:pPr lvl="4"/>
+            <a:r>
+              <a:rPr lang="en-US"/>
+              <a:t>Fifth level</a:t>
             </a:r>
             <a:endParaRPr lang="en-US" dirty="0"/>
           </a:p>
@@ -2150,28 +2817,56 @@
       </p:sp>
       <p:sp>
         <p:nvSpPr>
-          <p:cNvPr id="3" name="Content Placeholder 2"/>
-          <p:cNvSpPr>
-            <a:spLocks noGrp="1"/>
-          </p:cNvSpPr>
-          <p:nvPr>
-            <p:ph sz="half" idx="1"/>
+          <p:cNvPr id="4" name="Content Placeholder 3"/>
+          <p:cNvSpPr>
+            <a:spLocks noGrp="1"/>
+          </p:cNvSpPr>
+          <p:nvPr>
+            <p:ph sz="half" idx="2"/>
           </p:nvPr>
         </p:nvSpPr>
         <p:spPr>
           <a:xfrm>
-            <a:off x="1097279" y="1845734"/>
-            <a:ext cx="4937760" cy="4023360"/>
+            <a:off x="6126480" y="1828800"/>
+            <a:ext cx="4480560" cy="4351337"/>
           </a:xfrm>
         </p:spPr>
         <p:txBody>
           <a:bodyPr/>
-          <a:lstStyle/>
+          <a:lstStyle>
+            <a:lvl1pPr>
+              <a:defRPr sz="1800"/>
+            </a:lvl1pPr>
+            <a:lvl2pPr>
+              <a:defRPr sz="1600"/>
+            </a:lvl2pPr>
+            <a:lvl3pPr>
+              <a:defRPr sz="1400"/>
+            </a:lvl3pPr>
+            <a:lvl4pPr>
+              <a:defRPr sz="1400"/>
+            </a:lvl4pPr>
+            <a:lvl5pPr>
+              <a:defRPr sz="1400"/>
+            </a:lvl5pPr>
+            <a:lvl6pPr>
+              <a:defRPr sz="1400"/>
+            </a:lvl6pPr>
+            <a:lvl7pPr>
+              <a:defRPr sz="1400"/>
+            </a:lvl7pPr>
+            <a:lvl8pPr>
+              <a:defRPr sz="1400"/>
+            </a:lvl8pPr>
+            <a:lvl9pPr>
+              <a:defRPr sz="1400"/>
+            </a:lvl9pPr>
+          </a:lstStyle>
           <a:p>
             <a:pPr lvl="0"/>
             <a:r>
               <a:rPr lang="en-US"/>
-              <a:t>Edit Master text styles</a:t>
+              <a:t>Click to edit Master text styles</a:t>
             </a:r>
           </a:p>
           <a:p>
@@ -2207,79 +2902,22 @@
       </p:sp>
       <p:sp>
         <p:nvSpPr>
-          <p:cNvPr id="4" name="Content Placeholder 3"/>
-          <p:cNvSpPr>
-            <a:spLocks noGrp="1"/>
-          </p:cNvSpPr>
-          <p:nvPr>
-            <p:ph sz="half" idx="2"/>
-          </p:nvPr>
-        </p:nvSpPr>
-        <p:spPr>
-          <a:xfrm>
-            <a:off x="6217920" y="1845735"/>
-            <a:ext cx="4937760" cy="4023360"/>
-          </a:xfrm>
-        </p:spPr>
+          <p:cNvPr id="5" name="Date Placeholder 4"/>
+          <p:cNvSpPr>
+            <a:spLocks noGrp="1"/>
+          </p:cNvSpPr>
+          <p:nvPr>
+            <p:ph type="dt" sz="half" idx="10"/>
+          </p:nvPr>
+        </p:nvSpPr>
+        <p:spPr/>
         <p:txBody>
           <a:bodyPr/>
           <a:lstStyle/>
           <a:p>
-            <a:pPr lvl="0"/>
-            <a:r>
-              <a:rPr lang="en-US"/>
-              <a:t>Edit Master text styles</a:t>
-            </a:r>
-          </a:p>
-          <a:p>
-            <a:pPr lvl="1"/>
-            <a:r>
-              <a:rPr lang="en-US"/>
-              <a:t>Second level</a:t>
-            </a:r>
-          </a:p>
-          <a:p>
-            <a:pPr lvl="2"/>
-            <a:r>
-              <a:rPr lang="en-US"/>
-              <a:t>Third level</a:t>
-            </a:r>
-          </a:p>
-          <a:p>
-            <a:pPr lvl="3"/>
-            <a:r>
-              <a:rPr lang="en-US"/>
-              <a:t>Fourth level</a:t>
-            </a:r>
-          </a:p>
-          <a:p>
-            <a:pPr lvl="4"/>
-            <a:r>
-              <a:rPr lang="en-US"/>
-              <a:t>Fifth level</a:t>
-            </a:r>
-            <a:endParaRPr lang="en-US" dirty="0"/>
-          </a:p>
-        </p:txBody>
-      </p:sp>
-      <p:sp>
-        <p:nvSpPr>
-          <p:cNvPr id="5" name="Date Placeholder 4"/>
-          <p:cNvSpPr>
-            <a:spLocks noGrp="1"/>
-          </p:cNvSpPr>
-          <p:nvPr>
-            <p:ph type="dt" sz="half" idx="10"/>
-          </p:nvPr>
-        </p:nvSpPr>
-        <p:spPr/>
-        <p:txBody>
-          <a:bodyPr/>
-          <a:lstStyle/>
-          <a:p>
             <a:fld id="{4B25EA44-A277-407B-A4FA-46502BDCB7EE}" type="datetime1">
               <a:rPr lang="en-US" smtClean="0"/>
-              <a:t>26-Sep-18</a:t>
+              <a:t>9/15/2022</a:t>
             </a:fld>
             <a:endParaRPr lang="en-US" dirty="0"/>
           </a:p>
@@ -2334,7 +2972,7 @@
     </p:spTree>
     <p:extLst>
       <p:ext uri="{BB962C8B-B14F-4D97-AF65-F5344CB8AC3E}">
-        <p14:creationId xmlns:p14="http://schemas.microsoft.com/office/powerpoint/2010/main" val="3069014153"/>
+        <p14:creationId xmlns:p14="http://schemas.microsoft.com/office/powerpoint/2010/main" val="2754741663"/>
       </p:ext>
     </p:extLst>
   </p:cSld>
@@ -2371,48 +3009,46 @@
             <p:ph type="title"/>
           </p:nvPr>
         </p:nvSpPr>
+        <p:spPr/>
+        <p:txBody>
+          <a:bodyPr/>
+          <a:lstStyle/>
+          <a:p>
+            <a:r>
+              <a:rPr lang="en-US"/>
+              <a:t>Click to edit Master title style</a:t>
+            </a:r>
+            <a:endParaRPr lang="en-US" dirty="0"/>
+          </a:p>
+        </p:txBody>
+      </p:sp>
+      <p:sp>
+        <p:nvSpPr>
+          <p:cNvPr id="3" name="Text Placeholder 2"/>
+          <p:cNvSpPr>
+            <a:spLocks noGrp="1"/>
+          </p:cNvSpPr>
+          <p:nvPr>
+            <p:ph type="body" idx="1"/>
+          </p:nvPr>
+        </p:nvSpPr>
         <p:spPr>
           <a:xfrm>
-            <a:off x="1097280" y="286603"/>
-            <a:ext cx="10058400" cy="1450757"/>
+            <a:off x="1261872" y="1713655"/>
+            <a:ext cx="4480560" cy="731520"/>
           </a:xfrm>
         </p:spPr>
         <p:txBody>
-          <a:bodyPr/>
-          <a:lstStyle/>
-          <a:p>
-            <a:r>
-              <a:rPr lang="en-US"/>
-              <a:t>Click to edit Master title style</a:t>
-            </a:r>
-            <a:endParaRPr lang="en-US" dirty="0"/>
-          </a:p>
-        </p:txBody>
-      </p:sp>
-      <p:sp>
-        <p:nvSpPr>
-          <p:cNvPr id="3" name="Text Placeholder 2"/>
-          <p:cNvSpPr>
-            <a:spLocks noGrp="1"/>
-          </p:cNvSpPr>
-          <p:nvPr>
-            <p:ph type="body" idx="1"/>
-          </p:nvPr>
-        </p:nvSpPr>
-        <p:spPr>
-          <a:xfrm>
-            <a:off x="1097280" y="1846052"/>
-            <a:ext cx="4937760" cy="736282"/>
-          </a:xfrm>
-        </p:spPr>
-        <p:txBody>
-          <a:bodyPr lIns="91440" rIns="91440" anchor="ctr">
+          <a:bodyPr anchor="b">
             <a:normAutofit/>
           </a:bodyPr>
           <a:lstStyle>
             <a:lvl1pPr marL="0" indent="0">
+              <a:spcBef>
+                <a:spcPts val="0"/>
+              </a:spcBef>
               <a:buNone/>
-              <a:defRPr sz="2000" b="0" cap="all" baseline="0">
+              <a:defRPr sz="2000" b="0">
                 <a:solidFill>
                   <a:schemeClr val="tx2"/>
                 </a:solidFill>
@@ -2455,7 +3091,7 @@
             <a:pPr lvl="0"/>
             <a:r>
               <a:rPr lang="en-US"/>
-              <a:t>Edit Master text styles</a:t>
+              <a:t>Click to edit Master text styles</a:t>
             </a:r>
           </a:p>
         </p:txBody>
@@ -2472,18 +3108,46 @@
         </p:nvSpPr>
         <p:spPr>
           <a:xfrm>
-            <a:off x="1097280" y="2582334"/>
-            <a:ext cx="4937760" cy="3378200"/>
+            <a:off x="1261872" y="2507550"/>
+            <a:ext cx="4480560" cy="3664650"/>
           </a:xfrm>
         </p:spPr>
         <p:txBody>
           <a:bodyPr/>
-          <a:lstStyle/>
+          <a:lstStyle>
+            <a:lvl1pPr>
+              <a:defRPr sz="1800"/>
+            </a:lvl1pPr>
+            <a:lvl2pPr>
+              <a:defRPr sz="1600"/>
+            </a:lvl2pPr>
+            <a:lvl3pPr>
+              <a:defRPr sz="1400"/>
+            </a:lvl3pPr>
+            <a:lvl4pPr>
+              <a:defRPr sz="1400"/>
+            </a:lvl4pPr>
+            <a:lvl5pPr>
+              <a:defRPr sz="1400"/>
+            </a:lvl5pPr>
+            <a:lvl6pPr>
+              <a:defRPr sz="1400"/>
+            </a:lvl6pPr>
+            <a:lvl7pPr>
+              <a:defRPr sz="1400"/>
+            </a:lvl7pPr>
+            <a:lvl8pPr>
+              <a:defRPr sz="1400"/>
+            </a:lvl8pPr>
+            <a:lvl9pPr>
+              <a:defRPr sz="1400"/>
+            </a:lvl9pPr>
+          </a:lstStyle>
           <a:p>
             <a:pPr lvl="0"/>
             <a:r>
               <a:rPr lang="en-US"/>
-              <a:t>Edit Master text styles</a:t>
+              <a:t>Click to edit Master text styles</a:t>
             </a:r>
           </a:p>
           <a:p>
@@ -2529,21 +3193,30 @@
         </p:nvSpPr>
         <p:spPr>
           <a:xfrm>
-            <a:off x="6217920" y="1846052"/>
-            <a:ext cx="4937760" cy="736282"/>
+            <a:off x="6126480" y="1713655"/>
+            <a:ext cx="4480560" cy="731520"/>
           </a:xfrm>
         </p:spPr>
         <p:txBody>
-          <a:bodyPr lIns="91440" rIns="91440" anchor="ctr">
+          <a:bodyPr anchor="b">
             <a:normAutofit/>
           </a:bodyPr>
           <a:lstStyle>
             <a:lvl1pPr marL="0" indent="0">
+              <a:lnSpc>
+                <a:spcPct val="95000"/>
+              </a:lnSpc>
+              <a:spcBef>
+                <a:spcPts val="0"/>
+              </a:spcBef>
               <a:buNone/>
-              <a:defRPr sz="2000" b="0" cap="all" baseline="0">
+              <a:defRPr lang="en-US" sz="2000" b="0" kern="1200" dirty="0">
                 <a:solidFill>
                   <a:schemeClr val="tx2"/>
                 </a:solidFill>
+                <a:latin typeface="+mn-lt"/>
+                <a:ea typeface="+mn-ea"/>
+                <a:cs typeface="+mn-cs"/>
               </a:defRPr>
             </a:lvl1pPr>
             <a:lvl2pPr marL="457200" indent="0">
@@ -2580,10 +3253,19 @@
             </a:lvl9pPr>
           </a:lstStyle>
           <a:p>
-            <a:pPr lvl="0"/>
+            <a:pPr marL="0" lvl="0" indent="0" algn="l" defTabSz="914400" rtl="0" eaLnBrk="1" latinLnBrk="0" hangingPunct="1">
+              <a:lnSpc>
+                <a:spcPct val="90000"/>
+              </a:lnSpc>
+              <a:spcBef>
+                <a:spcPts val="2000"/>
+              </a:spcBef>
+              <a:buFontTx/>
+              <a:buNone/>
+            </a:pPr>
             <a:r>
               <a:rPr lang="en-US"/>
-              <a:t>Edit Master text styles</a:t>
+              <a:t>Click to edit Master text styles</a:t>
             </a:r>
           </a:p>
         </p:txBody>
@@ -2600,18 +3282,46 @@
         </p:nvSpPr>
         <p:spPr>
           <a:xfrm>
-            <a:off x="6217920" y="2582334"/>
-            <a:ext cx="4937760" cy="3378200"/>
+            <a:off x="6126480" y="2507550"/>
+            <a:ext cx="4480560" cy="3664650"/>
           </a:xfrm>
         </p:spPr>
         <p:txBody>
           <a:bodyPr/>
-          <a:lstStyle/>
+          <a:lstStyle>
+            <a:lvl1pPr>
+              <a:defRPr sz="1800"/>
+            </a:lvl1pPr>
+            <a:lvl2pPr>
+              <a:defRPr sz="1600"/>
+            </a:lvl2pPr>
+            <a:lvl3pPr>
+              <a:defRPr sz="1400"/>
+            </a:lvl3pPr>
+            <a:lvl4pPr>
+              <a:defRPr sz="1400"/>
+            </a:lvl4pPr>
+            <a:lvl5pPr>
+              <a:defRPr sz="1400"/>
+            </a:lvl5pPr>
+            <a:lvl6pPr>
+              <a:defRPr sz="1400"/>
+            </a:lvl6pPr>
+            <a:lvl7pPr>
+              <a:defRPr sz="1400"/>
+            </a:lvl7pPr>
+            <a:lvl8pPr>
+              <a:defRPr sz="1400"/>
+            </a:lvl8pPr>
+            <a:lvl9pPr>
+              <a:defRPr sz="1400"/>
+            </a:lvl9pPr>
+          </a:lstStyle>
           <a:p>
             <a:pPr lvl="0"/>
             <a:r>
               <a:rPr lang="en-US"/>
-              <a:t>Edit Master text styles</a:t>
+              <a:t>Click to edit Master text styles</a:t>
             </a:r>
           </a:p>
           <a:p>
@@ -2662,7 +3372,7 @@
           <a:p>
             <a:fld id="{B8914960-FD13-497E-B7F6-9F30A54F5548}" type="datetime1">
               <a:rPr lang="en-US" smtClean="0"/>
-              <a:t>26-Sep-18</a:t>
+              <a:t>9/15/2022</a:t>
             </a:fld>
             <a:endParaRPr lang="en-US" dirty="0"/>
           </a:p>
@@ -2717,7 +3427,7 @@
     </p:spTree>
     <p:extLst>
       <p:ext uri="{BB962C8B-B14F-4D97-AF65-F5344CB8AC3E}">
-        <p14:creationId xmlns:p14="http://schemas.microsoft.com/office/powerpoint/2010/main" val="2718675775"/>
+        <p14:creationId xmlns:p14="http://schemas.microsoft.com/office/powerpoint/2010/main" val="3765340446"/>
       </p:ext>
     </p:extLst>
   </p:cSld>
@@ -2746,7 +3456,7 @@
       </p:grpSpPr>
       <p:sp>
         <p:nvSpPr>
-          <p:cNvPr id="2" name="Title 1"/>
+          <p:cNvPr id="6" name="Title 5"/>
           <p:cNvSpPr>
             <a:spLocks noGrp="1"/>
           </p:cNvSpPr>
@@ -2784,7 +3494,7 @@
           <a:p>
             <a:fld id="{E97E6828-1FB6-4D77-85C2-D28FD5EBBD54}" type="datetime1">
               <a:rPr lang="en-US" smtClean="0"/>
-              <a:t>26-Sep-18</a:t>
+              <a:t>9/15/2022</a:t>
             </a:fld>
             <a:endParaRPr lang="en-US" dirty="0"/>
           </a:p>
@@ -2839,7 +3549,7 @@
     </p:spTree>
     <p:extLst>
       <p:ext uri="{BB962C8B-B14F-4D97-AF65-F5344CB8AC3E}">
-        <p14:creationId xmlns:p14="http://schemas.microsoft.com/office/powerpoint/2010/main" val="1058115329"/>
+        <p14:creationId xmlns:p14="http://schemas.microsoft.com/office/powerpoint/2010/main" val="3766345228"/>
       </p:ext>
     </p:extLst>
   </p:cSld>
@@ -2850,7 +3560,7 @@
 </file>
 
 <file path=ppt/slideLayouts/slideLayout7.xml><?xml version="1.0" encoding="utf-8"?>
-<p:sldLayout xmlns:a="http://schemas.openxmlformats.org/drawingml/2006/main" xmlns:r="http://schemas.openxmlformats.org/officeDocument/2006/relationships" xmlns:p="http://schemas.openxmlformats.org/presentationml/2006/main" showMasterSp="0" type="blank" preserve="1">
+<p:sldLayout xmlns:a="http://schemas.openxmlformats.org/drawingml/2006/main" xmlns:r="http://schemas.openxmlformats.org/officeDocument/2006/relationships" xmlns:p="http://schemas.openxmlformats.org/presentationml/2006/main" type="blank" preserve="1">
   <p:cSld name="Blank">
     <p:spTree>
       <p:nvGrpSpPr>
@@ -2868,83 +3578,7 @@
       </p:grpSpPr>
       <p:sp>
         <p:nvSpPr>
-          <p:cNvPr id="5" name="Rectangle 4"/>
-          <p:cNvSpPr/>
-          <p:nvPr/>
-        </p:nvSpPr>
-        <p:spPr>
-          <a:xfrm>
-            <a:off x="3175" y="6400800"/>
-            <a:ext cx="12188825" cy="457200"/>
-          </a:xfrm>
-          <a:prstGeom prst="rect">
-            <a:avLst/>
-          </a:prstGeom>
-          <a:solidFill>
-            <a:schemeClr val="accent2"/>
-          </a:solidFill>
-          <a:ln>
-            <a:noFill/>
-          </a:ln>
-        </p:spPr>
-        <p:style>
-          <a:lnRef idx="2">
-            <a:schemeClr val="accent1">
-              <a:shade val="50000"/>
-            </a:schemeClr>
-          </a:lnRef>
-          <a:fillRef idx="1">
-            <a:schemeClr val="accent1"/>
-          </a:fillRef>
-          <a:effectRef idx="0">
-            <a:schemeClr val="accent1"/>
-          </a:effectRef>
-          <a:fontRef idx="minor">
-            <a:schemeClr val="lt1"/>
-          </a:fontRef>
-        </p:style>
-      </p:sp>
-      <p:sp>
-        <p:nvSpPr>
-          <p:cNvPr id="6" name="Rectangle 5"/>
-          <p:cNvSpPr/>
-          <p:nvPr/>
-        </p:nvSpPr>
-        <p:spPr>
-          <a:xfrm>
-            <a:off x="15" y="6334316"/>
-            <a:ext cx="12188825" cy="64008"/>
-          </a:xfrm>
-          <a:prstGeom prst="rect">
-            <a:avLst/>
-          </a:prstGeom>
-          <a:solidFill>
-            <a:schemeClr val="accent1"/>
-          </a:solidFill>
-          <a:ln>
-            <a:noFill/>
-          </a:ln>
-        </p:spPr>
-        <p:style>
-          <a:lnRef idx="2">
-            <a:schemeClr val="accent1">
-              <a:shade val="50000"/>
-            </a:schemeClr>
-          </a:lnRef>
-          <a:fillRef idx="1">
-            <a:schemeClr val="accent1"/>
-          </a:fillRef>
-          <a:effectRef idx="0">
-            <a:schemeClr val="accent1"/>
-          </a:effectRef>
-          <a:fontRef idx="minor">
-            <a:schemeClr val="lt1"/>
-          </a:fontRef>
-        </p:style>
-      </p:sp>
-      <p:sp>
-        <p:nvSpPr>
-          <p:cNvPr id="7" name="Date Placeholder 6"/>
+          <p:cNvPr id="2" name="Date Placeholder 1"/>
           <p:cNvSpPr>
             <a:spLocks noGrp="1"/>
           </p:cNvSpPr>
@@ -2959,7 +3593,7 @@
           <a:p>
             <a:fld id="{A1DD06BB-83E4-484F-8D77-28A5A836B3BD}" type="datetime1">
               <a:rPr lang="en-US" smtClean="0"/>
-              <a:t>26-Sep-18</a:t>
+              <a:t>9/15/2022</a:t>
             </a:fld>
             <a:endParaRPr lang="en-US" dirty="0"/>
           </a:p>
@@ -2967,7 +3601,7 @@
       </p:sp>
       <p:sp>
         <p:nvSpPr>
-          <p:cNvPr id="8" name="Footer Placeholder 7"/>
+          <p:cNvPr id="3" name="Footer Placeholder 2"/>
           <p:cNvSpPr>
             <a:spLocks noGrp="1"/>
           </p:cNvSpPr>
@@ -2978,15 +3612,7 @@
         <p:spPr/>
         <p:txBody>
           <a:bodyPr/>
-          <a:lstStyle>
-            <a:lvl1pPr>
-              <a:defRPr>
-                <a:solidFill>
-                  <a:srgbClr val="FFFFFF"/>
-                </a:solidFill>
-              </a:defRPr>
-            </a:lvl1pPr>
-          </a:lstStyle>
+          <a:lstStyle/>
           <a:p>
             <a:r>
               <a:rPr lang="ru-RU"/>
@@ -2998,7 +3624,7 @@
       </p:sp>
       <p:sp>
         <p:nvSpPr>
-          <p:cNvPr id="9" name="Slide Number Placeholder 8"/>
+          <p:cNvPr id="4" name="Slide Number Placeholder 3"/>
           <p:cNvSpPr>
             <a:spLocks noGrp="1"/>
           </p:cNvSpPr>
@@ -3022,7 +3648,7 @@
     </p:spTree>
     <p:extLst>
       <p:ext uri="{BB962C8B-B14F-4D97-AF65-F5344CB8AC3E}">
-        <p14:creationId xmlns:p14="http://schemas.microsoft.com/office/powerpoint/2010/main" val="4153653356"/>
+        <p14:creationId xmlns:p14="http://schemas.microsoft.com/office/powerpoint/2010/main" val="1980894009"/>
       </p:ext>
     </p:extLst>
   </p:cSld>
@@ -3033,7 +3659,7 @@
 </file>
 
 <file path=ppt/slideLayouts/slideLayout8.xml><?xml version="1.0" encoding="utf-8"?>
-<p:sldLayout xmlns:a="http://schemas.openxmlformats.org/drawingml/2006/main" xmlns:r="http://schemas.openxmlformats.org/officeDocument/2006/relationships" xmlns:p="http://schemas.openxmlformats.org/presentationml/2006/main" showMasterSp="0" type="objTx" preserve="1">
+<p:sldLayout xmlns:a="http://schemas.openxmlformats.org/drawingml/2006/main" xmlns:r="http://schemas.openxmlformats.org/officeDocument/2006/relationships" xmlns:p="http://schemas.openxmlformats.org/presentationml/2006/main" type="objTx" preserve="1">
   <p:cSld name="Content with Caption">
     <p:spTree>
       <p:nvGrpSpPr>
@@ -3051,94 +3677,18 @@
       </p:grpSpPr>
       <p:sp>
         <p:nvSpPr>
-          <p:cNvPr id="8" name="Rectangle 7"/>
-          <p:cNvSpPr/>
-          <p:nvPr/>
+          <p:cNvPr id="2" name="Title 1"/>
+          <p:cNvSpPr>
+            <a:spLocks noGrp="1"/>
+          </p:cNvSpPr>
+          <p:nvPr>
+            <p:ph type="title"/>
+          </p:nvPr>
         </p:nvSpPr>
         <p:spPr>
           <a:xfrm>
-            <a:off x="16" y="0"/>
-            <a:ext cx="4050791" cy="6858000"/>
-          </a:xfrm>
-          <a:prstGeom prst="rect">
-            <a:avLst/>
-          </a:prstGeom>
-          <a:solidFill>
-            <a:schemeClr val="accent2"/>
-          </a:solidFill>
-          <a:ln>
-            <a:noFill/>
-          </a:ln>
-        </p:spPr>
-        <p:style>
-          <a:lnRef idx="2">
-            <a:schemeClr val="accent1">
-              <a:shade val="50000"/>
-            </a:schemeClr>
-          </a:lnRef>
-          <a:fillRef idx="1">
-            <a:schemeClr val="accent1"/>
-          </a:fillRef>
-          <a:effectRef idx="0">
-            <a:schemeClr val="accent1"/>
-          </a:effectRef>
-          <a:fontRef idx="minor">
-            <a:schemeClr val="lt1"/>
-          </a:fontRef>
-        </p:style>
-      </p:sp>
-      <p:sp>
-        <p:nvSpPr>
-          <p:cNvPr id="9" name="Rectangle 8"/>
-          <p:cNvSpPr/>
-          <p:nvPr/>
-        </p:nvSpPr>
-        <p:spPr>
-          <a:xfrm>
-            <a:off x="4040071" y="0"/>
-            <a:ext cx="64008" cy="6858000"/>
-          </a:xfrm>
-          <a:prstGeom prst="rect">
-            <a:avLst/>
-          </a:prstGeom>
-          <a:solidFill>
-            <a:schemeClr val="accent1"/>
-          </a:solidFill>
-          <a:ln>
-            <a:noFill/>
-          </a:ln>
-        </p:spPr>
-        <p:style>
-          <a:lnRef idx="2">
-            <a:schemeClr val="accent1">
-              <a:shade val="50000"/>
-            </a:schemeClr>
-          </a:lnRef>
-          <a:fillRef idx="1">
-            <a:schemeClr val="accent1"/>
-          </a:fillRef>
-          <a:effectRef idx="0">
-            <a:schemeClr val="accent1"/>
-          </a:effectRef>
-          <a:fontRef idx="minor">
-            <a:schemeClr val="lt1"/>
-          </a:fontRef>
-        </p:style>
-      </p:sp>
-      <p:sp>
-        <p:nvSpPr>
-          <p:cNvPr id="2" name="Title 1"/>
-          <p:cNvSpPr>
-            <a:spLocks noGrp="1"/>
-          </p:cNvSpPr>
-          <p:nvPr>
-            <p:ph type="title"/>
-          </p:nvPr>
-        </p:nvSpPr>
-        <p:spPr>
-          <a:xfrm>
-            <a:off x="457200" y="594359"/>
-            <a:ext cx="3200400" cy="2286000"/>
+            <a:off x="841248" y="457200"/>
+            <a:ext cx="3200400" cy="1600197"/>
           </a:xfrm>
         </p:spPr>
         <p:txBody>
@@ -3147,11 +3697,7 @@
           </a:bodyPr>
           <a:lstStyle>
             <a:lvl1pPr>
-              <a:defRPr sz="3600" b="0">
-                <a:solidFill>
-                  <a:srgbClr val="FFFFFF"/>
-                </a:solidFill>
-              </a:defRPr>
+              <a:defRPr sz="3200" b="0" baseline="0"/>
             </a:lvl1pPr>
           </a:lstStyle>
           <a:p>
@@ -3175,18 +3721,46 @@
         </p:nvSpPr>
         <p:spPr>
           <a:xfrm>
-            <a:off x="4800600" y="731520"/>
-            <a:ext cx="6492240" cy="5257800"/>
+            <a:off x="4504267" y="685800"/>
+            <a:ext cx="6079066" cy="5486400"/>
           </a:xfrm>
         </p:spPr>
         <p:txBody>
           <a:bodyPr/>
-          <a:lstStyle/>
+          <a:lstStyle>
+            <a:lvl1pPr>
+              <a:defRPr sz="2000"/>
+            </a:lvl1pPr>
+            <a:lvl2pPr>
+              <a:defRPr sz="1800"/>
+            </a:lvl2pPr>
+            <a:lvl3pPr>
+              <a:defRPr sz="1600"/>
+            </a:lvl3pPr>
+            <a:lvl4pPr>
+              <a:defRPr sz="1400"/>
+            </a:lvl4pPr>
+            <a:lvl5pPr>
+              <a:defRPr sz="1400"/>
+            </a:lvl5pPr>
+            <a:lvl6pPr>
+              <a:defRPr sz="1400"/>
+            </a:lvl6pPr>
+            <a:lvl7pPr>
+              <a:defRPr sz="1400"/>
+            </a:lvl7pPr>
+            <a:lvl8pPr>
+              <a:defRPr sz="1400"/>
+            </a:lvl8pPr>
+            <a:lvl9pPr>
+              <a:defRPr sz="1400"/>
+            </a:lvl9pPr>
+          </a:lstStyle>
           <a:p>
             <a:pPr lvl="0"/>
             <a:r>
               <a:rPr lang="en-US"/>
-              <a:t>Edit Master text styles</a:t>
+              <a:t>Click to edit Master text styles</a:t>
             </a:r>
           </a:p>
           <a:p>
@@ -3232,22 +3806,24 @@
         </p:nvSpPr>
         <p:spPr>
           <a:xfrm>
-            <a:off x="457200" y="2926080"/>
-            <a:ext cx="3200400" cy="3379124"/>
+            <a:off x="841248" y="2099734"/>
+            <a:ext cx="3200400" cy="3810001"/>
           </a:xfrm>
         </p:spPr>
         <p:txBody>
-          <a:bodyPr lIns="91440" rIns="91440">
+          <a:bodyPr>
             <a:normAutofit/>
           </a:bodyPr>
           <a:lstStyle>
             <a:lvl1pPr marL="0" indent="0">
+              <a:lnSpc>
+                <a:spcPct val="114000"/>
+              </a:lnSpc>
+              <a:spcBef>
+                <a:spcPts val="800"/>
+              </a:spcBef>
               <a:buNone/>
-              <a:defRPr sz="1500">
-                <a:solidFill>
-                  <a:srgbClr val="FFFFFF"/>
-                </a:solidFill>
-              </a:defRPr>
+              <a:defRPr sz="1300"/>
             </a:lvl1pPr>
             <a:lvl2pPr marL="457200" indent="0">
               <a:buNone/>
@@ -3286,7 +3862,7 @@
             <a:pPr lvl="0"/>
             <a:r>
               <a:rPr lang="en-US"/>
-              <a:t>Edit Master text styles</a:t>
+              <a:t>Click to edit Master text styles</a:t>
             </a:r>
           </a:p>
         </p:txBody>
@@ -3301,23 +3877,14 @@
             <p:ph type="dt" sz="half" idx="10"/>
           </p:nvPr>
         </p:nvSpPr>
-        <p:spPr>
-          <a:xfrm>
-            <a:off x="465512" y="6459785"/>
-            <a:ext cx="2618510" cy="365125"/>
-          </a:xfrm>
-        </p:spPr>
+        <p:spPr/>
         <p:txBody>
           <a:bodyPr/>
-          <a:lstStyle>
-            <a:lvl1pPr algn="l">
-              <a:defRPr/>
-            </a:lvl1pPr>
-          </a:lstStyle>
+          <a:lstStyle/>
           <a:p>
             <a:fld id="{CC678E94-7659-41EA-92C4-3F3288CDAD7E}" type="datetime1">
               <a:rPr lang="en-US" smtClean="0"/>
-              <a:t>26-Sep-18</a:t>
+              <a:t>9/15/2022</a:t>
             </a:fld>
             <a:endParaRPr lang="en-US" dirty="0"/>
           </a:p>
@@ -3333,23 +3900,10 @@
             <p:ph type="ftr" sz="quarter" idx="11"/>
           </p:nvPr>
         </p:nvSpPr>
-        <p:spPr>
-          <a:xfrm>
-            <a:off x="4800600" y="6459785"/>
-            <a:ext cx="4648200" cy="365125"/>
-          </a:xfrm>
-        </p:spPr>
+        <p:spPr/>
         <p:txBody>
           <a:bodyPr/>
-          <a:lstStyle>
-            <a:lvl1pPr algn="l">
-              <a:defRPr>
-                <a:solidFill>
-                  <a:schemeClr val="tx2"/>
-                </a:solidFill>
-              </a:defRPr>
-            </a:lvl1pPr>
-          </a:lstStyle>
+          <a:lstStyle/>
           <a:p>
             <a:r>
               <a:rPr lang="ru-RU"/>
@@ -3372,15 +3926,7 @@
         <p:spPr/>
         <p:txBody>
           <a:bodyPr/>
-          <a:lstStyle>
-            <a:lvl1pPr>
-              <a:defRPr>
-                <a:solidFill>
-                  <a:schemeClr val="tx2"/>
-                </a:solidFill>
-              </a:defRPr>
-            </a:lvl1pPr>
-          </a:lstStyle>
+          <a:lstStyle/>
           <a:p>
             <a:fld id="{8A7A6979-0714-4377-B894-6BE4C2D6E202}" type="slidenum">
               <a:rPr lang="en-US" smtClean="0"/>
@@ -3393,7 +3939,7 @@
     </p:spTree>
     <p:extLst>
       <p:ext uri="{BB962C8B-B14F-4D97-AF65-F5344CB8AC3E}">
-        <p14:creationId xmlns:p14="http://schemas.microsoft.com/office/powerpoint/2010/main" val="644007449"/>
+        <p14:creationId xmlns:p14="http://schemas.microsoft.com/office/powerpoint/2010/main" val="2277086648"/>
       </p:ext>
     </p:extLst>
   </p:cSld>
@@ -3404,7 +3950,7 @@
 </file>
 
 <file path=ppt/slideLayouts/slideLayout9.xml><?xml version="1.0" encoding="utf-8"?>
-<p:sldLayout xmlns:a="http://schemas.openxmlformats.org/drawingml/2006/main" xmlns:r="http://schemas.openxmlformats.org/officeDocument/2006/relationships" xmlns:p="http://schemas.openxmlformats.org/presentationml/2006/main" showMasterSp="0" type="picTx" preserve="1">
+<p:sldLayout xmlns:a="http://schemas.openxmlformats.org/drawingml/2006/main" xmlns:r="http://schemas.openxmlformats.org/officeDocument/2006/relationships" xmlns:p="http://schemas.openxmlformats.org/presentationml/2006/main" type="picTx" preserve="1">
   <p:cSld name="Picture with Caption">
     <p:spTree>
       <p:nvGrpSpPr>
@@ -3428,14 +3974,14 @@
         </p:nvSpPr>
         <p:spPr>
           <a:xfrm>
-            <a:off x="0" y="4953000"/>
-            <a:ext cx="12188825" cy="1905000"/>
+            <a:off x="0" y="5105400"/>
+            <a:ext cx="11292840" cy="1752600"/>
           </a:xfrm>
           <a:prstGeom prst="rect">
             <a:avLst/>
           </a:prstGeom>
           <a:solidFill>
-            <a:schemeClr val="accent2"/>
+            <a:srgbClr val="000000"/>
           </a:solidFill>
           <a:ln>
             <a:noFill/>
@@ -3460,67 +4006,29 @@
       </p:sp>
       <p:sp>
         <p:nvSpPr>
-          <p:cNvPr id="9" name="Rectangle 8"/>
-          <p:cNvSpPr/>
-          <p:nvPr/>
+          <p:cNvPr id="2" name="Title 1"/>
+          <p:cNvSpPr>
+            <a:spLocks noGrp="1"/>
+          </p:cNvSpPr>
+          <p:nvPr>
+            <p:ph type="title"/>
+          </p:nvPr>
         </p:nvSpPr>
         <p:spPr>
           <a:xfrm>
-            <a:off x="15" y="4915076"/>
-            <a:ext cx="12188825" cy="64008"/>
-          </a:xfrm>
-          <a:prstGeom prst="rect">
-            <a:avLst/>
-          </a:prstGeom>
-          <a:solidFill>
-            <a:schemeClr val="accent1"/>
-          </a:solidFill>
-          <a:ln>
-            <a:noFill/>
-          </a:ln>
-        </p:spPr>
-        <p:style>
-          <a:lnRef idx="2">
-            <a:schemeClr val="accent1">
-              <a:shade val="50000"/>
-            </a:schemeClr>
-          </a:lnRef>
-          <a:fillRef idx="1">
-            <a:schemeClr val="accent1"/>
-          </a:fillRef>
-          <a:effectRef idx="0">
-            <a:schemeClr val="accent1"/>
-          </a:effectRef>
-          <a:fontRef idx="minor">
-            <a:schemeClr val="lt1"/>
-          </a:fontRef>
-        </p:style>
-      </p:sp>
-      <p:sp>
-        <p:nvSpPr>
-          <p:cNvPr id="2" name="Title 1"/>
-          <p:cNvSpPr>
-            <a:spLocks noGrp="1"/>
-          </p:cNvSpPr>
-          <p:nvPr>
-            <p:ph type="title"/>
-          </p:nvPr>
-        </p:nvSpPr>
-        <p:spPr>
-          <a:xfrm>
-            <a:off x="1097280" y="5074920"/>
-            <a:ext cx="10113264" cy="822960"/>
+            <a:off x="914400" y="5257800"/>
+            <a:ext cx="9982200" cy="914400"/>
           </a:xfrm>
         </p:spPr>
         <p:txBody>
-          <a:bodyPr lIns="91440" tIns="0" rIns="91440" bIns="0" anchor="b">
-            <a:noAutofit/>
+          <a:bodyPr anchor="b">
+            <a:normAutofit/>
           </a:bodyPr>
           <a:lstStyle>
             <a:lvl1pPr>
-              <a:defRPr sz="3600" b="0">
+              <a:defRPr sz="2800" b="0">
                 <a:solidFill>
-                  <a:srgbClr val="FFFFFF"/>
+                  <a:schemeClr val="bg1"/>
                 </a:solidFill>
               </a:defRPr>
             </a:lvl1pPr>
@@ -3546,18 +4054,15 @@
         </p:nvSpPr>
         <p:spPr>
           <a:xfrm>
-            <a:off x="15" y="0"/>
-            <a:ext cx="12191985" cy="4915076"/>
+            <a:off x="0" y="0"/>
+            <a:ext cx="11292840" cy="5128923"/>
           </a:xfrm>
-          <a:blipFill>
-            <a:blip r:embed="rId2"/>
-            <a:stretch>
-              <a:fillRect/>
-            </a:stretch>
-          </a:blipFill>
+          <a:solidFill>
+            <a:schemeClr val="accent1"/>
+          </a:solidFill>
         </p:spPr>
         <p:txBody>
-          <a:bodyPr lIns="457200" tIns="457200" anchor="t"/>
+          <a:bodyPr anchor="t"/>
           <a:lstStyle>
             <a:lvl1pPr marL="0" indent="0">
               <a:buNone/>
@@ -3621,26 +4126,28 @@
         </p:nvSpPr>
         <p:spPr>
           <a:xfrm>
-            <a:off x="1097280" y="5907023"/>
-            <a:ext cx="10113264" cy="594360"/>
+            <a:off x="914400" y="6108589"/>
+            <a:ext cx="9982200" cy="597011"/>
           </a:xfrm>
         </p:spPr>
         <p:txBody>
-          <a:bodyPr lIns="91440" tIns="0" rIns="91440" bIns="0">
+          <a:bodyPr>
             <a:normAutofit/>
           </a:bodyPr>
           <a:lstStyle>
             <a:lvl1pPr marL="0" indent="0">
+              <a:lnSpc>
+                <a:spcPct val="100000"/>
+              </a:lnSpc>
               <a:spcBef>
-                <a:spcPts val="0"/>
+                <a:spcPts val="800"/>
               </a:spcBef>
-              <a:spcAft>
-                <a:spcPts val="600"/>
-              </a:spcAft>
               <a:buNone/>
-              <a:defRPr sz="1500">
+              <a:defRPr sz="1300">
                 <a:solidFill>
-                  <a:srgbClr val="FFFFFF"/>
+                  <a:schemeClr val="bg1">
+                    <a:lumMod val="85000"/>
+                  </a:schemeClr>
                 </a:solidFill>
               </a:defRPr>
             </a:lvl1pPr>
@@ -3681,7 +4188,7 @@
             <a:pPr lvl="0"/>
             <a:r>
               <a:rPr lang="en-US"/>
-              <a:t>Edit Master text styles</a:t>
+              <a:t>Click to edit Master text styles</a:t>
             </a:r>
           </a:p>
         </p:txBody>
@@ -3703,7 +4210,7 @@
           <a:p>
             <a:fld id="{2C2CBD50-D88C-4AE4-90E8-572711B2CA36}" type="datetime1">
               <a:rPr lang="en-US" smtClean="0"/>
-              <a:t>26-Sep-18</a:t>
+              <a:t>9/15/2022</a:t>
             </a:fld>
             <a:endParaRPr lang="en-US" dirty="0"/>
           </a:p>
@@ -3758,7 +4265,7 @@
     </p:spTree>
     <p:extLst>
       <p:ext uri="{BB962C8B-B14F-4D97-AF65-F5344CB8AC3E}">
-        <p14:creationId xmlns:p14="http://schemas.microsoft.com/office/powerpoint/2010/main" val="4093517034"/>
+        <p14:creationId xmlns:p14="http://schemas.microsoft.com/office/powerpoint/2010/main" val="3399506529"/>
       </p:ext>
     </p:extLst>
   </p:cSld>
@@ -3798,14 +4305,16 @@
         </p:nvSpPr>
         <p:spPr>
           <a:xfrm>
-            <a:off x="1" y="6400800"/>
-            <a:ext cx="12192000" cy="457200"/>
+            <a:off x="11292840" y="0"/>
+            <a:ext cx="914400" cy="6858000"/>
           </a:xfrm>
           <a:prstGeom prst="rect">
             <a:avLst/>
           </a:prstGeom>
           <a:solidFill>
-            <a:schemeClr val="accent2"/>
+            <a:schemeClr val="tx2">
+              <a:lumMod val="75000"/>
+            </a:schemeClr>
           </a:solidFill>
           <a:ln>
             <a:noFill/>
@@ -3830,56 +4339,18 @@
       </p:sp>
       <p:sp>
         <p:nvSpPr>
-          <p:cNvPr id="9" name="Rectangle 8"/>
-          <p:cNvSpPr/>
-          <p:nvPr/>
+          <p:cNvPr id="2" name="Title Placeholder 1"/>
+          <p:cNvSpPr>
+            <a:spLocks noGrp="1"/>
+          </p:cNvSpPr>
+          <p:nvPr>
+            <p:ph type="title"/>
+          </p:nvPr>
         </p:nvSpPr>
         <p:spPr>
           <a:xfrm>
-            <a:off x="0" y="6334316"/>
-            <a:ext cx="12192001" cy="65998"/>
-          </a:xfrm>
-          <a:prstGeom prst="rect">
-            <a:avLst/>
-          </a:prstGeom>
-          <a:solidFill>
-            <a:schemeClr val="accent1"/>
-          </a:solidFill>
-          <a:ln>
-            <a:noFill/>
-          </a:ln>
-        </p:spPr>
-        <p:style>
-          <a:lnRef idx="2">
-            <a:schemeClr val="accent1">
-              <a:shade val="50000"/>
-            </a:schemeClr>
-          </a:lnRef>
-          <a:fillRef idx="1">
-            <a:schemeClr val="accent1"/>
-          </a:fillRef>
-          <a:effectRef idx="0">
-            <a:schemeClr val="accent1"/>
-          </a:effectRef>
-          <a:fontRef idx="minor">
-            <a:schemeClr val="lt1"/>
-          </a:fontRef>
-        </p:style>
-      </p:sp>
-      <p:sp>
-        <p:nvSpPr>
-          <p:cNvPr id="2" name="Title Placeholder 1"/>
-          <p:cNvSpPr>
-            <a:spLocks noGrp="1"/>
-          </p:cNvSpPr>
-          <p:nvPr>
-            <p:ph type="title"/>
-          </p:nvPr>
-        </p:nvSpPr>
-        <p:spPr>
-          <a:xfrm>
-            <a:off x="1097280" y="286603"/>
-            <a:ext cx="10058400" cy="1450757"/>
+            <a:off x="1261872" y="365760"/>
+            <a:ext cx="9692640" cy="1325562"/>
           </a:xfrm>
           <a:prstGeom prst="rect">
             <a:avLst/>
@@ -3911,15 +4382,15 @@
         </p:nvSpPr>
         <p:spPr>
           <a:xfrm>
-            <a:off x="1097280" y="1845734"/>
-            <a:ext cx="10058400" cy="4023360"/>
+            <a:off x="1261872" y="1828800"/>
+            <a:ext cx="8595360" cy="4351337"/>
           </a:xfrm>
           <a:prstGeom prst="rect">
             <a:avLst/>
           </a:prstGeom>
         </p:spPr>
         <p:txBody>
-          <a:bodyPr vert="horz" lIns="0" tIns="45720" rIns="0" bIns="45720" rtlCol="0">
+          <a:bodyPr vert="horz" lIns="91440" tIns="45720" rIns="91440" bIns="45720" rtlCol="0">
             <a:normAutofit/>
           </a:bodyPr>
           <a:lstStyle/>
@@ -3927,7 +4398,7 @@
             <a:pPr lvl="0"/>
             <a:r>
               <a:rPr lang="en-US"/>
-              <a:t>Edit Master text styles</a:t>
+              <a:t>Click to edit Master text styles</a:t>
             </a:r>
           </a:p>
           <a:p>
@@ -3972,9 +4443,9 @@
           </p:nvPr>
         </p:nvSpPr>
         <p:spPr>
-          <a:xfrm>
-            <a:off x="1097280" y="6459785"/>
-            <a:ext cx="2472271" cy="365125"/>
+          <a:xfrm rot="16200000">
+            <a:off x="10797542" y="998537"/>
+            <a:ext cx="1904999" cy="365125"/>
           </a:xfrm>
           <a:prstGeom prst="rect">
             <a:avLst/>
@@ -3983,10 +4454,13 @@
         <p:txBody>
           <a:bodyPr vert="horz" lIns="91440" tIns="45720" rIns="91440" bIns="45720" rtlCol="0" anchor="ctr"/>
           <a:lstStyle>
-            <a:lvl1pPr algn="l">
-              <a:defRPr sz="900">
+            <a:lvl1pPr algn="r">
+              <a:defRPr sz="1050" b="0">
                 <a:solidFill>
-                  <a:srgbClr val="FFFFFF"/>
+                  <a:schemeClr val="tx2">
+                    <a:lumMod val="20000"/>
+                    <a:lumOff val="80000"/>
+                  </a:schemeClr>
                 </a:solidFill>
               </a:defRPr>
             </a:lvl1pPr>
@@ -3994,7 +4468,7 @@
           <a:p>
             <a:fld id="{FBC6C36E-492C-458A-91D6-9716422A429E}" type="datetime1">
               <a:rPr lang="en-US" smtClean="0"/>
-              <a:t>26-Sep-18</a:t>
+              <a:t>9/15/2022</a:t>
             </a:fld>
             <a:endParaRPr lang="en-US" dirty="0"/>
           </a:p>
@@ -4011,9 +4485,9 @@
           </p:nvPr>
         </p:nvSpPr>
         <p:spPr>
-          <a:xfrm>
-            <a:off x="3686185" y="6459785"/>
-            <a:ext cx="4822804" cy="365125"/>
+          <a:xfrm rot="16200000">
+            <a:off x="9959341" y="4046537"/>
+            <a:ext cx="3581400" cy="365125"/>
           </a:xfrm>
           <a:prstGeom prst="rect">
             <a:avLst/>
@@ -4022,10 +4496,13 @@
         <p:txBody>
           <a:bodyPr vert="horz" lIns="91440" tIns="45720" rIns="91440" bIns="45720" rtlCol="0" anchor="ctr"/>
           <a:lstStyle>
-            <a:lvl1pPr algn="ctr">
-              <a:defRPr sz="900" cap="all" baseline="0">
+            <a:lvl1pPr algn="l">
+              <a:defRPr sz="1050">
                 <a:solidFill>
-                  <a:srgbClr val="FFFFFF"/>
+                  <a:schemeClr val="tx2">
+                    <a:lumMod val="20000"/>
+                    <a:lumOff val="80000"/>
+                  </a:schemeClr>
                 </a:solidFill>
               </a:defRPr>
             </a:lvl1pPr>
@@ -4051,20 +4528,25 @@
         </p:nvSpPr>
         <p:spPr>
           <a:xfrm>
-            <a:off x="9900458" y="6459785"/>
-            <a:ext cx="1312025" cy="365125"/>
+            <a:off x="11292840" y="6172200"/>
+            <a:ext cx="914400" cy="593725"/>
           </a:xfrm>
           <a:prstGeom prst="rect">
             <a:avLst/>
           </a:prstGeom>
         </p:spPr>
         <p:txBody>
-          <a:bodyPr vert="horz" lIns="91440" tIns="45720" rIns="91440" bIns="45720" rtlCol="0" anchor="ctr"/>
+          <a:bodyPr vert="horz" lIns="45720" tIns="45720" rIns="45720" bIns="45720" rtlCol="0" anchor="ctr">
+            <a:normAutofit/>
+          </a:bodyPr>
           <a:lstStyle>
-            <a:lvl1pPr algn="r">
-              <a:defRPr sz="1050">
+            <a:lvl1pPr algn="ctr">
+              <a:defRPr sz="3600">
                 <a:solidFill>
-                  <a:srgbClr val="FFFFFF"/>
+                  <a:schemeClr val="tx2">
+                    <a:lumMod val="60000"/>
+                    <a:lumOff val="40000"/>
+                  </a:schemeClr>
                 </a:solidFill>
               </a:defRPr>
             </a:lvl1pPr>
@@ -4079,82 +4561,41 @@
           </a:p>
         </p:txBody>
       </p:sp>
-      <p:cxnSp>
-        <p:nvCxnSpPr>
-          <p:cNvPr id="10" name="Straight Connector 9"/>
-          <p:cNvCxnSpPr/>
-          <p:nvPr/>
-        </p:nvCxnSpPr>
-        <p:spPr>
-          <a:xfrm>
-            <a:off x="1193532" y="1737845"/>
-            <a:ext cx="9966960" cy="0"/>
-          </a:xfrm>
-          <a:prstGeom prst="line">
-            <a:avLst/>
-          </a:prstGeom>
-          <a:ln w="6350">
-            <a:solidFill>
-              <a:schemeClr val="tx1">
-                <a:lumMod val="50000"/>
-                <a:lumOff val="50000"/>
-              </a:schemeClr>
-            </a:solidFill>
-          </a:ln>
-        </p:spPr>
-        <p:style>
-          <a:lnRef idx="1">
-            <a:schemeClr val="accent1"/>
-          </a:lnRef>
-          <a:fillRef idx="0">
-            <a:schemeClr val="accent1"/>
-          </a:fillRef>
-          <a:effectRef idx="0">
-            <a:schemeClr val="accent1"/>
-          </a:effectRef>
-          <a:fontRef idx="minor">
-            <a:schemeClr val="tx1"/>
-          </a:fontRef>
-        </p:style>
-      </p:cxnSp>
     </p:spTree>
     <p:extLst>
       <p:ext uri="{BB962C8B-B14F-4D97-AF65-F5344CB8AC3E}">
-        <p14:creationId xmlns:p14="http://schemas.microsoft.com/office/powerpoint/2010/main" val="3155827364"/>
+        <p14:creationId xmlns:p14="http://schemas.microsoft.com/office/powerpoint/2010/main" val="792471696"/>
       </p:ext>
     </p:extLst>
   </p:cSld>
   <p:clrMap bg1="lt1" tx1="dk1" bg2="lt2" tx2="dk2" accent1="accent1" accent2="accent2" accent3="accent3" accent4="accent4" accent5="accent5" accent6="accent6" hlink="hlink" folHlink="folHlink"/>
   <p:sldLayoutIdLst>
-    <p:sldLayoutId id="2147483721" r:id="rId1"/>
-    <p:sldLayoutId id="2147483722" r:id="rId2"/>
-    <p:sldLayoutId id="2147483723" r:id="rId3"/>
-    <p:sldLayoutId id="2147483724" r:id="rId4"/>
-    <p:sldLayoutId id="2147483725" r:id="rId5"/>
-    <p:sldLayoutId id="2147483726" r:id="rId6"/>
-    <p:sldLayoutId id="2147483727" r:id="rId7"/>
-    <p:sldLayoutId id="2147483728" r:id="rId8"/>
-    <p:sldLayoutId id="2147483729" r:id="rId9"/>
-    <p:sldLayoutId id="2147483730" r:id="rId10"/>
-    <p:sldLayoutId id="2147483731" r:id="rId11"/>
+    <p:sldLayoutId id="2147483733" r:id="rId1"/>
+    <p:sldLayoutId id="2147483734" r:id="rId2"/>
+    <p:sldLayoutId id="2147483735" r:id="rId3"/>
+    <p:sldLayoutId id="2147483736" r:id="rId4"/>
+    <p:sldLayoutId id="2147483737" r:id="rId5"/>
+    <p:sldLayoutId id="2147483738" r:id="rId6"/>
+    <p:sldLayoutId id="2147483739" r:id="rId7"/>
+    <p:sldLayoutId id="2147483740" r:id="rId8"/>
+    <p:sldLayoutId id="2147483741" r:id="rId9"/>
+    <p:sldLayoutId id="2147483742" r:id="rId10"/>
+    <p:sldLayoutId id="2147483743" r:id="rId11"/>
   </p:sldLayoutIdLst>
   <p:hf hdr="0" dt="0"/>
   <p:txStyles>
     <p:titleStyle>
       <a:lvl1pPr algn="l" defTabSz="914400" rtl="0" eaLnBrk="1" latinLnBrk="0" hangingPunct="1">
         <a:lnSpc>
-          <a:spcPct val="85000"/>
+          <a:spcPct val="90000"/>
         </a:lnSpc>
         <a:spcBef>
           <a:spcPct val="0"/>
         </a:spcBef>
         <a:buNone/>
-        <a:defRPr sz="4800" kern="1200" spc="-50" baseline="0">
+        <a:defRPr sz="4400" kern="1200" spc="-50" baseline="0">
           <a:solidFill>
-            <a:schemeClr val="tx1">
-              <a:lumMod val="75000"/>
-              <a:lumOff val="25000"/>
-            </a:schemeClr>
+            <a:schemeClr val="tx1"/>
           </a:solidFill>
           <a:latin typeface="+mj-lt"/>
           <a:ea typeface="+mj-ea"/>
@@ -4163,12 +4604,12 @@
       </a:lvl1pPr>
     </p:titleStyle>
     <p:bodyStyle>
-      <a:lvl1pPr marL="91440" indent="-91440" algn="l" defTabSz="914400" rtl="0" eaLnBrk="1" latinLnBrk="0" hangingPunct="1">
+      <a:lvl1pPr marL="182880" indent="-182880" algn="l" defTabSz="914400" rtl="0" eaLnBrk="1" latinLnBrk="0" hangingPunct="1">
         <a:lnSpc>
-          <a:spcPct val="90000"/>
+          <a:spcPct val="95000"/>
         </a:lnSpc>
         <a:spcBef>
-          <a:spcPts val="1200"/>
+          <a:spcPts val="1400"/>
         </a:spcBef>
         <a:spcAft>
           <a:spcPts val="200"/>
@@ -4176,41 +4617,38 @@
         <a:buClr>
           <a:schemeClr val="accent1"/>
         </a:buClr>
-        <a:buSzPct val="100000"/>
-        <a:buFont typeface="Calibri" panose="020F0502020204030204" pitchFamily="34" charset="0"/>
-        <a:buChar char=" "/>
-        <a:defRPr sz="2000" kern="1200">
+        <a:buSzPct val="80000"/>
+        <a:buFont typeface="Arial" pitchFamily="34" charset="0"/>
+        <a:buChar char="•"/>
+        <a:defRPr sz="1800" kern="1200" spc="10" baseline="0">
           <a:solidFill>
-            <a:schemeClr val="tx1">
-              <a:lumMod val="75000"/>
-              <a:lumOff val="25000"/>
-            </a:schemeClr>
+            <a:schemeClr val="tx1"/>
           </a:solidFill>
           <a:latin typeface="+mn-lt"/>
           <a:ea typeface="+mn-ea"/>
           <a:cs typeface="+mn-cs"/>
         </a:defRPr>
       </a:lvl1pPr>
-      <a:lvl2pPr marL="384048" indent="-182880" algn="l" defTabSz="914400" rtl="0" eaLnBrk="1" latinLnBrk="0" hangingPunct="1">
+      <a:lvl2pPr marL="457200" indent="-182880" algn="l" defTabSz="914400" rtl="0" eaLnBrk="1" latinLnBrk="0" hangingPunct="1">
         <a:lnSpc>
           <a:spcPct val="90000"/>
         </a:lnSpc>
         <a:spcBef>
-          <a:spcPts val="200"/>
+          <a:spcPts val="300"/>
         </a:spcBef>
         <a:spcAft>
-          <a:spcPts val="400"/>
+          <a:spcPts val="300"/>
         </a:spcAft>
         <a:buClr>
           <a:schemeClr val="accent1"/>
         </a:buClr>
-        <a:buFont typeface="Calibri" pitchFamily="34" charset="0"/>
-        <a:buChar char="◦"/>
-        <a:defRPr sz="1800" kern="1200">
+        <a:buFont typeface="Wingdings 2" pitchFamily="18" charset="2"/>
+        <a:buChar char=""/>
+        <a:defRPr sz="1600" kern="1200">
           <a:solidFill>
             <a:schemeClr val="tx1">
-              <a:lumMod val="75000"/>
-              <a:lumOff val="25000"/>
+              <a:lumMod val="85000"/>
+              <a:lumOff val="15000"/>
             </a:schemeClr>
           </a:solidFill>
           <a:latin typeface="+mn-lt"/>
@@ -4218,26 +4656,26 @@
           <a:cs typeface="+mn-cs"/>
         </a:defRPr>
       </a:lvl2pPr>
-      <a:lvl3pPr marL="566928" indent="-182880" algn="l" defTabSz="914400" rtl="0" eaLnBrk="1" latinLnBrk="0" hangingPunct="1">
+      <a:lvl3pPr marL="731520" indent="-182880" algn="l" defTabSz="914400" rtl="0" eaLnBrk="1" latinLnBrk="0" hangingPunct="1">
         <a:lnSpc>
           <a:spcPct val="90000"/>
         </a:lnSpc>
         <a:spcBef>
-          <a:spcPts val="200"/>
+          <a:spcPts val="300"/>
         </a:spcBef>
         <a:spcAft>
-          <a:spcPts val="400"/>
+          <a:spcPts val="300"/>
         </a:spcAft>
         <a:buClr>
           <a:schemeClr val="accent1"/>
         </a:buClr>
-        <a:buFont typeface="Calibri" pitchFamily="34" charset="0"/>
-        <a:buChar char="◦"/>
+        <a:buFont typeface="Wingdings 2" pitchFamily="18" charset="2"/>
+        <a:buChar char=""/>
         <a:defRPr sz="1400" kern="1200">
           <a:solidFill>
             <a:schemeClr val="tx1">
-              <a:lumMod val="75000"/>
-              <a:lumOff val="25000"/>
+              <a:lumMod val="85000"/>
+              <a:lumOff val="15000"/>
             </a:schemeClr>
           </a:solidFill>
           <a:latin typeface="+mn-lt"/>
@@ -4245,26 +4683,26 @@
           <a:cs typeface="+mn-cs"/>
         </a:defRPr>
       </a:lvl3pPr>
-      <a:lvl4pPr marL="749808" indent="-182880" algn="l" defTabSz="914400" rtl="0" eaLnBrk="1" latinLnBrk="0" hangingPunct="1">
+      <a:lvl4pPr marL="1005840" indent="-182880" algn="l" defTabSz="914400" rtl="0" eaLnBrk="1" latinLnBrk="0" hangingPunct="1">
         <a:lnSpc>
           <a:spcPct val="90000"/>
         </a:lnSpc>
         <a:spcBef>
-          <a:spcPts val="200"/>
+          <a:spcPts val="300"/>
         </a:spcBef>
         <a:spcAft>
-          <a:spcPts val="400"/>
+          <a:spcPts val="300"/>
         </a:spcAft>
         <a:buClr>
           <a:schemeClr val="accent1"/>
         </a:buClr>
-        <a:buFont typeface="Calibri" pitchFamily="34" charset="0"/>
-        <a:buChar char="◦"/>
+        <a:buFont typeface="Wingdings 2" pitchFamily="18" charset="2"/>
+        <a:buChar char=""/>
         <a:defRPr sz="1400" kern="1200">
           <a:solidFill>
             <a:schemeClr val="tx1">
-              <a:lumMod val="75000"/>
-              <a:lumOff val="25000"/>
+              <a:lumMod val="85000"/>
+              <a:lumOff val="15000"/>
             </a:schemeClr>
           </a:solidFill>
           <a:latin typeface="+mn-lt"/>
@@ -4272,26 +4710,26 @@
           <a:cs typeface="+mn-cs"/>
         </a:defRPr>
       </a:lvl4pPr>
-      <a:lvl5pPr marL="932688" indent="-182880" algn="l" defTabSz="914400" rtl="0" eaLnBrk="1" latinLnBrk="0" hangingPunct="1">
+      <a:lvl5pPr marL="1280160" indent="-182880" algn="l" defTabSz="914400" rtl="0" eaLnBrk="1" latinLnBrk="0" hangingPunct="1">
         <a:lnSpc>
           <a:spcPct val="90000"/>
         </a:lnSpc>
         <a:spcBef>
-          <a:spcPts val="200"/>
+          <a:spcPts val="300"/>
         </a:spcBef>
         <a:spcAft>
-          <a:spcPts val="400"/>
+          <a:spcPts val="300"/>
         </a:spcAft>
         <a:buClr>
           <a:schemeClr val="accent1"/>
         </a:buClr>
-        <a:buFont typeface="Calibri" pitchFamily="34" charset="0"/>
-        <a:buChar char="◦"/>
+        <a:buFont typeface="Wingdings 2" pitchFamily="18" charset="2"/>
+        <a:buChar char=""/>
         <a:defRPr sz="1400" kern="1200">
           <a:solidFill>
             <a:schemeClr val="tx1">
-              <a:lumMod val="75000"/>
-              <a:lumOff val="25000"/>
+              <a:lumMod val="85000"/>
+              <a:lumOff val="15000"/>
             </a:schemeClr>
           </a:solidFill>
           <a:latin typeface="+mn-lt"/>
@@ -4299,26 +4737,26 @@
           <a:cs typeface="+mn-cs"/>
         </a:defRPr>
       </a:lvl5pPr>
-      <a:lvl6pPr marL="1100000" indent="-228600" algn="l" defTabSz="914400" rtl="0" eaLnBrk="1" latinLnBrk="0" hangingPunct="1">
+      <a:lvl6pPr marL="1600000" indent="-228600" algn="l" defTabSz="914400" rtl="0" eaLnBrk="1" latinLnBrk="0" hangingPunct="1">
         <a:lnSpc>
           <a:spcPct val="90000"/>
         </a:lnSpc>
         <a:spcBef>
-          <a:spcPts val="200"/>
+          <a:spcPts val="300"/>
         </a:spcBef>
         <a:spcAft>
-          <a:spcPts val="400"/>
+          <a:spcPts val="300"/>
         </a:spcAft>
         <a:buClr>
           <a:schemeClr val="accent1"/>
         </a:buClr>
-        <a:buFont typeface="Calibri" pitchFamily="34" charset="0"/>
-        <a:buChar char="◦"/>
+        <a:buFont typeface="Wingdings 2" pitchFamily="18" charset="2"/>
+        <a:buChar char=""/>
         <a:defRPr sz="1400" kern="1200">
           <a:solidFill>
             <a:schemeClr val="tx1">
-              <a:lumMod val="75000"/>
-              <a:lumOff val="25000"/>
+              <a:lumMod val="85000"/>
+              <a:lumOff val="15000"/>
             </a:schemeClr>
           </a:solidFill>
           <a:latin typeface="+mn-lt"/>
@@ -4326,26 +4764,26 @@
           <a:cs typeface="+mn-cs"/>
         </a:defRPr>
       </a:lvl6pPr>
-      <a:lvl7pPr marL="1300000" indent="-228600" algn="l" defTabSz="914400" rtl="0" eaLnBrk="1" latinLnBrk="0" hangingPunct="1">
+      <a:lvl7pPr marL="1900000" indent="-228600" algn="l" defTabSz="914400" rtl="0" eaLnBrk="1" latinLnBrk="0" hangingPunct="1">
         <a:lnSpc>
           <a:spcPct val="90000"/>
         </a:lnSpc>
         <a:spcBef>
-          <a:spcPts val="200"/>
+          <a:spcPts val="300"/>
         </a:spcBef>
         <a:spcAft>
-          <a:spcPts val="400"/>
+          <a:spcPts val="300"/>
         </a:spcAft>
         <a:buClr>
           <a:schemeClr val="accent1"/>
         </a:buClr>
-        <a:buFont typeface="Calibri" pitchFamily="34" charset="0"/>
-        <a:buChar char="◦"/>
+        <a:buFont typeface="Wingdings 2" pitchFamily="18" charset="2"/>
+        <a:buChar char=""/>
         <a:defRPr sz="1400" kern="1200">
           <a:solidFill>
             <a:schemeClr val="tx1">
-              <a:lumMod val="75000"/>
-              <a:lumOff val="25000"/>
+              <a:lumMod val="85000"/>
+              <a:lumOff val="15000"/>
             </a:schemeClr>
           </a:solidFill>
           <a:latin typeface="+mn-lt"/>
@@ -4353,26 +4791,26 @@
           <a:cs typeface="+mn-cs"/>
         </a:defRPr>
       </a:lvl7pPr>
-      <a:lvl8pPr marL="1500000" indent="-228600" algn="l" defTabSz="914400" rtl="0" eaLnBrk="1" latinLnBrk="0" hangingPunct="1">
+      <a:lvl8pPr marL="2200000" indent="-228600" algn="l" defTabSz="914400" rtl="0" eaLnBrk="1" latinLnBrk="0" hangingPunct="1">
         <a:lnSpc>
           <a:spcPct val="90000"/>
         </a:lnSpc>
         <a:spcBef>
-          <a:spcPts val="200"/>
+          <a:spcPts val="300"/>
         </a:spcBef>
         <a:spcAft>
-          <a:spcPts val="400"/>
+          <a:spcPts val="300"/>
         </a:spcAft>
         <a:buClr>
           <a:schemeClr val="accent1"/>
         </a:buClr>
-        <a:buFont typeface="Calibri" pitchFamily="34" charset="0"/>
-        <a:buChar char="◦"/>
+        <a:buFont typeface="Wingdings 2" pitchFamily="18" charset="2"/>
+        <a:buChar char=""/>
         <a:defRPr sz="1400" kern="1200">
           <a:solidFill>
             <a:schemeClr val="tx1">
-              <a:lumMod val="75000"/>
-              <a:lumOff val="25000"/>
+              <a:lumMod val="85000"/>
+              <a:lumOff val="15000"/>
             </a:schemeClr>
           </a:solidFill>
           <a:latin typeface="+mn-lt"/>
@@ -4380,26 +4818,26 @@
           <a:cs typeface="+mn-cs"/>
         </a:defRPr>
       </a:lvl8pPr>
-      <a:lvl9pPr marL="1700000" indent="-228600" algn="l" defTabSz="914400" rtl="0" eaLnBrk="1" latinLnBrk="0" hangingPunct="1">
+      <a:lvl9pPr marL="2500000" indent="-228600" algn="l" defTabSz="914400" rtl="0" eaLnBrk="1" latinLnBrk="0" hangingPunct="1">
         <a:lnSpc>
           <a:spcPct val="90000"/>
         </a:lnSpc>
         <a:spcBef>
-          <a:spcPts val="200"/>
+          <a:spcPts val="300"/>
         </a:spcBef>
         <a:spcAft>
-          <a:spcPts val="400"/>
+          <a:spcPts val="300"/>
         </a:spcAft>
         <a:buClr>
           <a:schemeClr val="accent1"/>
         </a:buClr>
-        <a:buFont typeface="Calibri" pitchFamily="34" charset="0"/>
-        <a:buChar char="◦"/>
+        <a:buFont typeface="Wingdings 2" pitchFamily="18" charset="2"/>
+        <a:buChar char=""/>
         <a:defRPr sz="1400" kern="1200">
           <a:solidFill>
             <a:schemeClr val="tx1">
-              <a:lumMod val="75000"/>
-              <a:lumOff val="25000"/>
+              <a:lumMod val="85000"/>
+              <a:lumOff val="15000"/>
             </a:schemeClr>
           </a:solidFill>
           <a:latin typeface="+mn-lt"/>
@@ -4652,7 +5090,7 @@
         </p:spPr>
         <p:txBody>
           <a:bodyPr>
-            <a:normAutofit/>
+            <a:normAutofit fontScale="92500" lnSpcReduction="10000"/>
           </a:bodyPr>
           <a:lstStyle/>
           <a:p>
@@ -4673,6 +5111,35 @@
       </p:sp>
       <p:sp>
         <p:nvSpPr>
+          <p:cNvPr id="4" name="Footer Placeholder 3">
+            <a:extLst>
+              <a:ext uri="{FF2B5EF4-FFF2-40B4-BE49-F238E27FC236}">
+                <a16:creationId xmlns:a16="http://schemas.microsoft.com/office/drawing/2014/main" id="{E2E3EB63-5F14-44DE-96E3-C1A4DE09B304}"/>
+              </a:ext>
+            </a:extLst>
+          </p:cNvPr>
+          <p:cNvSpPr>
+            <a:spLocks noGrp="1"/>
+          </p:cNvSpPr>
+          <p:nvPr>
+            <p:ph type="ftr" sz="quarter" idx="11"/>
+          </p:nvPr>
+        </p:nvSpPr>
+        <p:spPr/>
+        <p:txBody>
+          <a:bodyPr/>
+          <a:lstStyle/>
+          <a:p>
+            <a:r>
+              <a:rPr lang="ru-RU"/>
+              <a:t>Лекция 1: введение в теорию вероятности</a:t>
+            </a:r>
+            <a:endParaRPr lang="en-US" dirty="0"/>
+          </a:p>
+        </p:txBody>
+      </p:sp>
+      <p:sp>
+        <p:nvSpPr>
           <p:cNvPr id="6" name="Slide Number Placeholder 5"/>
           <p:cNvSpPr>
             <a:spLocks noGrp="1"/>
@@ -4683,7 +5150,9 @@
         </p:nvSpPr>
         <p:spPr/>
         <p:txBody>
-          <a:bodyPr/>
+          <a:bodyPr>
+            <a:normAutofit lnSpcReduction="10000"/>
+          </a:bodyPr>
           <a:lstStyle/>
           <a:p>
             <a:fld id="{DCF1C55D-6B64-43FE-AD1F-AA2D1E032BD1}" type="slidenum">
@@ -4721,35 +5190,6 @@
               <a:rPr lang="ru-RU" sz="2000" dirty="0"/>
               <a:t>Результаты экспериментов интерпретируются только в рамках субъективного определения вероятности</a:t>
             </a:r>
-          </a:p>
-        </p:txBody>
-      </p:sp>
-      <p:sp>
-        <p:nvSpPr>
-          <p:cNvPr id="4" name="Footer Placeholder 3">
-            <a:extLst>
-              <a:ext uri="{FF2B5EF4-FFF2-40B4-BE49-F238E27FC236}">
-                <a16:creationId xmlns:a16="http://schemas.microsoft.com/office/drawing/2014/main" id="{E2E3EB63-5F14-44DE-96E3-C1A4DE09B304}"/>
-              </a:ext>
-            </a:extLst>
-          </p:cNvPr>
-          <p:cNvSpPr>
-            <a:spLocks noGrp="1"/>
-          </p:cNvSpPr>
-          <p:nvPr>
-            <p:ph type="ftr" sz="quarter" idx="11"/>
-          </p:nvPr>
-        </p:nvSpPr>
-        <p:spPr/>
-        <p:txBody>
-          <a:bodyPr/>
-          <a:lstStyle/>
-          <a:p>
-            <a:r>
-              <a:rPr lang="ru-RU"/>
-              <a:t>Лекция 1: введение в теорию вероятности</a:t>
-            </a:r>
-            <a:endParaRPr lang="en-US" dirty="0"/>
           </a:p>
         </p:txBody>
       </p:sp>
@@ -4785,79 +5225,6 @@
       </p:grpSpPr>
       <p:sp>
         <p:nvSpPr>
-          <p:cNvPr id="2" name="Content Placeholder 1"/>
-          <p:cNvSpPr>
-            <a:spLocks noGrp="1"/>
-          </p:cNvSpPr>
-          <p:nvPr>
-            <p:ph idx="1"/>
-          </p:nvPr>
-        </p:nvSpPr>
-        <p:spPr>
-          <a:xfrm>
-            <a:off x="1981200" y="2204864"/>
-            <a:ext cx="8229600" cy="3816424"/>
-          </a:xfrm>
-        </p:spPr>
-        <p:txBody>
-          <a:bodyPr>
-            <a:normAutofit/>
-          </a:bodyPr>
-          <a:lstStyle/>
-          <a:p>
-            <a:r>
-              <a:rPr lang="ru-RU" sz="2000" dirty="0"/>
-              <a:t>Частнотная интерпретация вероятности не имеет смысла при однократном проведвении эксперимента.</a:t>
-            </a:r>
-          </a:p>
-          <a:p>
-            <a:r>
-              <a:rPr lang="ru-RU" sz="2000" dirty="0"/>
-              <a:t>Истинное значение измеряемой величины не является случайным и не может подчиняться статистическому распределению с конечной шириной.</a:t>
-            </a:r>
-          </a:p>
-          <a:p>
-            <a:r>
-              <a:rPr lang="ru-RU" sz="2000" dirty="0"/>
-              <a:t>Систематическую ошибку можно частотно определеить только в очень редких случаях. </a:t>
-            </a:r>
-          </a:p>
-          <a:p>
-            <a:r>
-              <a:rPr lang="ru-RU" sz="2000" dirty="0"/>
-              <a:t>В частотной интерпретации нельзя складывать результаты различных измерений.</a:t>
-            </a:r>
-          </a:p>
-          <a:p>
-            <a:endParaRPr lang="ru-RU" sz="2000" dirty="0"/>
-          </a:p>
-        </p:txBody>
-      </p:sp>
-      <p:sp>
-        <p:nvSpPr>
-          <p:cNvPr id="5" name="Slide Number Placeholder 4"/>
-          <p:cNvSpPr>
-            <a:spLocks noGrp="1"/>
-          </p:cNvSpPr>
-          <p:nvPr>
-            <p:ph type="sldNum" sz="quarter" idx="12"/>
-          </p:nvPr>
-        </p:nvSpPr>
-        <p:spPr/>
-        <p:txBody>
-          <a:bodyPr/>
-          <a:lstStyle/>
-          <a:p>
-            <a:fld id="{DCF1C55D-6B64-43FE-AD1F-AA2D1E032BD1}" type="slidenum">
-              <a:rPr lang="ru-RU" smtClean="0"/>
-              <a:t>11</a:t>
-            </a:fld>
-            <a:endParaRPr lang="ru-RU" dirty="0"/>
-          </a:p>
-        </p:txBody>
-      </p:sp>
-      <p:sp>
-        <p:nvSpPr>
           <p:cNvPr id="6" name="Title 5">
             <a:extLst>
               <a:ext uri="{FF2B5EF4-FFF2-40B4-BE49-F238E27FC236}">
@@ -4887,6 +5254,56 @@
       </p:sp>
       <p:sp>
         <p:nvSpPr>
+          <p:cNvPr id="2" name="Content Placeholder 1"/>
+          <p:cNvSpPr>
+            <a:spLocks noGrp="1"/>
+          </p:cNvSpPr>
+          <p:nvPr>
+            <p:ph idx="1"/>
+          </p:nvPr>
+        </p:nvSpPr>
+        <p:spPr>
+          <a:xfrm>
+            <a:off x="1981200" y="2204864"/>
+            <a:ext cx="8229600" cy="3816424"/>
+          </a:xfrm>
+        </p:spPr>
+        <p:txBody>
+          <a:bodyPr>
+            <a:normAutofit/>
+          </a:bodyPr>
+          <a:lstStyle/>
+          <a:p>
+            <a:r>
+              <a:rPr lang="ru-RU" sz="2000" dirty="0"/>
+              <a:t>Частнотная интерпретация вероятности не имеет смысла при однократном проведвении эксперимента.</a:t>
+            </a:r>
+          </a:p>
+          <a:p>
+            <a:r>
+              <a:rPr lang="ru-RU" sz="2000" dirty="0"/>
+              <a:t>Истинное значение измеряемой величины не является случайным и не может подчиняться статистическому распределению с конечной шириной.</a:t>
+            </a:r>
+          </a:p>
+          <a:p>
+            <a:r>
+              <a:rPr lang="ru-RU" sz="2000" dirty="0"/>
+              <a:t>Систематическую ошибку можно частотно определеить только в очень редких случаях. </a:t>
+            </a:r>
+          </a:p>
+          <a:p>
+            <a:r>
+              <a:rPr lang="ru-RU" sz="2000" dirty="0"/>
+              <a:t>В частотной интерпретации нельзя складывать результаты различных измерений.</a:t>
+            </a:r>
+          </a:p>
+          <a:p>
+            <a:endParaRPr lang="ru-RU" sz="2000" dirty="0"/>
+          </a:p>
+        </p:txBody>
+      </p:sp>
+      <p:sp>
+        <p:nvSpPr>
           <p:cNvPr id="7" name="Footer Placeholder 6">
             <a:extLst>
               <a:ext uri="{FF2B5EF4-FFF2-40B4-BE49-F238E27FC236}">
@@ -4911,6 +5328,31 @@
               <a:t>Лекция 1: введение в теорию вероятности</a:t>
             </a:r>
             <a:endParaRPr lang="en-US" dirty="0"/>
+          </a:p>
+        </p:txBody>
+      </p:sp>
+      <p:sp>
+        <p:nvSpPr>
+          <p:cNvPr id="5" name="Slide Number Placeholder 4"/>
+          <p:cNvSpPr>
+            <a:spLocks noGrp="1"/>
+          </p:cNvSpPr>
+          <p:nvPr>
+            <p:ph type="sldNum" sz="quarter" idx="12"/>
+          </p:nvPr>
+        </p:nvSpPr>
+        <p:spPr/>
+        <p:txBody>
+          <a:bodyPr>
+            <a:normAutofit lnSpcReduction="10000"/>
+          </a:bodyPr>
+          <a:lstStyle/>
+          <a:p>
+            <a:fld id="{DCF1C55D-6B64-43FE-AD1F-AA2D1E032BD1}" type="slidenum">
+              <a:rPr lang="ru-RU" smtClean="0"/>
+              <a:t>11</a:t>
+            </a:fld>
+            <a:endParaRPr lang="ru-RU" dirty="0"/>
           </a:p>
         </p:txBody>
       </p:sp>
@@ -5040,29 +5482,6 @@
       </p:sp>
       <p:sp>
         <p:nvSpPr>
-          <p:cNvPr id="3" name="Slide Number Placeholder 2"/>
-          <p:cNvSpPr>
-            <a:spLocks noGrp="1"/>
-          </p:cNvSpPr>
-          <p:nvPr>
-            <p:ph type="sldNum" sz="quarter" idx="12"/>
-          </p:nvPr>
-        </p:nvSpPr>
-        <p:spPr/>
-        <p:txBody>
-          <a:bodyPr/>
-          <a:lstStyle/>
-          <a:p>
-            <a:fld id="{DCF1C55D-6B64-43FE-AD1F-AA2D1E032BD1}" type="slidenum">
-              <a:rPr lang="ru-RU" smtClean="0"/>
-              <a:t>12</a:t>
-            </a:fld>
-            <a:endParaRPr lang="ru-RU"/>
-          </a:p>
-        </p:txBody>
-      </p:sp>
-      <p:sp>
-        <p:nvSpPr>
           <p:cNvPr id="5" name="Footer Placeholder 4">
             <a:extLst>
               <a:ext uri="{FF2B5EF4-FFF2-40B4-BE49-F238E27FC236}">
@@ -5087,6 +5506,31 @@
               <a:t>Лекция 1: введение в теорию вероятности</a:t>
             </a:r>
             <a:endParaRPr lang="en-US" dirty="0"/>
+          </a:p>
+        </p:txBody>
+      </p:sp>
+      <p:sp>
+        <p:nvSpPr>
+          <p:cNvPr id="3" name="Slide Number Placeholder 2"/>
+          <p:cNvSpPr>
+            <a:spLocks noGrp="1"/>
+          </p:cNvSpPr>
+          <p:nvPr>
+            <p:ph type="sldNum" sz="quarter" idx="12"/>
+          </p:nvPr>
+        </p:nvSpPr>
+        <p:spPr/>
+        <p:txBody>
+          <a:bodyPr>
+            <a:normAutofit lnSpcReduction="10000"/>
+          </a:bodyPr>
+          <a:lstStyle/>
+          <a:p>
+            <a:fld id="{DCF1C55D-6B64-43FE-AD1F-AA2D1E032BD1}" type="slidenum">
+              <a:rPr lang="ru-RU" smtClean="0"/>
+              <a:t>12</a:t>
+            </a:fld>
+            <a:endParaRPr lang="ru-RU"/>
           </a:p>
         </p:txBody>
       </p:sp>
@@ -5221,7 +5665,9 @@
         </p:nvSpPr>
         <p:spPr/>
         <p:txBody>
-          <a:bodyPr/>
+          <a:bodyPr>
+            <a:normAutofit lnSpcReduction="10000"/>
+          </a:bodyPr>
           <a:lstStyle/>
           <a:p>
             <a:fld id="{8A7A6979-0714-4377-B894-6BE4C2D6E202}" type="slidenum">
@@ -5582,7 +6028,9 @@
         </p:nvSpPr>
         <p:spPr/>
         <p:txBody>
-          <a:bodyPr/>
+          <a:bodyPr>
+            <a:normAutofit lnSpcReduction="10000"/>
+          </a:bodyPr>
           <a:lstStyle/>
           <a:p>
             <a:fld id="{8A7A6979-0714-4377-B894-6BE4C2D6E202}" type="slidenum">
@@ -6041,6 +6489,67 @@
       </mc:AlternateContent>
       <p:sp>
         <p:nvSpPr>
+          <p:cNvPr id="4" name="Footer Placeholder 3">
+            <a:extLst>
+              <a:ext uri="{FF2B5EF4-FFF2-40B4-BE49-F238E27FC236}">
+                <a16:creationId xmlns:a16="http://schemas.microsoft.com/office/drawing/2014/main" id="{B81D496C-0122-475C-B947-C374D0BBBD03}"/>
+              </a:ext>
+            </a:extLst>
+          </p:cNvPr>
+          <p:cNvSpPr>
+            <a:spLocks noGrp="1"/>
+          </p:cNvSpPr>
+          <p:nvPr>
+            <p:ph type="ftr" sz="quarter" idx="11"/>
+          </p:nvPr>
+        </p:nvSpPr>
+        <p:spPr/>
+        <p:txBody>
+          <a:bodyPr/>
+          <a:lstStyle/>
+          <a:p>
+            <a:r>
+              <a:rPr lang="ru-RU"/>
+              <a:t>Лекция 1: введение в теорию вероятности</a:t>
+            </a:r>
+            <a:endParaRPr lang="en-US" dirty="0"/>
+          </a:p>
+        </p:txBody>
+      </p:sp>
+      <p:sp>
+        <p:nvSpPr>
+          <p:cNvPr id="5" name="Slide Number Placeholder 4">
+            <a:extLst>
+              <a:ext uri="{FF2B5EF4-FFF2-40B4-BE49-F238E27FC236}">
+                <a16:creationId xmlns:a16="http://schemas.microsoft.com/office/drawing/2014/main" id="{A0539DFC-D1FC-4204-BDE2-C27B7AC02E92}"/>
+              </a:ext>
+            </a:extLst>
+          </p:cNvPr>
+          <p:cNvSpPr>
+            <a:spLocks noGrp="1"/>
+          </p:cNvSpPr>
+          <p:nvPr>
+            <p:ph type="sldNum" sz="quarter" idx="12"/>
+          </p:nvPr>
+        </p:nvSpPr>
+        <p:spPr/>
+        <p:txBody>
+          <a:bodyPr>
+            <a:normAutofit lnSpcReduction="10000"/>
+          </a:bodyPr>
+          <a:lstStyle/>
+          <a:p>
+            <a:fld id="{8A7A6979-0714-4377-B894-6BE4C2D6E202}" type="slidenum">
+              <a:rPr lang="en-US" smtClean="0"/>
+              <a:pPr/>
+              <a:t>15</a:t>
+            </a:fld>
+            <a:endParaRPr lang="en-US" dirty="0"/>
+          </a:p>
+        </p:txBody>
+      </p:sp>
+      <p:sp>
+        <p:nvSpPr>
           <p:cNvPr id="9" name="Arrow: Curved Down 8">
             <a:extLst>
               <a:ext uri="{FF2B5EF4-FFF2-40B4-BE49-F238E27FC236}">
@@ -6053,7 +6562,7 @@
         </p:nvSpPr>
         <p:spPr>
           <a:xfrm flipH="1">
-            <a:off x="6553413" y="2619632"/>
+            <a:off x="5761265" y="3011223"/>
             <a:ext cx="1993557" cy="327123"/>
           </a:xfrm>
           <a:prstGeom prst="curvedDownArrow">
@@ -6103,7 +6612,7 @@
         </p:nvSpPr>
         <p:spPr>
           <a:xfrm>
-            <a:off x="7776519" y="2946755"/>
+            <a:off x="6939940" y="3338346"/>
             <a:ext cx="1738617" cy="369332"/>
           </a:xfrm>
           <a:prstGeom prst="rect">
@@ -6146,65 +6655,6 @@
                 </a:outerShdw>
               </a:effectLst>
             </a:endParaRPr>
-          </a:p>
-        </p:txBody>
-      </p:sp>
-      <p:sp>
-        <p:nvSpPr>
-          <p:cNvPr id="4" name="Footer Placeholder 3">
-            <a:extLst>
-              <a:ext uri="{FF2B5EF4-FFF2-40B4-BE49-F238E27FC236}">
-                <a16:creationId xmlns:a16="http://schemas.microsoft.com/office/drawing/2014/main" id="{B81D496C-0122-475C-B947-C374D0BBBD03}"/>
-              </a:ext>
-            </a:extLst>
-          </p:cNvPr>
-          <p:cNvSpPr>
-            <a:spLocks noGrp="1"/>
-          </p:cNvSpPr>
-          <p:nvPr>
-            <p:ph type="ftr" sz="quarter" idx="11"/>
-          </p:nvPr>
-        </p:nvSpPr>
-        <p:spPr/>
-        <p:txBody>
-          <a:bodyPr/>
-          <a:lstStyle/>
-          <a:p>
-            <a:r>
-              <a:rPr lang="ru-RU"/>
-              <a:t>Лекция 1: введение в теорию вероятности</a:t>
-            </a:r>
-            <a:endParaRPr lang="en-US" dirty="0"/>
-          </a:p>
-        </p:txBody>
-      </p:sp>
-      <p:sp>
-        <p:nvSpPr>
-          <p:cNvPr id="5" name="Slide Number Placeholder 4">
-            <a:extLst>
-              <a:ext uri="{FF2B5EF4-FFF2-40B4-BE49-F238E27FC236}">
-                <a16:creationId xmlns:a16="http://schemas.microsoft.com/office/drawing/2014/main" id="{A0539DFC-D1FC-4204-BDE2-C27B7AC02E92}"/>
-              </a:ext>
-            </a:extLst>
-          </p:cNvPr>
-          <p:cNvSpPr>
-            <a:spLocks noGrp="1"/>
-          </p:cNvSpPr>
-          <p:nvPr>
-            <p:ph type="sldNum" sz="quarter" idx="12"/>
-          </p:nvPr>
-        </p:nvSpPr>
-        <p:spPr/>
-        <p:txBody>
-          <a:bodyPr/>
-          <a:lstStyle/>
-          <a:p>
-            <a:fld id="{8A7A6979-0714-4377-B894-6BE4C2D6E202}" type="slidenum">
-              <a:rPr lang="en-US" smtClean="0"/>
-              <a:pPr/>
-              <a:t>15</a:t>
-            </a:fld>
-            <a:endParaRPr lang="en-US" dirty="0"/>
           </a:p>
         </p:txBody>
       </p:sp>
@@ -7118,7 +7568,9 @@
         </p:nvSpPr>
         <p:spPr/>
         <p:txBody>
-          <a:bodyPr/>
+          <a:bodyPr>
+            <a:normAutofit lnSpcReduction="10000"/>
+          </a:bodyPr>
           <a:lstStyle/>
           <a:p>
             <a:fld id="{8A7A6979-0714-4377-B894-6BE4C2D6E202}" type="slidenum">
@@ -7189,8 +7641,8 @@
           </a:p>
         </p:txBody>
       </p:sp>
-      <mc:AlternateContent xmlns:mc="http://schemas.openxmlformats.org/markup-compatibility/2006">
-        <mc:Choice xmlns:a14="http://schemas.microsoft.com/office/drawing/2010/main" Requires="a14">
+      <mc:AlternateContent xmlns:mc="http://schemas.openxmlformats.org/markup-compatibility/2006" xmlns:a14="http://schemas.microsoft.com/office/drawing/2010/main">
+        <mc:Choice Requires="a14">
           <p:sp>
             <p:nvSpPr>
               <p:cNvPr id="3" name="Content Placeholder 2">
@@ -7789,7 +8241,7 @@
             </p:txBody>
           </p:sp>
         </mc:Choice>
-        <mc:Fallback>
+        <mc:Fallback xmlns="">
           <p:sp>
             <p:nvSpPr>
               <p:cNvPr id="3" name="Content Placeholder 2">
@@ -7876,7 +8328,9 @@
         </p:nvSpPr>
         <p:spPr/>
         <p:txBody>
-          <a:bodyPr/>
+          <a:bodyPr>
+            <a:normAutofit lnSpcReduction="10000"/>
+          </a:bodyPr>
           <a:lstStyle/>
           <a:p>
             <a:fld id="{8A7A6979-0714-4377-B894-6BE4C2D6E202}" type="slidenum">
@@ -7947,8 +8401,8 @@
           </a:p>
         </p:txBody>
       </p:sp>
-      <mc:AlternateContent xmlns:mc="http://schemas.openxmlformats.org/markup-compatibility/2006">
-        <mc:Choice xmlns:a14="http://schemas.microsoft.com/office/drawing/2010/main" Requires="a14">
+      <mc:AlternateContent xmlns:mc="http://schemas.openxmlformats.org/markup-compatibility/2006" xmlns:a14="http://schemas.microsoft.com/office/drawing/2010/main">
+        <mc:Choice Requires="a14">
           <p:sp>
             <p:nvSpPr>
               <p:cNvPr id="3" name="Content Placeholder 2">
@@ -8519,7 +8973,7 @@
             </p:txBody>
           </p:sp>
         </mc:Choice>
-        <mc:Fallback>
+        <mc:Fallback xmlns="">
           <p:sp>
             <p:nvSpPr>
               <p:cNvPr id="3" name="Content Placeholder 2">
@@ -8606,7 +9060,9 @@
         </p:nvSpPr>
         <p:spPr/>
         <p:txBody>
-          <a:bodyPr/>
+          <a:bodyPr>
+            <a:normAutofit lnSpcReduction="10000"/>
+          </a:bodyPr>
           <a:lstStyle/>
           <a:p>
             <a:fld id="{8A7A6979-0714-4377-B894-6BE4C2D6E202}" type="slidenum">
@@ -9468,7 +9924,9 @@
         </p:nvSpPr>
         <p:spPr/>
         <p:txBody>
-          <a:bodyPr/>
+          <a:bodyPr>
+            <a:normAutofit lnSpcReduction="10000"/>
+          </a:bodyPr>
           <a:lstStyle/>
           <a:p>
             <a:fld id="{8A7A6979-0714-4377-B894-6BE4C2D6E202}" type="slidenum">
@@ -9611,7 +10069,9 @@
         </p:nvSpPr>
         <p:spPr/>
         <p:txBody>
-          <a:bodyPr/>
+          <a:bodyPr>
+            <a:normAutofit lnSpcReduction="10000"/>
+          </a:bodyPr>
           <a:lstStyle/>
           <a:p>
             <a:fld id="{8A7A6979-0714-4377-B894-6BE4C2D6E202}" type="slidenum">
@@ -9682,8 +10142,8 @@
           </a:p>
         </p:txBody>
       </p:sp>
-      <mc:AlternateContent xmlns:mc="http://schemas.openxmlformats.org/markup-compatibility/2006">
-        <mc:Choice xmlns:a14="http://schemas.microsoft.com/office/drawing/2010/main" Requires="a14">
+      <mc:AlternateContent xmlns:mc="http://schemas.openxmlformats.org/markup-compatibility/2006" xmlns:a14="http://schemas.microsoft.com/office/drawing/2010/main">
+        <mc:Choice Requires="a14">
           <p:sp>
             <p:nvSpPr>
               <p:cNvPr id="3" name="Content Placeholder 2">
@@ -9934,7 +10394,7 @@
             </p:txBody>
           </p:sp>
         </mc:Choice>
-        <mc:Fallback>
+        <mc:Fallback xmlns="">
           <p:sp>
             <p:nvSpPr>
               <p:cNvPr id="3" name="Content Placeholder 2">
@@ -10021,7 +10481,9 @@
         </p:nvSpPr>
         <p:spPr/>
         <p:txBody>
-          <a:bodyPr/>
+          <a:bodyPr>
+            <a:normAutofit lnSpcReduction="10000"/>
+          </a:bodyPr>
           <a:lstStyle/>
           <a:p>
             <a:fld id="{8A7A6979-0714-4377-B894-6BE4C2D6E202}" type="slidenum">
@@ -10201,7 +10663,9 @@
         </p:nvSpPr>
         <p:spPr/>
         <p:txBody>
-          <a:bodyPr/>
+          <a:bodyPr>
+            <a:normAutofit lnSpcReduction="10000"/>
+          </a:bodyPr>
           <a:lstStyle/>
           <a:p>
             <a:fld id="{8A7A6979-0714-4377-B894-6BE4C2D6E202}" type="slidenum">
@@ -10287,12 +10751,7 @@
                 <p:ph idx="1"/>
               </p:nvPr>
             </p:nvSpPr>
-            <p:spPr>
-              <a:xfrm>
-                <a:off x="1097280" y="1845734"/>
-                <a:ext cx="10058400" cy="4023360"/>
-              </a:xfrm>
-            </p:spPr>
+            <p:spPr/>
             <p:txBody>
               <a:bodyPr>
                 <a:noAutofit/>
@@ -10666,29 +11125,6 @@
       </mc:AlternateContent>
       <p:sp>
         <p:nvSpPr>
-          <p:cNvPr id="3" name="Slide Number Placeholder 2"/>
-          <p:cNvSpPr>
-            <a:spLocks noGrp="1"/>
-          </p:cNvSpPr>
-          <p:nvPr>
-            <p:ph type="sldNum" sz="quarter" idx="12"/>
-          </p:nvPr>
-        </p:nvSpPr>
-        <p:spPr/>
-        <p:txBody>
-          <a:bodyPr/>
-          <a:lstStyle/>
-          <a:p>
-            <a:fld id="{DCF1C55D-6B64-43FE-AD1F-AA2D1E032BD1}" type="slidenum">
-              <a:rPr lang="ru-RU" smtClean="0"/>
-              <a:t>4</a:t>
-            </a:fld>
-            <a:endParaRPr lang="ru-RU" dirty="0"/>
-          </a:p>
-        </p:txBody>
-      </p:sp>
-      <p:sp>
-        <p:nvSpPr>
           <p:cNvPr id="4" name="Footer Placeholder 3">
             <a:extLst>
               <a:ext uri="{FF2B5EF4-FFF2-40B4-BE49-F238E27FC236}">
@@ -10713,6 +11149,31 @@
               <a:t>Лекция 1: введение в теорию вероятности</a:t>
             </a:r>
             <a:endParaRPr lang="en-US" dirty="0"/>
+          </a:p>
+        </p:txBody>
+      </p:sp>
+      <p:sp>
+        <p:nvSpPr>
+          <p:cNvPr id="3" name="Slide Number Placeholder 2"/>
+          <p:cNvSpPr>
+            <a:spLocks noGrp="1"/>
+          </p:cNvSpPr>
+          <p:nvPr>
+            <p:ph type="sldNum" sz="quarter" idx="12"/>
+          </p:nvPr>
+        </p:nvSpPr>
+        <p:spPr/>
+        <p:txBody>
+          <a:bodyPr>
+            <a:normAutofit lnSpcReduction="10000"/>
+          </a:bodyPr>
+          <a:lstStyle/>
+          <a:p>
+            <a:fld id="{DCF1C55D-6B64-43FE-AD1F-AA2D1E032BD1}" type="slidenum">
+              <a:rPr lang="ru-RU" smtClean="0"/>
+              <a:t>4</a:t>
+            </a:fld>
+            <a:endParaRPr lang="ru-RU" dirty="0"/>
           </a:p>
         </p:txBody>
       </p:sp>
@@ -10774,6 +11235,67 @@
               <a:rPr lang="ru-RU" dirty="0"/>
               <a:t>(условная вероятноть)</a:t>
             </a:r>
+          </a:p>
+        </p:txBody>
+      </p:sp>
+      <p:sp>
+        <p:nvSpPr>
+          <p:cNvPr id="3" name="Footer Placeholder 2">
+            <a:extLst>
+              <a:ext uri="{FF2B5EF4-FFF2-40B4-BE49-F238E27FC236}">
+                <a16:creationId xmlns:a16="http://schemas.microsoft.com/office/drawing/2014/main" id="{1C254B26-F231-433E-AEC8-7B5C2885F6D9}"/>
+              </a:ext>
+            </a:extLst>
+          </p:cNvPr>
+          <p:cNvSpPr>
+            <a:spLocks noGrp="1"/>
+          </p:cNvSpPr>
+          <p:nvPr>
+            <p:ph type="ftr" sz="quarter" idx="11"/>
+          </p:nvPr>
+        </p:nvSpPr>
+        <p:spPr/>
+        <p:txBody>
+          <a:bodyPr/>
+          <a:lstStyle/>
+          <a:p>
+            <a:r>
+              <a:rPr lang="ru-RU"/>
+              <a:t>Лекция 1: введение в теорию вероятности</a:t>
+            </a:r>
+            <a:endParaRPr lang="en-US" dirty="0"/>
+          </a:p>
+        </p:txBody>
+      </p:sp>
+      <p:sp>
+        <p:nvSpPr>
+          <p:cNvPr id="13" name="Slide Number Placeholder 12">
+            <a:extLst>
+              <a:ext uri="{FF2B5EF4-FFF2-40B4-BE49-F238E27FC236}">
+                <a16:creationId xmlns:a16="http://schemas.microsoft.com/office/drawing/2014/main" id="{E85E0EE7-3565-4209-88B4-133067EB40C7}"/>
+              </a:ext>
+            </a:extLst>
+          </p:cNvPr>
+          <p:cNvSpPr>
+            <a:spLocks noGrp="1"/>
+          </p:cNvSpPr>
+          <p:nvPr>
+            <p:ph type="sldNum" sz="quarter" idx="12"/>
+          </p:nvPr>
+        </p:nvSpPr>
+        <p:spPr/>
+        <p:txBody>
+          <a:bodyPr>
+            <a:normAutofit lnSpcReduction="10000"/>
+          </a:bodyPr>
+          <a:lstStyle/>
+          <a:p>
+            <a:fld id="{8A7A6979-0714-4377-B894-6BE4C2D6E202}" type="slidenum">
+              <a:rPr lang="en-US" smtClean="0"/>
+              <a:pPr/>
+              <a:t>5</a:t>
+            </a:fld>
+            <a:endParaRPr lang="en-US" dirty="0"/>
           </a:p>
         </p:txBody>
       </p:sp>
@@ -10862,12 +11384,12 @@
           <a:graphicData uri="http://schemas.openxmlformats.org/presentationml/2006/ole">
             <mc:AlternateContent xmlns:mc="http://schemas.openxmlformats.org/markup-compatibility/2006">
               <mc:Choice xmlns:v="urn:schemas-microsoft-com:vml" Requires="v">
-                <p:oleObj spid="_x0000_s1053" name="Equation" r:id="rId3" imgW="1282680" imgH="419040" progId="Equation.3">
+                <p:oleObj name="Equation" r:id="rId2" imgW="1282680" imgH="419040" progId="Equation.3">
                   <p:embed/>
                 </p:oleObj>
               </mc:Choice>
               <mc:Fallback>
-                <p:oleObj name="Equation" r:id="rId3" imgW="1282680" imgH="419040" progId="Equation.3">
+                <p:oleObj name="Equation" r:id="rId2" imgW="1282680" imgH="419040" progId="Equation.3">
                   <p:embed/>
                   <p:pic>
                     <p:nvPicPr>
@@ -10878,7 +11400,7 @@
                       <p:nvPr/>
                     </p:nvPicPr>
                     <p:blipFill>
-                      <a:blip r:embed="rId4"/>
+                      <a:blip r:embed="rId3"/>
                       <a:srcRect/>
                       <a:stretch>
                         <a:fillRect/>
@@ -10908,7 +11430,7 @@
           <p:nvPr/>
         </p:nvPicPr>
         <p:blipFill>
-          <a:blip r:embed="rId5">
+          <a:blip r:embed="rId4">
             <a:extLst>
               <a:ext uri="{28A0092B-C50C-407E-A947-70E740481C1C}">
                 <a14:useLocalDpi xmlns:a14="http://schemas.microsoft.com/office/drawing/2010/main" val="0"/>
@@ -11048,12 +11570,12 @@
           <a:graphicData uri="http://schemas.openxmlformats.org/presentationml/2006/ole">
             <mc:AlternateContent xmlns:mc="http://schemas.openxmlformats.org/markup-compatibility/2006">
               <mc:Choice xmlns:v="urn:schemas-microsoft-com:vml" Requires="v">
-                <p:oleObj spid="_x0000_s1054" name="Equation" r:id="rId6" imgW="1282680" imgH="419040" progId="Equation.3">
+                <p:oleObj name="Equation" r:id="rId5" imgW="1282680" imgH="419040" progId="Equation.3">
                   <p:embed/>
                 </p:oleObj>
               </mc:Choice>
               <mc:Fallback>
-                <p:oleObj name="Equation" r:id="rId6" imgW="1282680" imgH="419040" progId="Equation.3">
+                <p:oleObj name="Equation" r:id="rId5" imgW="1282680" imgH="419040" progId="Equation.3">
                   <p:embed/>
                   <p:pic>
                     <p:nvPicPr>
@@ -11064,7 +11586,7 @@
                       <p:nvPr/>
                     </p:nvPicPr>
                     <p:blipFill>
-                      <a:blip r:embed="rId7"/>
+                      <a:blip r:embed="rId6"/>
                       <a:srcRect/>
                       <a:stretch>
                         <a:fillRect/>
@@ -11201,12 +11723,12 @@
           <a:graphicData uri="http://schemas.openxmlformats.org/presentationml/2006/ole">
             <mc:AlternateContent xmlns:mc="http://schemas.openxmlformats.org/markup-compatibility/2006">
               <mc:Choice xmlns:v="urn:schemas-microsoft-com:vml" Requires="v">
-                <p:oleObj spid="_x0000_s1055" name="Уравнение" r:id="rId8" imgW="1536480" imgH="419040" progId="Equation.3">
+                <p:oleObj name="Уравнение" r:id="rId7" imgW="1536480" imgH="419040" progId="Equation.3">
                   <p:embed/>
                 </p:oleObj>
               </mc:Choice>
               <mc:Fallback>
-                <p:oleObj name="Уравнение" r:id="rId8" imgW="1536480" imgH="419040" progId="Equation.3">
+                <p:oleObj name="Уравнение" r:id="rId7" imgW="1536480" imgH="419040" progId="Equation.3">
                   <p:embed/>
                   <p:pic>
                     <p:nvPicPr>
@@ -11217,7 +11739,7 @@
                       <p:nvPr/>
                     </p:nvPicPr>
                     <p:blipFill>
-                      <a:blip r:embed="rId9"/>
+                      <a:blip r:embed="rId8"/>
                       <a:srcRect/>
                       <a:stretch>
                         <a:fillRect/>
@@ -11240,65 +11762,6 @@
           </a:graphicData>
         </a:graphic>
       </p:graphicFrame>
-      <p:sp>
-        <p:nvSpPr>
-          <p:cNvPr id="3" name="Footer Placeholder 2">
-            <a:extLst>
-              <a:ext uri="{FF2B5EF4-FFF2-40B4-BE49-F238E27FC236}">
-                <a16:creationId xmlns:a16="http://schemas.microsoft.com/office/drawing/2014/main" id="{1C254B26-F231-433E-AEC8-7B5C2885F6D9}"/>
-              </a:ext>
-            </a:extLst>
-          </p:cNvPr>
-          <p:cNvSpPr>
-            <a:spLocks noGrp="1"/>
-          </p:cNvSpPr>
-          <p:nvPr>
-            <p:ph type="ftr" sz="quarter" idx="11"/>
-          </p:nvPr>
-        </p:nvSpPr>
-        <p:spPr/>
-        <p:txBody>
-          <a:bodyPr/>
-          <a:lstStyle/>
-          <a:p>
-            <a:r>
-              <a:rPr lang="ru-RU"/>
-              <a:t>Лекция 1: введение в теорию вероятности</a:t>
-            </a:r>
-            <a:endParaRPr lang="en-US" dirty="0"/>
-          </a:p>
-        </p:txBody>
-      </p:sp>
-      <p:sp>
-        <p:nvSpPr>
-          <p:cNvPr id="13" name="Slide Number Placeholder 12">
-            <a:extLst>
-              <a:ext uri="{FF2B5EF4-FFF2-40B4-BE49-F238E27FC236}">
-                <a16:creationId xmlns:a16="http://schemas.microsoft.com/office/drawing/2014/main" id="{E85E0EE7-3565-4209-88B4-133067EB40C7}"/>
-              </a:ext>
-            </a:extLst>
-          </p:cNvPr>
-          <p:cNvSpPr>
-            <a:spLocks noGrp="1"/>
-          </p:cNvSpPr>
-          <p:nvPr>
-            <p:ph type="sldNum" sz="quarter" idx="12"/>
-          </p:nvPr>
-        </p:nvSpPr>
-        <p:spPr/>
-        <p:txBody>
-          <a:bodyPr/>
-          <a:lstStyle/>
-          <a:p>
-            <a:fld id="{8A7A6979-0714-4377-B894-6BE4C2D6E202}" type="slidenum">
-              <a:rPr lang="en-US" smtClean="0"/>
-              <a:pPr/>
-              <a:t>5</a:t>
-            </a:fld>
-            <a:endParaRPr lang="en-US" dirty="0"/>
-          </a:p>
-        </p:txBody>
-      </p:sp>
     </p:spTree>
     <p:extLst>
       <p:ext uri="{BB962C8B-B14F-4D97-AF65-F5344CB8AC3E}">
@@ -11758,29 +12221,6 @@
       </mc:AlternateContent>
       <p:sp>
         <p:nvSpPr>
-          <p:cNvPr id="4" name="Slide Number Placeholder 3"/>
-          <p:cNvSpPr>
-            <a:spLocks noGrp="1"/>
-          </p:cNvSpPr>
-          <p:nvPr>
-            <p:ph type="sldNum" sz="quarter" idx="12"/>
-          </p:nvPr>
-        </p:nvSpPr>
-        <p:spPr/>
-        <p:txBody>
-          <a:bodyPr/>
-          <a:lstStyle/>
-          <a:p>
-            <a:fld id="{DCF1C55D-6B64-43FE-AD1F-AA2D1E032BD1}" type="slidenum">
-              <a:rPr lang="ru-RU" smtClean="0"/>
-              <a:t>6</a:t>
-            </a:fld>
-            <a:endParaRPr lang="ru-RU" dirty="0"/>
-          </a:p>
-        </p:txBody>
-      </p:sp>
-      <p:sp>
-        <p:nvSpPr>
           <p:cNvPr id="5" name="Footer Placeholder 4">
             <a:extLst>
               <a:ext uri="{FF2B5EF4-FFF2-40B4-BE49-F238E27FC236}">
@@ -11805,6 +12245,31 @@
               <a:t>Лекция 1: введение в теорию вероятности</a:t>
             </a:r>
             <a:endParaRPr lang="en-US" dirty="0"/>
+          </a:p>
+        </p:txBody>
+      </p:sp>
+      <p:sp>
+        <p:nvSpPr>
+          <p:cNvPr id="4" name="Slide Number Placeholder 3"/>
+          <p:cNvSpPr>
+            <a:spLocks noGrp="1"/>
+          </p:cNvSpPr>
+          <p:nvPr>
+            <p:ph type="sldNum" sz="quarter" idx="12"/>
+          </p:nvPr>
+        </p:nvSpPr>
+        <p:spPr/>
+        <p:txBody>
+          <a:bodyPr>
+            <a:normAutofit lnSpcReduction="10000"/>
+          </a:bodyPr>
+          <a:lstStyle/>
+          <a:p>
+            <a:fld id="{DCF1C55D-6B64-43FE-AD1F-AA2D1E032BD1}" type="slidenum">
+              <a:rPr lang="ru-RU" smtClean="0"/>
+              <a:t>6</a:t>
+            </a:fld>
+            <a:endParaRPr lang="ru-RU" dirty="0"/>
           </a:p>
         </p:txBody>
       </p:sp>
@@ -12040,29 +12505,6 @@
       </mc:AlternateContent>
       <p:sp>
         <p:nvSpPr>
-          <p:cNvPr id="4" name="Slide Number Placeholder 3"/>
-          <p:cNvSpPr>
-            <a:spLocks noGrp="1"/>
-          </p:cNvSpPr>
-          <p:nvPr>
-            <p:ph type="sldNum" sz="quarter" idx="12"/>
-          </p:nvPr>
-        </p:nvSpPr>
-        <p:spPr/>
-        <p:txBody>
-          <a:bodyPr/>
-          <a:lstStyle/>
-          <a:p>
-            <a:fld id="{DCF1C55D-6B64-43FE-AD1F-AA2D1E032BD1}" type="slidenum">
-              <a:rPr lang="ru-RU" smtClean="0"/>
-              <a:t>7</a:t>
-            </a:fld>
-            <a:endParaRPr lang="ru-RU" dirty="0"/>
-          </a:p>
-        </p:txBody>
-      </p:sp>
-      <p:sp>
-        <p:nvSpPr>
           <p:cNvPr id="6" name="Footer Placeholder 5">
             <a:extLst>
               <a:ext uri="{FF2B5EF4-FFF2-40B4-BE49-F238E27FC236}">
@@ -12087,6 +12529,31 @@
               <a:t>Лекция 1: введение в теорию вероятности</a:t>
             </a:r>
             <a:endParaRPr lang="en-US" dirty="0"/>
+          </a:p>
+        </p:txBody>
+      </p:sp>
+      <p:sp>
+        <p:nvSpPr>
+          <p:cNvPr id="4" name="Slide Number Placeholder 3"/>
+          <p:cNvSpPr>
+            <a:spLocks noGrp="1"/>
+          </p:cNvSpPr>
+          <p:nvPr>
+            <p:ph type="sldNum" sz="quarter" idx="12"/>
+          </p:nvPr>
+        </p:nvSpPr>
+        <p:spPr/>
+        <p:txBody>
+          <a:bodyPr>
+            <a:normAutofit lnSpcReduction="10000"/>
+          </a:bodyPr>
+          <a:lstStyle/>
+          <a:p>
+            <a:fld id="{DCF1C55D-6B64-43FE-AD1F-AA2D1E032BD1}" type="slidenum">
+              <a:rPr lang="ru-RU" smtClean="0"/>
+              <a:t>7</a:t>
+            </a:fld>
+            <a:endParaRPr lang="ru-RU" dirty="0"/>
           </a:p>
         </p:txBody>
       </p:sp>
@@ -12269,6 +12736,35 @@
       </mc:AlternateContent>
       <p:sp>
         <p:nvSpPr>
+          <p:cNvPr id="8" name="Footer Placeholder 7">
+            <a:extLst>
+              <a:ext uri="{FF2B5EF4-FFF2-40B4-BE49-F238E27FC236}">
+                <a16:creationId xmlns:a16="http://schemas.microsoft.com/office/drawing/2014/main" id="{03F31918-E775-49AC-98F4-ED3EDD0F4232}"/>
+              </a:ext>
+            </a:extLst>
+          </p:cNvPr>
+          <p:cNvSpPr>
+            <a:spLocks noGrp="1"/>
+          </p:cNvSpPr>
+          <p:nvPr>
+            <p:ph type="ftr" sz="quarter" idx="11"/>
+          </p:nvPr>
+        </p:nvSpPr>
+        <p:spPr/>
+        <p:txBody>
+          <a:bodyPr/>
+          <a:lstStyle/>
+          <a:p>
+            <a:r>
+              <a:rPr lang="ru-RU"/>
+              <a:t>Лекция 1: введение в теорию вероятности</a:t>
+            </a:r>
+            <a:endParaRPr lang="en-US" dirty="0"/>
+          </a:p>
+        </p:txBody>
+      </p:sp>
+      <p:sp>
+        <p:nvSpPr>
           <p:cNvPr id="6" name="Slide Number Placeholder 5"/>
           <p:cNvSpPr>
             <a:spLocks noGrp="1"/>
@@ -12279,7 +12775,9 @@
         </p:nvSpPr>
         <p:spPr/>
         <p:txBody>
-          <a:bodyPr/>
+          <a:bodyPr>
+            <a:normAutofit lnSpcReduction="10000"/>
+          </a:bodyPr>
           <a:lstStyle/>
           <a:p>
             <a:fld id="{DCF1C55D-6B64-43FE-AD1F-AA2D1E032BD1}" type="slidenum">
@@ -12312,7 +12810,7 @@
           <a:graphicData uri="http://schemas.openxmlformats.org/presentationml/2006/ole">
             <mc:AlternateContent xmlns:mc="http://schemas.openxmlformats.org/markup-compatibility/2006">
               <mc:Choice xmlns:v="urn:schemas-microsoft-com:vml" Requires="v">
-                <p:oleObj spid="_x0000_s2066" name="Уравнение" r:id="rId4" imgW="1536480" imgH="419040" progId="Equation.3">
+                <p:oleObj name="Уравнение" r:id="rId4" imgW="1536480" imgH="419040" progId="Equation.3">
                   <p:embed/>
                 </p:oleObj>
               </mc:Choice>
@@ -12395,7 +12893,7 @@
           <a:graphicData uri="http://schemas.openxmlformats.org/presentationml/2006/ole">
             <mc:AlternateContent xmlns:mc="http://schemas.openxmlformats.org/markup-compatibility/2006">
               <mc:Choice xmlns:v="urn:schemas-microsoft-com:vml" Requires="v">
-                <p:oleObj spid="_x0000_s2067" name="Equation" r:id="rId6" imgW="965160" imgH="507960" progId="Equation.3">
+                <p:oleObj name="Equation" r:id="rId6" imgW="965160" imgH="507960" progId="Equation.3">
                   <p:embed/>
                 </p:oleObj>
               </mc:Choice>
@@ -12489,35 +12987,6 @@
           </a:fontRef>
         </p:style>
       </p:cxnSp>
-      <p:sp>
-        <p:nvSpPr>
-          <p:cNvPr id="8" name="Footer Placeholder 7">
-            <a:extLst>
-              <a:ext uri="{FF2B5EF4-FFF2-40B4-BE49-F238E27FC236}">
-                <a16:creationId xmlns:a16="http://schemas.microsoft.com/office/drawing/2014/main" id="{03F31918-E775-49AC-98F4-ED3EDD0F4232}"/>
-              </a:ext>
-            </a:extLst>
-          </p:cNvPr>
-          <p:cNvSpPr>
-            <a:spLocks noGrp="1"/>
-          </p:cNvSpPr>
-          <p:nvPr>
-            <p:ph type="ftr" sz="quarter" idx="11"/>
-          </p:nvPr>
-        </p:nvSpPr>
-        <p:spPr/>
-        <p:txBody>
-          <a:bodyPr/>
-          <a:lstStyle/>
-          <a:p>
-            <a:r>
-              <a:rPr lang="ru-RU"/>
-              <a:t>Лекция 1: введение в теорию вероятности</a:t>
-            </a:r>
-            <a:endParaRPr lang="en-US" dirty="0"/>
-          </a:p>
-        </p:txBody>
-      </p:sp>
     </p:spTree>
     <p:extLst>
       <p:ext uri="{BB962C8B-B14F-4D97-AF65-F5344CB8AC3E}">
@@ -12548,220 +13017,6 @@
           <a:chExt cx="0" cy="0"/>
         </a:xfrm>
       </p:grpSpPr>
-      <p:sp useBgFill="1">
-        <p:nvSpPr>
-          <p:cNvPr id="10" name="Rectangle 9">
-            <a:extLst>
-              <a:ext uri="{FF2B5EF4-FFF2-40B4-BE49-F238E27FC236}">
-                <a16:creationId xmlns:a16="http://schemas.microsoft.com/office/drawing/2014/main" id="{52ABB703-2B0E-4C3B-B4A2-F3973548E561}"/>
-              </a:ext>
-            </a:extLst>
-          </p:cNvPr>
-          <p:cNvSpPr>
-            <a:spLocks noGrp="1" noRot="1" noChangeAspect="1" noMove="1" noResize="1" noEditPoints="1" noAdjustHandles="1" noChangeArrowheads="1" noChangeShapeType="1" noTextEdit="1"/>
-          </p:cNvSpPr>
-          <p:nvPr>
-            <p:extLst>
-              <p:ext uri="{386F3935-93C4-4BCD-93E2-E3B085C9AB24}">
-                <p16:designElem xmlns:p16="http://schemas.microsoft.com/office/powerpoint/2015/main" val="1"/>
-              </p:ext>
-            </p:extLst>
-          </p:nvPr>
-        </p:nvSpPr>
-        <p:spPr>
-          <a:xfrm>
-            <a:off x="0" y="0"/>
-            <a:ext cx="12192001" cy="6334316"/>
-          </a:xfrm>
-          <a:prstGeom prst="rect">
-            <a:avLst/>
-          </a:prstGeom>
-          <a:ln>
-            <a:noFill/>
-          </a:ln>
-        </p:spPr>
-        <p:style>
-          <a:lnRef idx="2">
-            <a:schemeClr val="accent1">
-              <a:shade val="50000"/>
-            </a:schemeClr>
-          </a:lnRef>
-          <a:fillRef idx="1">
-            <a:schemeClr val="accent1"/>
-          </a:fillRef>
-          <a:effectRef idx="0">
-            <a:schemeClr val="accent1"/>
-          </a:effectRef>
-          <a:fontRef idx="minor">
-            <a:schemeClr val="lt1"/>
-          </a:fontRef>
-        </p:style>
-        <p:txBody>
-          <a:bodyPr rtlCol="0" anchor="ctr"/>
-          <a:lstStyle/>
-          <a:p>
-            <a:pPr algn="ctr"/>
-            <a:endParaRPr lang="en-US"/>
-          </a:p>
-        </p:txBody>
-      </p:sp>
-      <p:sp>
-        <p:nvSpPr>
-          <p:cNvPr id="12" name="Rectangle 11">
-            <a:extLst>
-              <a:ext uri="{FF2B5EF4-FFF2-40B4-BE49-F238E27FC236}">
-                <a16:creationId xmlns:a16="http://schemas.microsoft.com/office/drawing/2014/main" id="{82A73093-4B9D-420D-B17E-52293703A1D4}"/>
-              </a:ext>
-            </a:extLst>
-          </p:cNvPr>
-          <p:cNvSpPr>
-            <a:spLocks noGrp="1" noRot="1" noChangeAspect="1" noMove="1" noResize="1" noEditPoints="1" noAdjustHandles="1" noChangeArrowheads="1" noChangeShapeType="1" noTextEdit="1"/>
-          </p:cNvSpPr>
-          <p:nvPr>
-            <p:extLst>
-              <p:ext uri="{386F3935-93C4-4BCD-93E2-E3B085C9AB24}">
-                <p16:designElem xmlns:p16="http://schemas.microsoft.com/office/powerpoint/2015/main" val="1"/>
-              </p:ext>
-            </p:extLst>
-          </p:nvPr>
-        </p:nvSpPr>
-        <p:spPr>
-          <a:xfrm>
-            <a:off x="1" y="6400800"/>
-            <a:ext cx="12192000" cy="457200"/>
-          </a:xfrm>
-          <a:prstGeom prst="rect">
-            <a:avLst/>
-          </a:prstGeom>
-          <a:solidFill>
-            <a:schemeClr val="accent2"/>
-          </a:solidFill>
-          <a:ln>
-            <a:noFill/>
-          </a:ln>
-        </p:spPr>
-        <p:style>
-          <a:lnRef idx="2">
-            <a:schemeClr val="accent1">
-              <a:shade val="50000"/>
-            </a:schemeClr>
-          </a:lnRef>
-          <a:fillRef idx="1">
-            <a:schemeClr val="accent1"/>
-          </a:fillRef>
-          <a:effectRef idx="0">
-            <a:schemeClr val="accent1"/>
-          </a:effectRef>
-          <a:fontRef idx="minor">
-            <a:schemeClr val="lt1"/>
-          </a:fontRef>
-        </p:style>
-      </p:sp>
-      <p:sp>
-        <p:nvSpPr>
-          <p:cNvPr id="14" name="Rectangle 13">
-            <a:extLst>
-              <a:ext uri="{FF2B5EF4-FFF2-40B4-BE49-F238E27FC236}">
-                <a16:creationId xmlns:a16="http://schemas.microsoft.com/office/drawing/2014/main" id="{E95DA498-D9A2-4DA9-B9DA-B3776E08CF7E}"/>
-              </a:ext>
-            </a:extLst>
-          </p:cNvPr>
-          <p:cNvSpPr>
-            <a:spLocks noGrp="1" noRot="1" noChangeAspect="1" noMove="1" noResize="1" noEditPoints="1" noAdjustHandles="1" noChangeArrowheads="1" noChangeShapeType="1" noTextEdit="1"/>
-          </p:cNvSpPr>
-          <p:nvPr>
-            <p:extLst>
-              <p:ext uri="{386F3935-93C4-4BCD-93E2-E3B085C9AB24}">
-                <p16:designElem xmlns:p16="http://schemas.microsoft.com/office/powerpoint/2015/main" val="1"/>
-              </p:ext>
-            </p:extLst>
-          </p:nvPr>
-        </p:nvSpPr>
-        <p:spPr>
-          <a:xfrm>
-            <a:off x="15" y="6334316"/>
-            <a:ext cx="12191985" cy="66484"/>
-          </a:xfrm>
-          <a:prstGeom prst="rect">
-            <a:avLst/>
-          </a:prstGeom>
-          <a:solidFill>
-            <a:schemeClr val="accent1"/>
-          </a:solidFill>
-          <a:ln>
-            <a:noFill/>
-          </a:ln>
-        </p:spPr>
-        <p:style>
-          <a:lnRef idx="2">
-            <a:schemeClr val="accent1">
-              <a:shade val="50000"/>
-            </a:schemeClr>
-          </a:lnRef>
-          <a:fillRef idx="1">
-            <a:schemeClr val="accent1"/>
-          </a:fillRef>
-          <a:effectRef idx="0">
-            <a:schemeClr val="accent1"/>
-          </a:effectRef>
-          <a:fontRef idx="minor">
-            <a:schemeClr val="lt1"/>
-          </a:fontRef>
-        </p:style>
-      </p:sp>
-      <p:cxnSp>
-        <p:nvCxnSpPr>
-          <p:cNvPr id="16" name="Straight Connector 15">
-            <a:extLst>
-              <a:ext uri="{FF2B5EF4-FFF2-40B4-BE49-F238E27FC236}">
-                <a16:creationId xmlns:a16="http://schemas.microsoft.com/office/drawing/2014/main" id="{9C21570E-E159-49A6-9891-FA397B7A92D3}"/>
-              </a:ext>
-            </a:extLst>
-          </p:cNvPr>
-          <p:cNvCxnSpPr>
-            <a:cxnSpLocks noGrp="1" noRot="1" noChangeAspect="1" noMove="1" noResize="1" noEditPoints="1" noAdjustHandles="1" noChangeArrowheads="1" noChangeShapeType="1"/>
-          </p:cNvCxnSpPr>
-          <p:nvPr>
-            <p:extLst>
-              <p:ext uri="{386F3935-93C4-4BCD-93E2-E3B085C9AB24}">
-                <p16:designElem xmlns:p16="http://schemas.microsoft.com/office/powerpoint/2015/main" val="1"/>
-              </p:ext>
-            </p:extLst>
-          </p:nvPr>
-        </p:nvCxnSpPr>
-        <p:spPr>
-          <a:xfrm>
-            <a:off x="6411684" y="2086188"/>
-            <a:ext cx="4748808" cy="0"/>
-          </a:xfrm>
-          <a:prstGeom prst="line">
-            <a:avLst/>
-          </a:prstGeom>
-          <a:ln w="6350">
-            <a:solidFill>
-              <a:schemeClr val="tx1">
-                <a:lumMod val="50000"/>
-                <a:lumOff val="50000"/>
-                <a:alpha val="90000"/>
-              </a:schemeClr>
-            </a:solidFill>
-          </a:ln>
-        </p:spPr>
-        <p:style>
-          <a:lnRef idx="1">
-            <a:schemeClr val="accent1"/>
-          </a:lnRef>
-          <a:fillRef idx="0">
-            <a:schemeClr val="accent1"/>
-          </a:fillRef>
-          <a:effectRef idx="0">
-            <a:schemeClr val="accent1"/>
-          </a:effectRef>
-          <a:fontRef idx="minor">
-            <a:schemeClr val="tx1"/>
-          </a:fontRef>
-        </p:style>
-      </p:cxnSp>
       <p:pic>
         <p:nvPicPr>
           <p:cNvPr id="5" name="Picture 4" descr="A picture containing linedrawing&#10;&#10;Description generated with very high confidence"/>
@@ -12810,12 +13065,12 @@
         </p:spPr>
         <p:txBody>
           <a:bodyPr>
-            <a:normAutofit/>
+            <a:normAutofit fontScale="90000"/>
           </a:bodyPr>
           <a:lstStyle/>
           <a:p>
             <a:r>
-              <a:rPr lang="ru-RU" sz="3400"/>
+              <a:rPr lang="ru-RU" sz="3400" dirty="0"/>
               <a:t>Недостатки субъективной вероятности</a:t>
             </a:r>
           </a:p>
@@ -12856,6 +13111,35 @@
       </p:sp>
       <p:sp>
         <p:nvSpPr>
+          <p:cNvPr id="6" name="Footer Placeholder 5">
+            <a:extLst>
+              <a:ext uri="{FF2B5EF4-FFF2-40B4-BE49-F238E27FC236}">
+                <a16:creationId xmlns:a16="http://schemas.microsoft.com/office/drawing/2014/main" id="{CA79006F-2D84-410B-A935-1E464DA03E4A}"/>
+              </a:ext>
+            </a:extLst>
+          </p:cNvPr>
+          <p:cNvSpPr>
+            <a:spLocks noGrp="1"/>
+          </p:cNvSpPr>
+          <p:nvPr>
+            <p:ph type="ftr" sz="quarter" idx="11"/>
+          </p:nvPr>
+        </p:nvSpPr>
+        <p:spPr/>
+        <p:txBody>
+          <a:bodyPr/>
+          <a:lstStyle/>
+          <a:p>
+            <a:r>
+              <a:rPr lang="ru-RU"/>
+              <a:t>Лекция 1: введение в теорию вероятности</a:t>
+            </a:r>
+            <a:endParaRPr lang="en-US" dirty="0"/>
+          </a:p>
+        </p:txBody>
+      </p:sp>
+      <p:sp>
+        <p:nvSpPr>
           <p:cNvPr id="4" name="Slide Number Placeholder 3"/>
           <p:cNvSpPr>
             <a:spLocks noGrp="1"/>
@@ -12864,15 +13148,10 @@
             <p:ph type="sldNum" sz="quarter" idx="12"/>
           </p:nvPr>
         </p:nvSpPr>
-        <p:spPr>
-          <a:xfrm>
-            <a:off x="9900458" y="6459785"/>
-            <a:ext cx="1312025" cy="365125"/>
-          </a:xfrm>
-        </p:spPr>
+        <p:spPr/>
         <p:txBody>
           <a:bodyPr>
-            <a:normAutofit/>
+            <a:normAutofit lnSpcReduction="10000"/>
           </a:bodyPr>
           <a:lstStyle/>
           <a:p>
@@ -12894,35 +13173,6 @@
           </a:p>
         </p:txBody>
       </p:sp>
-      <p:sp>
-        <p:nvSpPr>
-          <p:cNvPr id="6" name="Footer Placeholder 5">
-            <a:extLst>
-              <a:ext uri="{FF2B5EF4-FFF2-40B4-BE49-F238E27FC236}">
-                <a16:creationId xmlns:a16="http://schemas.microsoft.com/office/drawing/2014/main" id="{CA79006F-2D84-410B-A935-1E464DA03E4A}"/>
-              </a:ext>
-            </a:extLst>
-          </p:cNvPr>
-          <p:cNvSpPr>
-            <a:spLocks noGrp="1"/>
-          </p:cNvSpPr>
-          <p:nvPr>
-            <p:ph type="ftr" sz="quarter" idx="11"/>
-          </p:nvPr>
-        </p:nvSpPr>
-        <p:spPr/>
-        <p:txBody>
-          <a:bodyPr/>
-          <a:lstStyle/>
-          <a:p>
-            <a:r>
-              <a:rPr lang="ru-RU"/>
-              <a:t>Лекция 1: введение в теорию вероятности</a:t>
-            </a:r>
-            <a:endParaRPr lang="en-US" dirty="0"/>
-          </a:p>
-        </p:txBody>
-      </p:sp>
     </p:spTree>
     <p:extLst>
       <p:ext uri="{BB962C8B-B14F-4D97-AF65-F5344CB8AC3E}">
@@ -12937,93 +13187,58 @@
 </file>
 
 <file path=ppt/theme/theme1.xml><?xml version="1.0" encoding="utf-8"?>
-<a:theme xmlns:a="http://schemas.openxmlformats.org/drawingml/2006/main" name="Retrospect">
+<a:theme xmlns:a="http://schemas.openxmlformats.org/drawingml/2006/main" name="View">
   <a:themeElements>
-    <a:clrScheme name="Retrospect">
+    <a:clrScheme name="View">
       <a:dk1>
         <a:srgbClr val="000000"/>
       </a:dk1>
       <a:lt1>
-        <a:sysClr val="window" lastClr="FFFFFF"/>
+        <a:srgbClr val="FFFFFF"/>
       </a:lt1>
       <a:dk2>
-        <a:srgbClr val="637052"/>
+        <a:srgbClr val="46464A"/>
       </a:dk2>
       <a:lt2>
-        <a:srgbClr val="CCDDEA"/>
+        <a:srgbClr val="D6D3CC"/>
       </a:lt2>
       <a:accent1>
-        <a:srgbClr val="E48312"/>
+        <a:srgbClr val="6F6F74"/>
       </a:accent1>
       <a:accent2>
-        <a:srgbClr val="BD582C"/>
+        <a:srgbClr val="92A9B9"/>
       </a:accent2>
       <a:accent3>
-        <a:srgbClr val="865640"/>
+        <a:srgbClr val="A7B789"/>
       </a:accent3>
       <a:accent4>
-        <a:srgbClr val="9B8357"/>
+        <a:srgbClr val="B9A489"/>
       </a:accent4>
       <a:accent5>
-        <a:srgbClr val="C2BC80"/>
+        <a:srgbClr val="8D6374"/>
       </a:accent5>
       <a:accent6>
-        <a:srgbClr val="94A088"/>
+        <a:srgbClr val="9B7362"/>
       </a:accent6>
       <a:hlink>
-        <a:srgbClr val="2998E3"/>
+        <a:srgbClr val="67AABF"/>
       </a:hlink>
       <a:folHlink>
-        <a:srgbClr val="8C8C8C"/>
+        <a:srgbClr val="ABAFA5"/>
       </a:folHlink>
     </a:clrScheme>
-    <a:fontScheme name="Retrospect">
+    <a:fontScheme name="View">
       <a:majorFont>
-        <a:latin typeface="Calibri Light" panose="020F0302020204030204"/>
+        <a:latin typeface="Century Schoolbook" panose="02040604050505020304"/>
         <a:ea typeface=""/>
         <a:cs typeface=""/>
-        <a:font script="Jpan" typeface="ＭＳ Ｐゴシック"/>
+        <a:font script="Jpan" typeface="ＭＳ ゴシック"/>
         <a:font script="Hang" typeface="맑은 고딕"/>
         <a:font script="Hans" typeface="宋体"/>
         <a:font script="Hant" typeface="新細明體"/>
-        <a:font script="Arab" typeface="Times New Roman"/>
-        <a:font script="Hebr" typeface="Times New Roman"/>
-        <a:font script="Thai" typeface="Angsana New"/>
-        <a:font script="Ethi" typeface="Nyala"/>
-        <a:font script="Beng" typeface="Vrinda"/>
-        <a:font script="Gujr" typeface="Shruti"/>
-        <a:font script="Khmr" typeface="MoolBoran"/>
-        <a:font script="Knda" typeface="Tunga"/>
-        <a:font script="Guru" typeface="Raavi"/>
-        <a:font script="Cans" typeface="Euphemia"/>
-        <a:font script="Cher" typeface="Plantagenet Cherokee"/>
-        <a:font script="Yiii" typeface="Microsoft Yi Baiti"/>
-        <a:font script="Tibt" typeface="Microsoft Himalaya"/>
-        <a:font script="Thaa" typeface="MV Boli"/>
-        <a:font script="Deva" typeface="Mangal"/>
-        <a:font script="Telu" typeface="Gautami"/>
-        <a:font script="Taml" typeface="Latha"/>
-        <a:font script="Syrc" typeface="Estrangelo Edessa"/>
-        <a:font script="Orya" typeface="Kalinga"/>
-        <a:font script="Mlym" typeface="Kartika"/>
-        <a:font script="Laoo" typeface="DokChampa"/>
-        <a:font script="Sinh" typeface="Iskoola Pota"/>
-        <a:font script="Mong" typeface="Mongolian Baiti"/>
-        <a:font script="Viet" typeface="Times New Roman"/>
-        <a:font script="Uigh" typeface="Microsoft Uighur"/>
-        <a:font script="Geor" typeface="Sylfaen"/>
-      </a:majorFont>
-      <a:minorFont>
-        <a:latin typeface="Calibri" panose="020F0502020204030204"/>
-        <a:ea typeface=""/>
-        <a:cs typeface=""/>
-        <a:font script="Jpan" typeface="ＭＳ Ｐゴシック"/>
-        <a:font script="Hang" typeface="맑은 고딕"/>
-        <a:font script="Hans" typeface="宋体"/>
-        <a:font script="Hant" typeface="新細明體"/>
-        <a:font script="Arab" typeface="Arial"/>
-        <a:font script="Hebr" typeface="Arial"/>
-        <a:font script="Thai" typeface="Cordia New"/>
+        <a:font script="Arab" typeface="Tahoma"/>
+        <a:font script="Hebr" typeface="Gisha"/>
+        <a:font script="Thai" typeface="DilleniaUPC"/>
         <a:font script="Ethi" typeface="Nyala"/>
         <a:font script="Beng" typeface="Vrinda"/>
         <a:font script="Gujr" typeface="Shruti"/>
@@ -13044,93 +13259,84 @@
         <a:font script="Laoo" typeface="DokChampa"/>
         <a:font script="Sinh" typeface="Iskoola Pota"/>
         <a:font script="Mong" typeface="Mongolian Baiti"/>
-        <a:font script="Viet" typeface="Arial"/>
+        <a:font script="Viet" typeface="Tahoma"/>
+        <a:font script="Uigh" typeface="Microsoft Uighur"/>
+        <a:font script="Geor" typeface="Sylfaen"/>
+      </a:majorFont>
+      <a:minorFont>
+        <a:latin typeface="Century Schoolbook" panose="02040604050505020304"/>
+        <a:ea typeface=""/>
+        <a:cs typeface=""/>
+        <a:font script="Jpan" typeface="ＭＳ ゴシック"/>
+        <a:font script="Hang" typeface="맑은 고딕"/>
+        <a:font script="Hans" typeface="宋体"/>
+        <a:font script="Hant" typeface="新細明體"/>
+        <a:font script="Arab" typeface="Tahoma"/>
+        <a:font script="Hebr" typeface="Gisha"/>
+        <a:font script="Thai" typeface="DilleniaUPC"/>
+        <a:font script="Ethi" typeface="Nyala"/>
+        <a:font script="Beng" typeface="Vrinda"/>
+        <a:font script="Gujr" typeface="Shruti"/>
+        <a:font script="Khmr" typeface="DaunPenh"/>
+        <a:font script="Knda" typeface="Tunga"/>
+        <a:font script="Guru" typeface="Raavi"/>
+        <a:font script="Cans" typeface="Euphemia"/>
+        <a:font script="Cher" typeface="Plantagenet Cherokee"/>
+        <a:font script="Yiii" typeface="Microsoft Yi Baiti"/>
+        <a:font script="Tibt" typeface="Microsoft Himalaya"/>
+        <a:font script="Thaa" typeface="MV Boli"/>
+        <a:font script="Deva" typeface="Mangal"/>
+        <a:font script="Telu" typeface="Gautami"/>
+        <a:font script="Taml" typeface="Latha"/>
+        <a:font script="Syrc" typeface="Estrangelo Edessa"/>
+        <a:font script="Orya" typeface="Kalinga"/>
+        <a:font script="Mlym" typeface="Kartika"/>
+        <a:font script="Laoo" typeface="DokChampa"/>
+        <a:font script="Sinh" typeface="Iskoola Pota"/>
+        <a:font script="Mong" typeface="Mongolian Baiti"/>
+        <a:font script="Viet" typeface="Verdana"/>
         <a:font script="Uigh" typeface="Microsoft Uighur"/>
         <a:font script="Geor" typeface="Sylfaen"/>
       </a:minorFont>
     </a:fontScheme>
-    <a:fmtScheme name="Retrospect">
+    <a:fmtScheme name="View">
       <a:fillStyleLst>
         <a:solidFill>
           <a:schemeClr val="phClr"/>
         </a:solidFill>
-        <a:gradFill rotWithShape="1">
-          <a:gsLst>
-            <a:gs pos="0">
-              <a:schemeClr val="phClr">
-                <a:tint val="65000"/>
-                <a:shade val="92000"/>
-                <a:satMod val="130000"/>
-              </a:schemeClr>
-            </a:gs>
-            <a:gs pos="45000">
-              <a:schemeClr val="phClr">
-                <a:tint val="60000"/>
-                <a:shade val="99000"/>
-                <a:satMod val="120000"/>
-              </a:schemeClr>
-            </a:gs>
-            <a:gs pos="100000">
-              <a:schemeClr val="phClr">
-                <a:tint val="55000"/>
-                <a:satMod val="140000"/>
-              </a:schemeClr>
-            </a:gs>
-          </a:gsLst>
-          <a:path path="circle">
-            <a:fillToRect l="100000" t="100000" r="100000" b="100000"/>
-          </a:path>
-        </a:gradFill>
-        <a:gradFill rotWithShape="1">
-          <a:gsLst>
-            <a:gs pos="0">
-              <a:schemeClr val="phClr">
-                <a:shade val="85000"/>
-                <a:satMod val="130000"/>
-              </a:schemeClr>
-            </a:gs>
-            <a:gs pos="34000">
-              <a:schemeClr val="phClr">
-                <a:shade val="87000"/>
-                <a:satMod val="125000"/>
-              </a:schemeClr>
-            </a:gs>
-            <a:gs pos="70000">
-              <a:schemeClr val="phClr">
-                <a:tint val="100000"/>
-                <a:shade val="90000"/>
-                <a:satMod val="130000"/>
-              </a:schemeClr>
-            </a:gs>
-            <a:gs pos="100000">
-              <a:schemeClr val="phClr">
-                <a:tint val="100000"/>
-                <a:shade val="100000"/>
-                <a:satMod val="110000"/>
-              </a:schemeClr>
-            </a:gs>
-          </a:gsLst>
-          <a:path path="circle">
-            <a:fillToRect l="100000" t="100000" r="100000" b="100000"/>
-          </a:path>
-        </a:gradFill>
+        <a:solidFill>
+          <a:schemeClr val="phClr">
+            <a:tint val="60000"/>
+            <a:satMod val="120000"/>
+          </a:schemeClr>
+        </a:solidFill>
+        <a:solidFill>
+          <a:schemeClr val="phClr">
+            <a:shade val="75000"/>
+            <a:satMod val="160000"/>
+          </a:schemeClr>
+        </a:solidFill>
       </a:fillStyleLst>
       <a:lnStyleLst>
-        <a:ln w="12700" cap="flat" cmpd="sng" algn="ctr">
+        <a:ln w="9525" cap="flat" cmpd="sng" algn="ctr">
           <a:solidFill>
             <a:schemeClr val="phClr"/>
           </a:solidFill>
           <a:prstDash val="solid"/>
         </a:ln>
-        <a:ln w="15875" cap="flat" cmpd="sng" algn="ctr">
+        <a:ln w="13970" cap="flat" cmpd="sng" algn="ctr">
           <a:solidFill>
             <a:schemeClr val="phClr"/>
           </a:solidFill>
           <a:prstDash val="solid"/>
         </a:ln>
-        <a:ln w="25400" cap="flat" cmpd="sng" algn="ctr">
+        <a:ln w="17145" cap="flat" cmpd="sng" algn="ctr">
           <a:solidFill>
-            <a:schemeClr val="phClr"/>
+            <a:schemeClr val="phClr">
+              <a:shade val="95000"/>
+              <a:alpha val="95000"/>
+              <a:satMod val="150000"/>
+            </a:schemeClr>
           </a:solidFill>
           <a:prstDash val="solid"/>
         </a:ln>
@@ -13141,18 +13347,9 @@
         </a:effectStyle>
         <a:effectStyle>
           <a:effectLst>
-            <a:outerShdw blurRad="38100" dist="25400" dir="2700000" algn="br" rotWithShape="0">
+            <a:outerShdw blurRad="50800" dist="15240" dir="5400000" algn="tl" rotWithShape="0">
               <a:srgbClr val="000000">
-                <a:alpha val="60000"/>
-              </a:srgbClr>
-            </a:outerShdw>
-          </a:effectLst>
-        </a:effectStyle>
-        <a:effectStyle>
-          <a:effectLst>
-            <a:outerShdw blurRad="44450" dist="25400" dir="2700000" algn="br" rotWithShape="0">
-              <a:srgbClr val="000000">
-                <a:alpha val="60000"/>
+                <a:alpha val="75000"/>
               </a:srgbClr>
             </a:outerShdw>
           </a:effectLst>
@@ -13160,12 +13357,40 @@
             <a:camera prst="orthographicFront">
               <a:rot lat="0" lon="0" rev="0"/>
             </a:camera>
-            <a:lightRig rig="threePt" dir="t">
-              <a:rot lat="0" lon="0" rev="19800000"/>
-            </a:lightRig>
+            <a:lightRig rig="brightRoom" dir="tl"/>
           </a:scene3d>
-          <a:sp3d prstMaterial="flat">
-            <a:bevelT w="25400" h="31750"/>
+          <a:sp3d contourW="9525" prstMaterial="flat">
+            <a:bevelT w="0" h="0" prst="coolSlant"/>
+            <a:contourClr>
+              <a:schemeClr val="phClr">
+                <a:shade val="35000"/>
+                <a:satMod val="130000"/>
+              </a:schemeClr>
+            </a:contourClr>
+          </a:sp3d>
+        </a:effectStyle>
+        <a:effectStyle>
+          <a:effectLst>
+            <a:outerShdw blurRad="76200" dist="25400" dir="5400000" algn="tl" rotWithShape="0">
+              <a:srgbClr val="000000">
+                <a:alpha val="55000"/>
+              </a:srgbClr>
+            </a:outerShdw>
+          </a:effectLst>
+          <a:scene3d>
+            <a:camera prst="orthographicFront">
+              <a:rot lat="0" lon="0" rev="0"/>
+            </a:camera>
+            <a:lightRig rig="brightRoom" dir="tl"/>
+          </a:scene3d>
+          <a:sp3d contourW="19050" prstMaterial="flat">
+            <a:bevelT w="0" h="0" prst="coolSlant"/>
+            <a:contourClr>
+              <a:schemeClr val="phClr">
+                <a:shade val="25000"/>
+                <a:satMod val="140000"/>
+              </a:schemeClr>
+            </a:contourClr>
           </a:sp3d>
         </a:effectStyle>
       </a:effectStyleLst>
@@ -13175,36 +13400,31 @@
         </a:solidFill>
         <a:solidFill>
           <a:schemeClr val="phClr">
-            <a:tint val="90000"/>
-            <a:shade val="97000"/>
-            <a:satMod val="130000"/>
+            <a:tint val="95000"/>
+            <a:satMod val="170000"/>
           </a:schemeClr>
         </a:solidFill>
         <a:gradFill rotWithShape="1">
           <a:gsLst>
             <a:gs pos="0">
               <a:schemeClr val="phClr">
-                <a:tint val="96000"/>
-                <a:shade val="99000"/>
-                <a:satMod val="140000"/>
-              </a:schemeClr>
-            </a:gs>
-            <a:gs pos="65000">
-              <a:schemeClr val="phClr">
-                <a:tint val="100000"/>
-                <a:shade val="80000"/>
+                <a:tint val="94000"/>
+                <a:shade val="98000"/>
                 <a:satMod val="130000"/>
+                <a:lumMod val="102000"/>
               </a:schemeClr>
             </a:gs>
             <a:gs pos="100000">
               <a:schemeClr val="phClr">
-                <a:tint val="100000"/>
-                <a:shade val="48000"/>
-                <a:satMod val="120000"/>
+                <a:tint val="98000"/>
+                <a:shade val="78000"/>
+                <a:satMod val="140000"/>
               </a:schemeClr>
             </a:gs>
           </a:gsLst>
-          <a:lin ang="16200000" scaled="0"/>
+          <a:path path="circle">
+            <a:fillToRect l="100000" t="100000" r="100000" b="100000"/>
+          </a:path>
         </a:gradFill>
       </a:bgFillStyleLst>
     </a:fmtScheme>
@@ -13213,7 +13433,7 @@
   <a:extraClrSchemeLst/>
   <a:extLst>
     <a:ext uri="{05A4C25C-085E-4340-85A3-A5531E510DB2}">
-      <thm15:themeFamily xmlns:thm15="http://schemas.microsoft.com/office/thememl/2012/main" name="Retrospect" id="{5F128B03-DCCA-4EEB-AB3B-CF2899314A46}" vid="{3F1AAB62-24C6-49D2-8E01-B56FAC9A3DCD}"/>
+      <thm15:themeFamily xmlns:thm15="http://schemas.microsoft.com/office/thememl/2012/main" name="View" id="{BA0EB5A6-F2D4-4F82-977B-64ADEE4A2A69}" vid="{3969A8A2-35DB-4E3B-8885-16FD20568674}"/>
     </a:ext>
   </a:extLst>
 </a:theme>
